--- a/teco/PE/東元PE_AI_Agent導入規劃簡報.pptx
+++ b/teco/PE/東元PE_AI_Agent導入規劃簡報.pptx
@@ -4,6 +4,9 @@
   <p:sldMasterIdLst>
     <p:sldMasterId id="2147483648" r:id="rId1"/>
   </p:sldMasterIdLst>
+  <p:notesMasterIdLst>
+    <p:notesMasterId r:id="rId20"/>
+  </p:notesMasterIdLst>
   <p:sldIdLst>
     <p:sldId id="256" r:id="rId2"/>
     <p:sldId id="257" r:id="rId3"/>
@@ -24,9 +27,6 @@
     <p:sldId id="272" r:id="rId18"/>
     <p:sldId id="273" r:id="rId19"/>
   </p:sldIdLst>
-  <p:notesMasterIdLst>
-    <p:notesMasterId r:id="rId20"/>
-  </p:notesMasterIdLst>
   <p:sldSz cx="12192000" cy="6858000"/>
   <p:notesSz cx="6858000" cy="12192000"/>
   <p:defaultTextStyle>
@@ -121,6 +121,11 @@
       </a:defRPr>
     </a:lvl9pPr>
   </p:defaultTextStyle>
+  <p:extLst>
+    <p:ext uri="{EFAFB233-063F-42B5-8137-9DF3F51BA10A}">
+      <p15:sldGuideLst xmlns:p15="http://schemas.microsoft.com/office/powerpoint/2012/main"/>
+    </p:ext>
+  </p:extLst>
 </p:presentation>
 </file>
 
@@ -146,234 +151,10 @@
           <a:chExt cx="0" cy="0"/>
         </a:xfrm>
       </p:grpSpPr>
-      <p:sp>
-        <p:nvSpPr>
-          <p:cNvPr id="2" name="Header Placeholder 1"/>
-          <p:cNvSpPr>
-            <a:spLocks noGrp="1"/>
-          </p:cNvSpPr>
-          <p:nvPr>
-            <p:ph type="hdr" sz="quarter"/>
-          </p:nvPr>
-        </p:nvSpPr>
-        <p:spPr>
-          <a:xfrm>
-            <a:off x="0" y="0"/>
-            <a:ext cx="2971800" cy="458788"/>
-          </a:xfrm>
-          <a:prstGeom prst="rect">
-            <a:avLst/>
-          </a:prstGeom>
-        </p:spPr>
-        <p:txBody>
-          <a:bodyPr vert="horz" lIns="91440" tIns="45720" rIns="91440" bIns="45720" rtlCol="0"/>
-          <a:lstStyle>
-            <a:lvl1pPr algn="l">
-              <a:defRPr sz="1200"/>
-            </a:lvl1pPr>
-          </a:lstStyle>
-          <a:p>
-            <a:endParaRPr lang="en-US"/>
-          </a:p>
-        </p:txBody>
-      </p:sp>
-      <p:sp>
-        <p:nvSpPr>
-          <p:cNvPr id="3" name="Date Placeholder 2"/>
-          <p:cNvSpPr>
-            <a:spLocks noGrp="1"/>
-          </p:cNvSpPr>
-          <p:nvPr>
-            <p:ph type="dt" idx="1"/>
-          </p:nvPr>
-        </p:nvSpPr>
-        <p:spPr>
-          <a:xfrm>
-            <a:off x="3884613" y="0"/>
-            <a:ext cx="2971800" cy="458788"/>
-          </a:xfrm>
-          <a:prstGeom prst="rect">
-            <a:avLst/>
-          </a:prstGeom>
-        </p:spPr>
-        <p:txBody>
-          <a:bodyPr vert="horz" lIns="91440" tIns="45720" rIns="91440" bIns="45720" rtlCol="0"/>
-          <a:lstStyle>
-            <a:lvl1pPr algn="r">
-              <a:defRPr sz="1200"/>
-            </a:lvl1pPr>
-          </a:lstStyle>
-          <a:p>
-            <a:fld id="{5282F153-3F37-0F45-9E97-73ACFA13230C}" type="datetimeFigureOut">
-              <a:rPr lang="en-US"/>
-              <a:t>7/23/19</a:t>
-            </a:fld>
-            <a:endParaRPr lang="en-US"/>
-          </a:p>
-        </p:txBody>
-      </p:sp>
-      <p:sp>
-        <p:nvSpPr>
-          <p:cNvPr id="4" name="Slide Image Placeholder 3"/>
-          <p:cNvSpPr>
-            <a:spLocks noGrp="1" noRot="1" noChangeAspect="1"/>
-          </p:cNvSpPr>
-          <p:nvPr>
-            <p:ph type="sldImg" idx="2"/>
-          </p:nvPr>
-        </p:nvSpPr>
-        <p:spPr>
-          <a:xfrm>
-            <a:off x="685800" y="1143000"/>
-            <a:ext cx="5486400" cy="3086100"/>
-          </a:xfrm>
-          <a:prstGeom prst="rect">
-            <a:avLst/>
-          </a:prstGeom>
-          <a:noFill/>
-          <a:ln w="12700">
-            <a:solidFill>
-              <a:prstClr val="black"/>
-            </a:solidFill>
-          </a:ln>
-        </p:spPr>
-        <p:txBody>
-          <a:bodyPr vert="horz" lIns="91440" tIns="45720" rIns="91440" bIns="45720" rtlCol="0" anchor="ctr"/>
-          <a:lstStyle/>
-          <a:p>
-            <a:endParaRPr lang="en-US"/>
-          </a:p>
-        </p:txBody>
-      </p:sp>
-      <p:sp>
-        <p:nvSpPr>
-          <p:cNvPr id="5" name="Notes Placeholder 4"/>
-          <p:cNvSpPr>
-            <a:spLocks noGrp="1"/>
-          </p:cNvSpPr>
-          <p:nvPr>
-            <p:ph type="body" sz="quarter" idx="3"/>
-          </p:nvPr>
-        </p:nvSpPr>
-        <p:spPr>
-          <a:xfrm>
-            <a:off x="685800" y="4400550"/>
-            <a:ext cx="5486400" cy="3600450"/>
-          </a:xfrm>
-          <a:prstGeom prst="rect">
-            <a:avLst/>
-          </a:prstGeom>
-        </p:spPr>
-        <p:txBody>
-          <a:bodyPr vert="horz" lIns="91440" tIns="45720" rIns="91440" bIns="45720" rtlCol="0"/>
-          <a:lstStyle/>
-          <a:p>
-            <a:pPr lvl="0"/>
-            <a:r>
-              <a:rPr lang="en-US"/>
-              <a:t>Click to edit Master text styles</a:t>
-            </a:r>
-          </a:p>
-          <a:p>
-            <a:pPr lvl="1"/>
-            <a:r>
-              <a:rPr lang="en-US"/>
-              <a:t>Second level</a:t>
-            </a:r>
-          </a:p>
-          <a:p>
-            <a:pPr lvl="2"/>
-            <a:r>
-              <a:rPr lang="en-US"/>
-              <a:t>Third level</a:t>
-            </a:r>
-          </a:p>
-          <a:p>
-            <a:pPr lvl="3"/>
-            <a:r>
-              <a:rPr lang="en-US"/>
-              <a:t>Fourth level</a:t>
-            </a:r>
-          </a:p>
-          <a:p>
-            <a:pPr lvl="4"/>
-            <a:r>
-              <a:rPr lang="en-US"/>
-              <a:t>Fifth level</a:t>
-            </a:r>
-          </a:p>
-        </p:txBody>
-      </p:sp>
-      <p:sp>
-        <p:nvSpPr>
-          <p:cNvPr id="6" name="Footer Placeholder 5"/>
-          <p:cNvSpPr>
-            <a:spLocks noGrp="1"/>
-          </p:cNvSpPr>
-          <p:nvPr>
-            <p:ph type="ftr" sz="quarter" idx="4"/>
-          </p:nvPr>
-        </p:nvSpPr>
-        <p:spPr>
-          <a:xfrm>
-            <a:off x="0" y="8685213"/>
-            <a:ext cx="2971800" cy="458787"/>
-          </a:xfrm>
-          <a:prstGeom prst="rect">
-            <a:avLst/>
-          </a:prstGeom>
-        </p:spPr>
-        <p:txBody>
-          <a:bodyPr vert="horz" lIns="91440" tIns="45720" rIns="91440" bIns="45720" rtlCol="0" anchor="b"/>
-          <a:lstStyle>
-            <a:lvl1pPr algn="l">
-              <a:defRPr sz="1200"/>
-            </a:lvl1pPr>
-          </a:lstStyle>
-          <a:p>
-            <a:endParaRPr lang="en-US"/>
-          </a:p>
-        </p:txBody>
-      </p:sp>
-      <p:sp>
-        <p:nvSpPr>
-          <p:cNvPr id="7" name="Slide Number Placeholder 6"/>
-          <p:cNvSpPr>
-            <a:spLocks noGrp="1"/>
-          </p:cNvSpPr>
-          <p:nvPr>
-            <p:ph type="sldNum" sz="quarter" idx="5"/>
-          </p:nvPr>
-        </p:nvSpPr>
-        <p:spPr>
-          <a:xfrm>
-            <a:off x="3884613" y="8685213"/>
-            <a:ext cx="2971800" cy="458787"/>
-          </a:xfrm>
-          <a:prstGeom prst="rect">
-            <a:avLst/>
-          </a:prstGeom>
-        </p:spPr>
-        <p:txBody>
-          <a:bodyPr vert="horz" lIns="91440" tIns="45720" rIns="91440" bIns="45720" rtlCol="0" anchor="b"/>
-          <a:lstStyle>
-            <a:lvl1pPr algn="r">
-              <a:defRPr sz="1200"/>
-            </a:lvl1pPr>
-          </a:lstStyle>
-          <a:p>
-            <a:fld id="{CE5E9CC1-C706-0F49-92D6-E571CC5EEA8F}" type="slidenum">
-              <a:rPr lang="en-US"/>
-              <a:t>‹#›</a:t>
-            </a:fld>
-            <a:endParaRPr lang="en-US"/>
-          </a:p>
-        </p:txBody>
-      </p:sp>
     </p:spTree>
     <p:extLst>
       <p:ext uri="{BB962C8B-B14F-4D97-AF65-F5344CB8AC3E}">
-        <p14:creationId xmlns:p14="http://schemas.microsoft.com/office/powerpoint/2010/main" val="1024086991"/>
+        <p14:creationId xmlns:p14="http://schemas.microsoft.com/office/powerpoint/2010/main" val="587889012"/>
       </p:ext>
     </p:extLst>
   </p:cSld>
@@ -517,10 +298,6 @@
           <a:bodyPr/>
           <a:lstStyle/>
           <a:p>
-            <a:r>
-              <a:rPr lang="en-US" dirty="0"/>
-              <a:t/>
-            </a:r>
             <a:endParaRPr lang="en-US" dirty="0"/>
           </a:p>
         </p:txBody>
@@ -605,10 +382,6 @@
           <a:bodyPr/>
           <a:lstStyle/>
           <a:p>
-            <a:r>
-              <a:rPr lang="en-US" dirty="0"/>
-              <a:t/>
-            </a:r>
             <a:endParaRPr lang="en-US" dirty="0"/>
           </a:p>
         </p:txBody>
@@ -693,10 +466,6 @@
           <a:bodyPr/>
           <a:lstStyle/>
           <a:p>
-            <a:r>
-              <a:rPr lang="en-US" dirty="0"/>
-              <a:t/>
-            </a:r>
             <a:endParaRPr lang="en-US" dirty="0"/>
           </a:p>
         </p:txBody>
@@ -781,10 +550,6 @@
           <a:bodyPr/>
           <a:lstStyle/>
           <a:p>
-            <a:r>
-              <a:rPr lang="en-US" dirty="0"/>
-              <a:t/>
-            </a:r>
             <a:endParaRPr lang="en-US" dirty="0"/>
           </a:p>
         </p:txBody>
@@ -869,10 +634,6 @@
           <a:bodyPr/>
           <a:lstStyle/>
           <a:p>
-            <a:r>
-              <a:rPr lang="en-US" dirty="0"/>
-              <a:t/>
-            </a:r>
             <a:endParaRPr lang="en-US" dirty="0"/>
           </a:p>
         </p:txBody>
@@ -957,10 +718,6 @@
           <a:bodyPr/>
           <a:lstStyle/>
           <a:p>
-            <a:r>
-              <a:rPr lang="en-US" dirty="0"/>
-              <a:t/>
-            </a:r>
             <a:endParaRPr lang="en-US" dirty="0"/>
           </a:p>
         </p:txBody>
@@ -1045,10 +802,6 @@
           <a:bodyPr/>
           <a:lstStyle/>
           <a:p>
-            <a:r>
-              <a:rPr lang="en-US" dirty="0"/>
-              <a:t/>
-            </a:r>
             <a:endParaRPr lang="en-US" dirty="0"/>
           </a:p>
         </p:txBody>
@@ -1133,10 +886,6 @@
           <a:bodyPr/>
           <a:lstStyle/>
           <a:p>
-            <a:r>
-              <a:rPr lang="en-US" dirty="0"/>
-              <a:t/>
-            </a:r>
             <a:endParaRPr lang="en-US" dirty="0"/>
           </a:p>
         </p:txBody>
@@ -1221,10 +970,6 @@
           <a:bodyPr/>
           <a:lstStyle/>
           <a:p>
-            <a:r>
-              <a:rPr lang="en-US" dirty="0"/>
-              <a:t/>
-            </a:r>
             <a:endParaRPr lang="en-US" dirty="0"/>
           </a:p>
         </p:txBody>
@@ -1309,10 +1054,6 @@
           <a:bodyPr/>
           <a:lstStyle/>
           <a:p>
-            <a:r>
-              <a:rPr lang="en-US" dirty="0"/>
-              <a:t/>
-            </a:r>
             <a:endParaRPr lang="en-US" dirty="0"/>
           </a:p>
         </p:txBody>
@@ -1397,10 +1138,6 @@
           <a:bodyPr/>
           <a:lstStyle/>
           <a:p>
-            <a:r>
-              <a:rPr lang="en-US" dirty="0"/>
-              <a:t/>
-            </a:r>
             <a:endParaRPr lang="en-US" dirty="0"/>
           </a:p>
         </p:txBody>
@@ -1485,10 +1222,6 @@
           <a:bodyPr/>
           <a:lstStyle/>
           <a:p>
-            <a:r>
-              <a:rPr lang="en-US" dirty="0"/>
-              <a:t/>
-            </a:r>
             <a:endParaRPr lang="en-US" dirty="0"/>
           </a:p>
         </p:txBody>
@@ -1573,10 +1306,6 @@
           <a:bodyPr/>
           <a:lstStyle/>
           <a:p>
-            <a:r>
-              <a:rPr lang="en-US" dirty="0"/>
-              <a:t/>
-            </a:r>
             <a:endParaRPr lang="en-US" dirty="0"/>
           </a:p>
         </p:txBody>
@@ -1661,10 +1390,6 @@
           <a:bodyPr/>
           <a:lstStyle/>
           <a:p>
-            <a:r>
-              <a:rPr lang="en-US" dirty="0"/>
-              <a:t/>
-            </a:r>
             <a:endParaRPr lang="en-US" dirty="0"/>
           </a:p>
         </p:txBody>
@@ -1749,10 +1474,6 @@
           <a:bodyPr/>
           <a:lstStyle/>
           <a:p>
-            <a:r>
-              <a:rPr lang="en-US" dirty="0"/>
-              <a:t/>
-            </a:r>
             <a:endParaRPr lang="en-US" dirty="0"/>
           </a:p>
         </p:txBody>
@@ -1837,10 +1558,6 @@
           <a:bodyPr/>
           <a:lstStyle/>
           <a:p>
-            <a:r>
-              <a:rPr lang="en-US" dirty="0"/>
-              <a:t/>
-            </a:r>
             <a:endParaRPr lang="en-US" dirty="0"/>
           </a:p>
         </p:txBody>
@@ -1925,10 +1642,6 @@
           <a:bodyPr/>
           <a:lstStyle/>
           <a:p>
-            <a:r>
-              <a:rPr lang="en-US" dirty="0"/>
-              <a:t/>
-            </a:r>
             <a:endParaRPr lang="en-US" dirty="0"/>
           </a:p>
         </p:txBody>
@@ -2013,10 +1726,6 @@
           <a:bodyPr/>
           <a:lstStyle/>
           <a:p>
-            <a:r>
-              <a:rPr lang="en-US" dirty="0"/>
-              <a:t/>
-            </a:r>
             <a:endParaRPr lang="en-US" dirty="0"/>
           </a:p>
         </p:txBody>
@@ -2090,6 +1799,11 @@
 <file path=ppt/slideMasters/slideMaster1.xml><?xml version="1.0" encoding="utf-8"?>
 <p:sldMaster xmlns:a="http://schemas.openxmlformats.org/drawingml/2006/main" xmlns:r="http://schemas.openxmlformats.org/officeDocument/2006/relationships" xmlns:p="http://schemas.openxmlformats.org/presentationml/2006/main">
   <p:cSld>
+    <p:bg>
+      <p:bgRef idx="1001">
+        <a:schemeClr val="bg1"/>
+      </p:bgRef>
+    </p:bg>
     <p:spTree>
       <p:nvGrpSpPr>
         <p:cNvPr id="1" name=""/>
@@ -2372,6 +2086,7 @@
         <a:solidFill>
           <a:srgbClr val="8A7AD2"/>
         </a:solidFill>
+        <a:effectLst/>
       </p:bgPr>
     </p:bg>
     <p:spTree>
@@ -2412,6 +2127,13 @@
             <a:prstDash val="solid"/>
           </a:ln>
         </p:spPr>
+        <p:txBody>
+          <a:bodyPr/>
+          <a:lstStyle/>
+          <a:p>
+            <a:endParaRPr lang="zh-TW" altLang="en-US"/>
+          </a:p>
+        </p:txBody>
       </p:sp>
       <p:sp>
         <p:nvSpPr>
@@ -2434,7 +2156,7 @@
           <a:bodyPr wrap="square" lIns="0" tIns="0" rIns="0" bIns="0" rtlCol="0" anchor="ctr"/>
           <a:lstStyle/>
           <a:p>
-            <a:pPr indent="0" marL="0">
+            <a:pPr marL="0" indent="0">
               <a:buNone/>
             </a:pPr>
             <a:r>
@@ -2473,7 +2195,7 @@
           <a:bodyPr wrap="square" lIns="0" tIns="0" rIns="0" bIns="0" rtlCol="0" anchor="ctr"/>
           <a:lstStyle/>
           <a:p>
-            <a:pPr indent="0" marL="0">
+            <a:pPr marL="0" indent="0">
               <a:buNone/>
             </a:pPr>
             <a:r>
@@ -2512,7 +2234,7 @@
           <a:bodyPr wrap="square" lIns="0" tIns="0" rIns="0" bIns="0" rtlCol="0" anchor="ctr"/>
           <a:lstStyle/>
           <a:p>
-            <a:pPr indent="0" marL="0">
+            <a:pPr marL="0" indent="0">
               <a:buNone/>
             </a:pPr>
             <a:r>
@@ -2551,7 +2273,7 @@
           <a:bodyPr wrap="square" lIns="0" tIns="0" rIns="0" bIns="0" rtlCol="0" anchor="ctr"/>
           <a:lstStyle/>
           <a:p>
-            <a:pPr indent="0" marL="0">
+            <a:pPr marL="0" indent="0">
               <a:buNone/>
             </a:pPr>
             <a:r>
@@ -2591,6 +2313,13 @@
             <a:prstDash val="solid"/>
           </a:ln>
         </p:spPr>
+        <p:txBody>
+          <a:bodyPr/>
+          <a:lstStyle/>
+          <a:p>
+            <a:endParaRPr lang="zh-TW" altLang="en-US"/>
+          </a:p>
+        </p:txBody>
       </p:sp>
       <p:sp>
         <p:nvSpPr>
@@ -2613,7 +2342,7 @@
           <a:bodyPr wrap="square" lIns="0" tIns="0" rIns="0" bIns="0" rtlCol="0" anchor="ctr"/>
           <a:lstStyle/>
           <a:p>
-            <a:pPr indent="0" marL="0">
+            <a:pPr marL="0" indent="0">
               <a:buNone/>
             </a:pPr>
             <a:r>
@@ -2652,7 +2381,7 @@
           <a:bodyPr wrap="square" lIns="0" tIns="0" rIns="0" bIns="0" rtlCol="0" anchor="ctr"/>
           <a:lstStyle/>
           <a:p>
-            <a:pPr indent="0" marL="0">
+            <a:pPr marL="0" indent="0">
               <a:buNone/>
             </a:pPr>
             <a:r>
@@ -2691,7 +2420,7 @@
           <a:bodyPr wrap="square" lIns="0" tIns="0" rIns="0" bIns="0" rtlCol="0" anchor="ctr"/>
           <a:lstStyle/>
           <a:p>
-            <a:pPr indent="0" marL="0">
+            <a:pPr marL="0" indent="0">
               <a:buNone/>
             </a:pPr>
             <a:r>
@@ -2725,6 +2454,7 @@
         <a:solidFill>
           <a:srgbClr val="FFFFFF"/>
         </a:solidFill>
+        <a:effectLst/>
       </p:bgPr>
     </p:bg>
     <p:spTree>
@@ -2765,6 +2495,13 @@
             <a:prstDash val="solid"/>
           </a:ln>
         </p:spPr>
+        <p:txBody>
+          <a:bodyPr/>
+          <a:lstStyle/>
+          <a:p>
+            <a:endParaRPr lang="zh-TW" altLang="en-US"/>
+          </a:p>
+        </p:txBody>
       </p:sp>
       <p:sp>
         <p:nvSpPr>
@@ -2787,7 +2524,7 @@
           <a:bodyPr wrap="square" lIns="0" tIns="0" rIns="0" bIns="0" rtlCol="0" anchor="t"/>
           <a:lstStyle/>
           <a:p>
-            <a:pPr indent="0" marL="0">
+            <a:pPr marL="0" indent="0">
               <a:buNone/>
             </a:pPr>
             <a:r>
@@ -2826,7 +2563,7 @@
           <a:bodyPr wrap="square" lIns="0" tIns="0" rIns="0" bIns="0" rtlCol="0" anchor="ctr"/>
           <a:lstStyle/>
           <a:p>
-            <a:pPr indent="0" marL="0">
+            <a:pPr marL="0" indent="0">
               <a:buNone/>
             </a:pPr>
             <a:r>
@@ -2865,7 +2602,7 @@
           <a:bodyPr wrap="square" lIns="0" tIns="0" rIns="0" bIns="0" rtlCol="0" anchor="ctr"/>
           <a:lstStyle/>
           <a:p>
-            <a:pPr algn="r" indent="0" marL="0">
+            <a:pPr marL="0" indent="0" algn="r">
               <a:buNone/>
             </a:pPr>
             <a:r>
@@ -2904,7 +2641,7 @@
           <a:bodyPr wrap="square" lIns="0" tIns="0" rIns="0" bIns="0" rtlCol="0" anchor="ctr"/>
           <a:lstStyle/>
           <a:p>
-            <a:pPr algn="r" indent="0" marL="0">
+            <a:pPr marL="0" indent="0" algn="r">
               <a:buNone/>
             </a:pPr>
             <a:r>
@@ -2943,7 +2680,7 @@
           <a:bodyPr wrap="square" lIns="0" tIns="0" rIns="0" bIns="0" rtlCol="0" anchor="ctr"/>
           <a:lstStyle/>
           <a:p>
-            <a:pPr indent="0" marL="0">
+            <a:pPr marL="0" indent="0">
               <a:buNone/>
             </a:pPr>
             <a:r>
@@ -2977,17 +2714,41 @@
         </p:nvGraphicFramePr>
         <p:xfrm>
           <a:off x="457200" y="1828800"/>
-          <a:ext cx="6400800" cy="914400"/>
+          <a:ext cx="6400800" cy="1143000"/>
         </p:xfrm>
         <a:graphic>
           <a:graphicData uri="http://schemas.openxmlformats.org/drawingml/2006/table">
             <a:tbl>
               <a:tblPr/>
               <a:tblGrid>
-                <a:gridCol w="1371600"/>
-                <a:gridCol w="2926080"/>
-                <a:gridCol w="731520"/>
-                <a:gridCol w="1371600"/>
+                <a:gridCol w="1371600">
+                  <a:extLst>
+                    <a:ext uri="{9D8B030D-6E8A-4147-A177-3AD203B41FA5}">
+                      <a16:colId xmlns:a16="http://schemas.microsoft.com/office/drawing/2014/main" val="20000"/>
+                    </a:ext>
+                  </a:extLst>
+                </a:gridCol>
+                <a:gridCol w="2926080">
+                  <a:extLst>
+                    <a:ext uri="{9D8B030D-6E8A-4147-A177-3AD203B41FA5}">
+                      <a16:colId xmlns:a16="http://schemas.microsoft.com/office/drawing/2014/main" val="20001"/>
+                    </a:ext>
+                  </a:extLst>
+                </a:gridCol>
+                <a:gridCol w="731520">
+                  <a:extLst>
+                    <a:ext uri="{9D8B030D-6E8A-4147-A177-3AD203B41FA5}">
+                      <a16:colId xmlns:a16="http://schemas.microsoft.com/office/drawing/2014/main" val="20002"/>
+                    </a:ext>
+                  </a:extLst>
+                </a:gridCol>
+                <a:gridCol w="1371600">
+                  <a:extLst>
+                    <a:ext uri="{9D8B030D-6E8A-4147-A177-3AD203B41FA5}">
+                      <a16:colId xmlns:a16="http://schemas.microsoft.com/office/drawing/2014/main" val="20003"/>
+                    </a:ext>
+                  </a:extLst>
+                </a:gridCol>
               </a:tblGrid>
               <a:tr h="0">
                 <a:tc>
@@ -2995,7 +2756,7 @@
                     <a:bodyPr/>
                     <a:lstStyle/>
                     <a:p>
-                      <a:pPr indent="0" marL="0">
+                      <a:pPr marL="0" indent="0">
                         <a:buNone/>
                       </a:pPr>
                       <a:r>
@@ -3016,7 +2777,7 @@
                       </a:endParaRPr>
                     </a:p>
                   </a:txBody>
-                  <a:tcPr marL="91440" marR="91440" marT="45720" marB="45720">
+                  <a:tcPr>
                     <a:lnL w="6350" cap="flat" cmpd="sng" algn="ctr">
                       <a:solidFill>
                         <a:srgbClr val="D5C8EE"/>
@@ -3063,7 +2824,7 @@
                     <a:bodyPr/>
                     <a:lstStyle/>
                     <a:p>
-                      <a:pPr indent="0" marL="0">
+                      <a:pPr marL="0" indent="0">
                         <a:buNone/>
                       </a:pPr>
                       <a:r>
@@ -3084,7 +2845,7 @@
                       </a:endParaRPr>
                     </a:p>
                   </a:txBody>
-                  <a:tcPr marL="91440" marR="91440" marT="45720" marB="45720">
+                  <a:tcPr>
                     <a:lnL w="6350" cap="flat" cmpd="sng" algn="ctr">
                       <a:solidFill>
                         <a:srgbClr val="D5C8EE"/>
@@ -3131,7 +2892,7 @@
                     <a:bodyPr/>
                     <a:lstStyle/>
                     <a:p>
-                      <a:pPr indent="0" marL="0">
+                      <a:pPr marL="0" indent="0">
                         <a:buNone/>
                       </a:pPr>
                       <a:r>
@@ -3152,7 +2913,7 @@
                       </a:endParaRPr>
                     </a:p>
                   </a:txBody>
-                  <a:tcPr marL="91440" marR="91440" marT="45720" marB="45720">
+                  <a:tcPr>
                     <a:lnL w="6350" cap="flat" cmpd="sng" algn="ctr">
                       <a:solidFill>
                         <a:srgbClr val="D5C8EE"/>
@@ -3199,7 +2960,7 @@
                     <a:bodyPr/>
                     <a:lstStyle/>
                     <a:p>
-                      <a:pPr indent="0" marL="0">
+                      <a:pPr marL="0" indent="0">
                         <a:buNone/>
                       </a:pPr>
                       <a:r>
@@ -3220,7 +2981,7 @@
                       </a:endParaRPr>
                     </a:p>
                   </a:txBody>
-                  <a:tcPr marL="91440" marR="91440" marT="45720" marB="45720">
+                  <a:tcPr>
                     <a:lnL w="6350" cap="flat" cmpd="sng" algn="ctr">
                       <a:solidFill>
                         <a:srgbClr val="D5C8EE"/>
@@ -3262,6 +3023,11 @@
                     </a:solidFill>
                   </a:tcPr>
                 </a:tc>
+                <a:extLst>
+                  <a:ext uri="{0D108BD9-81ED-4DB2-BD59-A6C34878D82A}">
+                    <a16:rowId xmlns:a16="http://schemas.microsoft.com/office/drawing/2014/main" val="10000"/>
+                  </a:ext>
+                </a:extLst>
               </a:tr>
               <a:tr h="0">
                 <a:tc>
@@ -3269,7 +3035,7 @@
                     <a:bodyPr/>
                     <a:lstStyle/>
                     <a:p>
-                      <a:pPr indent="0" marL="0">
+                      <a:pPr marL="0" indent="0">
                         <a:buNone/>
                       </a:pPr>
                       <a:r>
@@ -3290,7 +3056,7 @@
                       </a:endParaRPr>
                     </a:p>
                   </a:txBody>
-                  <a:tcPr marL="91440" marR="91440" marT="45720" marB="45720">
+                  <a:tcPr>
                     <a:lnL w="6350" cap="flat" cmpd="sng" algn="ctr">
                       <a:solidFill>
                         <a:srgbClr val="D5C8EE"/>
@@ -3334,7 +3100,7 @@
                     <a:bodyPr/>
                     <a:lstStyle/>
                     <a:p>
-                      <a:pPr indent="0" marL="0">
+                      <a:pPr marL="0" indent="0">
                         <a:buNone/>
                       </a:pPr>
                       <a:r>
@@ -3355,7 +3121,7 @@
                       </a:endParaRPr>
                     </a:p>
                   </a:txBody>
-                  <a:tcPr marL="91440" marR="91440" marT="45720" marB="45720">
+                  <a:tcPr>
                     <a:lnL w="6350" cap="flat" cmpd="sng" algn="ctr">
                       <a:solidFill>
                         <a:srgbClr val="D5C8EE"/>
@@ -3399,7 +3165,7 @@
                     <a:bodyPr/>
                     <a:lstStyle/>
                     <a:p>
-                      <a:pPr algn="ctr" indent="0" marL="0">
+                      <a:pPr marL="0" indent="0" algn="ctr">
                         <a:buNone/>
                       </a:pPr>
                       <a:r>
@@ -3420,7 +3186,7 @@
                       </a:endParaRPr>
                     </a:p>
                   </a:txBody>
-                  <a:tcPr marL="91440" marR="91440" marT="45720" marB="45720">
+                  <a:tcPr>
                     <a:lnL w="6350" cap="flat" cmpd="sng" algn="ctr">
                       <a:solidFill>
                         <a:srgbClr val="D5C8EE"/>
@@ -3464,7 +3230,7 @@
                     <a:bodyPr/>
                     <a:lstStyle/>
                     <a:p>
-                      <a:pPr indent="0" marL="0">
+                      <a:pPr marL="0" indent="0">
                         <a:buNone/>
                       </a:pPr>
                       <a:r>
@@ -3485,7 +3251,7 @@
                       </a:endParaRPr>
                     </a:p>
                   </a:txBody>
-                  <a:tcPr marL="91440" marR="91440" marT="45720" marB="45720">
+                  <a:tcPr>
                     <a:lnL w="6350" cap="flat" cmpd="sng" algn="ctr">
                       <a:solidFill>
                         <a:srgbClr val="D5C8EE"/>
@@ -3524,6 +3290,11 @@
                     </a:lnB>
                   </a:tcPr>
                 </a:tc>
+                <a:extLst>
+                  <a:ext uri="{0D108BD9-81ED-4DB2-BD59-A6C34878D82A}">
+                    <a16:rowId xmlns:a16="http://schemas.microsoft.com/office/drawing/2014/main" val="10001"/>
+                  </a:ext>
+                </a:extLst>
               </a:tr>
               <a:tr h="0">
                 <a:tc>
@@ -3531,7 +3302,7 @@
                     <a:bodyPr/>
                     <a:lstStyle/>
                     <a:p>
-                      <a:pPr indent="0" marL="0">
+                      <a:pPr marL="0" indent="0">
                         <a:buNone/>
                       </a:pPr>
                       <a:r>
@@ -3552,7 +3323,7 @@
                       </a:endParaRPr>
                     </a:p>
                   </a:txBody>
-                  <a:tcPr marL="91440" marR="91440" marT="45720" marB="45720">
+                  <a:tcPr>
                     <a:lnL w="6350" cap="flat" cmpd="sng" algn="ctr">
                       <a:solidFill>
                         <a:srgbClr val="D5C8EE"/>
@@ -3599,7 +3370,7 @@
                     <a:bodyPr/>
                     <a:lstStyle/>
                     <a:p>
-                      <a:pPr indent="0" marL="0">
+                      <a:pPr marL="0" indent="0">
                         <a:buNone/>
                       </a:pPr>
                       <a:r>
@@ -3620,7 +3391,7 @@
                       </a:endParaRPr>
                     </a:p>
                   </a:txBody>
-                  <a:tcPr marL="91440" marR="91440" marT="45720" marB="45720">
+                  <a:tcPr>
                     <a:lnL w="6350" cap="flat" cmpd="sng" algn="ctr">
                       <a:solidFill>
                         <a:srgbClr val="D5C8EE"/>
@@ -3667,7 +3438,7 @@
                     <a:bodyPr/>
                     <a:lstStyle/>
                     <a:p>
-                      <a:pPr algn="ctr" indent="0" marL="0">
+                      <a:pPr marL="0" indent="0" algn="ctr">
                         <a:buNone/>
                       </a:pPr>
                       <a:r>
@@ -3688,7 +3459,7 @@
                       </a:endParaRPr>
                     </a:p>
                   </a:txBody>
-                  <a:tcPr marL="91440" marR="91440" marT="45720" marB="45720">
+                  <a:tcPr>
                     <a:lnL w="6350" cap="flat" cmpd="sng" algn="ctr">
                       <a:solidFill>
                         <a:srgbClr val="D5C8EE"/>
@@ -3735,7 +3506,7 @@
                     <a:bodyPr/>
                     <a:lstStyle/>
                     <a:p>
-                      <a:pPr indent="0" marL="0">
+                      <a:pPr marL="0" indent="0">
                         <a:buNone/>
                       </a:pPr>
                       <a:r>
@@ -3756,7 +3527,7 @@
                       </a:endParaRPr>
                     </a:p>
                   </a:txBody>
-                  <a:tcPr marL="91440" marR="91440" marT="45720" marB="45720">
+                  <a:tcPr>
                     <a:lnL w="6350" cap="flat" cmpd="sng" algn="ctr">
                       <a:solidFill>
                         <a:srgbClr val="D5C8EE"/>
@@ -3798,6 +3569,11 @@
                     </a:solidFill>
                   </a:tcPr>
                 </a:tc>
+                <a:extLst>
+                  <a:ext uri="{0D108BD9-81ED-4DB2-BD59-A6C34878D82A}">
+                    <a16:rowId xmlns:a16="http://schemas.microsoft.com/office/drawing/2014/main" val="10002"/>
+                  </a:ext>
+                </a:extLst>
               </a:tr>
               <a:tr h="0">
                 <a:tc>
@@ -3805,7 +3581,7 @@
                     <a:bodyPr/>
                     <a:lstStyle/>
                     <a:p>
-                      <a:pPr indent="0" marL="0">
+                      <a:pPr marL="0" indent="0">
                         <a:buNone/>
                       </a:pPr>
                       <a:r>
@@ -3826,7 +3602,7 @@
                       </a:endParaRPr>
                     </a:p>
                   </a:txBody>
-                  <a:tcPr marL="91440" marR="91440" marT="45720" marB="45720">
+                  <a:tcPr>
                     <a:lnL w="6350" cap="flat" cmpd="sng" algn="ctr">
                       <a:solidFill>
                         <a:srgbClr val="D5C8EE"/>
@@ -3870,7 +3646,7 @@
                     <a:bodyPr/>
                     <a:lstStyle/>
                     <a:p>
-                      <a:pPr indent="0" marL="0">
+                      <a:pPr marL="0" indent="0">
                         <a:buNone/>
                       </a:pPr>
                       <a:r>
@@ -3891,7 +3667,7 @@
                       </a:endParaRPr>
                     </a:p>
                   </a:txBody>
-                  <a:tcPr marL="91440" marR="91440" marT="45720" marB="45720">
+                  <a:tcPr>
                     <a:lnL w="6350" cap="flat" cmpd="sng" algn="ctr">
                       <a:solidFill>
                         <a:srgbClr val="D5C8EE"/>
@@ -3935,7 +3711,7 @@
                     <a:bodyPr/>
                     <a:lstStyle/>
                     <a:p>
-                      <a:pPr algn="ctr" indent="0" marL="0">
+                      <a:pPr marL="0" indent="0" algn="ctr">
                         <a:buNone/>
                       </a:pPr>
                       <a:r>
@@ -3956,7 +3732,7 @@
                       </a:endParaRPr>
                     </a:p>
                   </a:txBody>
-                  <a:tcPr marL="91440" marR="91440" marT="45720" marB="45720">
+                  <a:tcPr>
                     <a:lnL w="6350" cap="flat" cmpd="sng" algn="ctr">
                       <a:solidFill>
                         <a:srgbClr val="D5C8EE"/>
@@ -4000,7 +3776,7 @@
                     <a:bodyPr/>
                     <a:lstStyle/>
                     <a:p>
-                      <a:pPr indent="0" marL="0">
+                      <a:pPr marL="0" indent="0">
                         <a:buNone/>
                       </a:pPr>
                       <a:r>
@@ -4021,7 +3797,7 @@
                       </a:endParaRPr>
                     </a:p>
                   </a:txBody>
-                  <a:tcPr marL="91440" marR="91440" marT="45720" marB="45720">
+                  <a:tcPr>
                     <a:lnL w="6350" cap="flat" cmpd="sng" algn="ctr">
                       <a:solidFill>
                         <a:srgbClr val="D5C8EE"/>
@@ -4060,6 +3836,11 @@
                     </a:lnB>
                   </a:tcPr>
                 </a:tc>
+                <a:extLst>
+                  <a:ext uri="{0D108BD9-81ED-4DB2-BD59-A6C34878D82A}">
+                    <a16:rowId xmlns:a16="http://schemas.microsoft.com/office/drawing/2014/main" val="10003"/>
+                  </a:ext>
+                </a:extLst>
               </a:tr>
             </a:tbl>
           </a:graphicData>
@@ -4086,7 +3867,7 @@
           <a:bodyPr wrap="square" lIns="0" tIns="0" rIns="0" bIns="0" rtlCol="0" anchor="ctr"/>
           <a:lstStyle/>
           <a:p>
-            <a:pPr indent="0" marL="0">
+            <a:pPr marL="0" indent="0">
               <a:buNone/>
             </a:pPr>
             <a:r>
@@ -4128,10 +3909,17 @@
             <a:prstDash val="solid"/>
           </a:ln>
         </p:spPr>
-      </p:sp>
-      <p:sp>
-        <p:nvSpPr>
-          <p:cNvPr id="11" name="Shape 8"/>
+        <p:txBody>
+          <a:bodyPr/>
+          <a:lstStyle/>
+          <a:p>
+            <a:endParaRPr lang="zh-TW" altLang="en-US"/>
+          </a:p>
+        </p:txBody>
+      </p:sp>
+      <p:sp>
+        <p:nvSpPr>
+          <p:cNvPr id="8" name="Shape 8"/>
           <p:cNvSpPr/>
           <p:nvPr/>
         </p:nvSpPr>
@@ -4153,6 +3941,13 @@
             <a:prstDash val="solid"/>
           </a:ln>
         </p:spPr>
+        <p:txBody>
+          <a:bodyPr/>
+          <a:lstStyle/>
+          <a:p>
+            <a:endParaRPr lang="zh-TW" altLang="en-US"/>
+          </a:p>
+        </p:txBody>
       </p:sp>
       <p:sp>
         <p:nvSpPr>
@@ -4175,7 +3970,7 @@
           <a:bodyPr wrap="square" lIns="0" tIns="0" rIns="0" bIns="0" rtlCol="0" anchor="ctr"/>
           <a:lstStyle/>
           <a:p>
-            <a:pPr indent="0" marL="0">
+            <a:pPr marL="0" indent="0">
               <a:buNone/>
             </a:pPr>
             <a:r>
@@ -4214,7 +4009,7 @@
           <a:bodyPr wrap="square" lIns="0" tIns="0" rIns="0" bIns="0" rtlCol="0" anchor="ctr"/>
           <a:lstStyle/>
           <a:p>
-            <a:pPr indent="0" marL="0">
+            <a:pPr marL="0" indent="0">
               <a:buNone/>
             </a:pPr>
             <a:r>
@@ -4253,7 +4048,7 @@
           <a:bodyPr wrap="square" lIns="0" tIns="0" rIns="0" bIns="0" rtlCol="0" anchor="ctr"/>
           <a:lstStyle/>
           <a:p>
-            <a:pPr indent="0" marL="0">
+            <a:pPr marL="0" indent="0">
               <a:buNone/>
             </a:pPr>
             <a:r>
@@ -4295,6 +4090,13 @@
             <a:prstDash val="solid"/>
           </a:ln>
         </p:spPr>
+        <p:txBody>
+          <a:bodyPr/>
+          <a:lstStyle/>
+          <a:p>
+            <a:endParaRPr lang="zh-TW" altLang="en-US"/>
+          </a:p>
+        </p:txBody>
       </p:sp>
       <p:sp>
         <p:nvSpPr>
@@ -4320,6 +4122,13 @@
             <a:prstDash val="solid"/>
           </a:ln>
         </p:spPr>
+        <p:txBody>
+          <a:bodyPr/>
+          <a:lstStyle/>
+          <a:p>
+            <a:endParaRPr lang="zh-TW" altLang="en-US"/>
+          </a:p>
+        </p:txBody>
       </p:sp>
       <p:sp>
         <p:nvSpPr>
@@ -4342,7 +4151,7 @@
           <a:bodyPr wrap="square" lIns="0" tIns="0" rIns="0" bIns="0" rtlCol="0" anchor="ctr"/>
           <a:lstStyle/>
           <a:p>
-            <a:pPr indent="0" marL="0">
+            <a:pPr marL="0" indent="0">
               <a:buNone/>
             </a:pPr>
             <a:r>
@@ -4381,7 +4190,7 @@
           <a:bodyPr wrap="square" lIns="0" tIns="0" rIns="0" bIns="0" rtlCol="0" anchor="ctr"/>
           <a:lstStyle/>
           <a:p>
-            <a:pPr indent="0" marL="0">
+            <a:pPr marL="0" indent="0">
               <a:buNone/>
             </a:pPr>
             <a:r>
@@ -4420,7 +4229,7 @@
           <a:bodyPr wrap="square" lIns="0" tIns="0" rIns="0" bIns="0" rtlCol="0" anchor="ctr"/>
           <a:lstStyle/>
           <a:p>
-            <a:pPr indent="0" marL="0">
+            <a:pPr marL="0" indent="0">
               <a:buNone/>
             </a:pPr>
             <a:r>
@@ -4553,7 +4362,7 @@
           <a:bodyPr wrap="square" lIns="0" tIns="0" rIns="0" bIns="0" rtlCol="0" anchor="ctr"/>
           <a:lstStyle/>
           <a:p>
-            <a:pPr indent="0" marL="0">
+            <a:pPr marL="0" indent="0">
               <a:buNone/>
             </a:pPr>
             <a:r>
@@ -4587,6 +4396,7 @@
         <a:solidFill>
           <a:srgbClr val="FFFFFF"/>
         </a:solidFill>
+        <a:effectLst/>
       </p:bgPr>
     </p:bg>
     <p:spTree>
@@ -4627,6 +4437,13 @@
             <a:prstDash val="solid"/>
           </a:ln>
         </p:spPr>
+        <p:txBody>
+          <a:bodyPr/>
+          <a:lstStyle/>
+          <a:p>
+            <a:endParaRPr lang="zh-TW" altLang="en-US"/>
+          </a:p>
+        </p:txBody>
       </p:sp>
       <p:sp>
         <p:nvSpPr>
@@ -4649,9 +4466,20 @@
           <a:bodyPr wrap="square" lIns="0" tIns="0" rIns="0" bIns="0" rtlCol="0" anchor="t"/>
           <a:lstStyle/>
           <a:p>
-            <a:pPr indent="0" marL="0">
-              <a:buNone/>
-            </a:pPr>
+            <a:pPr marL="0" indent="0">
+              <a:buNone/>
+            </a:pPr>
+            <a:r>
+              <a:rPr lang="en-US" sz="2800" b="1" dirty="0" err="1">
+                <a:solidFill>
+                  <a:srgbClr val="8A7AD2"/>
+                </a:solidFill>
+                <a:latin typeface="Microsoft JhengHei" pitchFamily="34" charset="0"/>
+                <a:ea typeface="Microsoft JhengHei" pitchFamily="34" charset="-122"/>
+                <a:cs typeface="Microsoft JhengHei" pitchFamily="34" charset="-120"/>
+              </a:rPr>
+              <a:t>題目二</a:t>
+            </a:r>
             <a:r>
               <a:rPr lang="en-US" sz="2800" b="1" dirty="0">
                 <a:solidFill>
@@ -4661,7 +4489,29 @@
                 <a:ea typeface="Microsoft JhengHei" pitchFamily="34" charset="-122"/>
                 <a:cs typeface="Microsoft JhengHei" pitchFamily="34" charset="-120"/>
               </a:rPr>
-              <a:t>題目二  合約／文件判讀與問答 AI Agent  ｜  場景 × 資料 × 輸出</a:t>
+              <a:t>  </a:t>
+            </a:r>
+            <a:r>
+              <a:rPr lang="en-US" sz="2800" b="1" dirty="0" err="1">
+                <a:solidFill>
+                  <a:srgbClr val="8A7AD2"/>
+                </a:solidFill>
+                <a:latin typeface="Microsoft JhengHei" pitchFamily="34" charset="0"/>
+                <a:ea typeface="Microsoft JhengHei" pitchFamily="34" charset="-122"/>
+                <a:cs typeface="Microsoft JhengHei" pitchFamily="34" charset="-120"/>
+              </a:rPr>
+              <a:t>合約／文件判讀與問答</a:t>
+            </a:r>
+            <a:r>
+              <a:rPr lang="en-US" sz="2800" b="1" dirty="0">
+                <a:solidFill>
+                  <a:srgbClr val="8A7AD2"/>
+                </a:solidFill>
+                <a:latin typeface="Microsoft JhengHei" pitchFamily="34" charset="0"/>
+                <a:ea typeface="Microsoft JhengHei" pitchFamily="34" charset="-122"/>
+                <a:cs typeface="Microsoft JhengHei" pitchFamily="34" charset="-120"/>
+              </a:rPr>
+              <a:t> AI Agent  ｜  場景 × 資料 × 輸出</a:t>
             </a:r>
             <a:endParaRPr lang="en-US" sz="2800" dirty="0"/>
           </a:p>
@@ -4688,7 +4538,7 @@
           <a:bodyPr wrap="square" lIns="0" tIns="0" rIns="0" bIns="0" rtlCol="0" anchor="t"/>
           <a:lstStyle/>
           <a:p>
-            <a:pPr indent="0" marL="0">
+            <a:pPr marL="0" indent="0">
               <a:buNone/>
             </a:pPr>
             <a:r>
@@ -4727,7 +4577,7 @@
           <a:bodyPr wrap="square" lIns="0" tIns="0" rIns="0" bIns="0" rtlCol="0" anchor="ctr"/>
           <a:lstStyle/>
           <a:p>
-            <a:pPr indent="0" marL="0">
+            <a:pPr marL="0" indent="0">
               <a:buNone/>
             </a:pPr>
             <a:r>
@@ -4766,7 +4616,7 @@
           <a:bodyPr wrap="square" lIns="0" tIns="0" rIns="0" bIns="0" rtlCol="0" anchor="ctr"/>
           <a:lstStyle/>
           <a:p>
-            <a:pPr algn="r" indent="0" marL="0">
+            <a:pPr marL="0" indent="0" algn="r">
               <a:buNone/>
             </a:pPr>
             <a:r>
@@ -4805,7 +4655,7 @@
           <a:bodyPr wrap="square" lIns="0" tIns="0" rIns="0" bIns="0" rtlCol="0" anchor="ctr"/>
           <a:lstStyle/>
           <a:p>
-            <a:pPr algn="r" indent="0" marL="0">
+            <a:pPr marL="0" indent="0" algn="r">
               <a:buNone/>
             </a:pPr>
             <a:r>
@@ -4847,6 +4697,13 @@
             <a:prstDash val="solid"/>
           </a:ln>
         </p:spPr>
+        <p:txBody>
+          <a:bodyPr/>
+          <a:lstStyle/>
+          <a:p>
+            <a:endParaRPr lang="zh-TW" altLang="en-US"/>
+          </a:p>
+        </p:txBody>
       </p:sp>
       <p:sp>
         <p:nvSpPr>
@@ -4872,6 +4729,13 @@
             <a:prstDash val="solid"/>
           </a:ln>
         </p:spPr>
+        <p:txBody>
+          <a:bodyPr/>
+          <a:lstStyle/>
+          <a:p>
+            <a:endParaRPr lang="zh-TW" altLang="en-US"/>
+          </a:p>
+        </p:txBody>
       </p:sp>
       <p:sp>
         <p:nvSpPr>
@@ -4894,7 +4758,7 @@
           <a:bodyPr wrap="square" lIns="0" tIns="0" rIns="0" bIns="0" rtlCol="0" anchor="ctr"/>
           <a:lstStyle/>
           <a:p>
-            <a:pPr indent="0" marL="0">
+            <a:pPr marL="0" indent="0">
               <a:buNone/>
             </a:pPr>
             <a:r>
@@ -4933,7 +4797,7 @@
           <a:bodyPr wrap="square" lIns="0" tIns="0" rIns="0" bIns="0" rtlCol="0" anchor="ctr"/>
           <a:lstStyle/>
           <a:p>
-            <a:pPr indent="0" marL="0">
+            <a:pPr marL="0" indent="0">
               <a:buNone/>
             </a:pPr>
             <a:r>
@@ -4950,13 +4814,13 @@
             <a:endParaRPr lang="en-US" sz="1150" dirty="0"/>
           </a:p>
           <a:p>
-            <a:pPr indent="0" marL="0">
+            <a:pPr marL="0" indent="0">
               <a:buNone/>
             </a:pPr>
             <a:endParaRPr lang="en-US" sz="1150" dirty="0"/>
           </a:p>
           <a:p>
-            <a:pPr indent="0" marL="0">
+            <a:pPr marL="0" indent="0">
               <a:buNone/>
             </a:pPr>
             <a:r>
@@ -4973,13 +4837,13 @@
             <a:endParaRPr lang="en-US" sz="1150" dirty="0"/>
           </a:p>
           <a:p>
-            <a:pPr indent="0" marL="0">
+            <a:pPr marL="0" indent="0">
               <a:buNone/>
             </a:pPr>
             <a:endParaRPr lang="en-US" sz="1150" dirty="0"/>
           </a:p>
           <a:p>
-            <a:pPr indent="0" marL="0">
+            <a:pPr marL="0" indent="0">
               <a:buNone/>
             </a:pPr>
             <a:r>
@@ -5021,6 +4885,13 @@
             <a:prstDash val="solid"/>
           </a:ln>
         </p:spPr>
+        <p:txBody>
+          <a:bodyPr/>
+          <a:lstStyle/>
+          <a:p>
+            <a:endParaRPr lang="zh-TW" altLang="en-US"/>
+          </a:p>
+        </p:txBody>
       </p:sp>
       <p:sp>
         <p:nvSpPr>
@@ -5046,6 +4917,13 @@
             <a:prstDash val="solid"/>
           </a:ln>
         </p:spPr>
+        <p:txBody>
+          <a:bodyPr/>
+          <a:lstStyle/>
+          <a:p>
+            <a:endParaRPr lang="zh-TW" altLang="en-US"/>
+          </a:p>
+        </p:txBody>
       </p:sp>
       <p:sp>
         <p:nvSpPr>
@@ -5068,7 +4946,7 @@
           <a:bodyPr wrap="square" lIns="0" tIns="0" rIns="0" bIns="0" rtlCol="0" anchor="ctr"/>
           <a:lstStyle/>
           <a:p>
-            <a:pPr indent="0" marL="0">
+            <a:pPr marL="0" indent="0">
               <a:buNone/>
             </a:pPr>
             <a:r>
@@ -5222,6 +5100,13 @@
             <a:prstDash val="solid"/>
           </a:ln>
         </p:spPr>
+        <p:txBody>
+          <a:bodyPr/>
+          <a:lstStyle/>
+          <a:p>
+            <a:endParaRPr lang="zh-TW" altLang="en-US"/>
+          </a:p>
+        </p:txBody>
       </p:sp>
       <p:sp>
         <p:nvSpPr>
@@ -5247,6 +5132,13 @@
             <a:prstDash val="solid"/>
           </a:ln>
         </p:spPr>
+        <p:txBody>
+          <a:bodyPr/>
+          <a:lstStyle/>
+          <a:p>
+            <a:endParaRPr lang="zh-TW" altLang="en-US"/>
+          </a:p>
+        </p:txBody>
       </p:sp>
       <p:sp>
         <p:nvSpPr>
@@ -5269,7 +5161,7 @@
           <a:bodyPr wrap="square" lIns="0" tIns="0" rIns="0" bIns="0" rtlCol="0" anchor="ctr"/>
           <a:lstStyle/>
           <a:p>
-            <a:pPr indent="0" marL="0">
+            <a:pPr marL="0" indent="0">
               <a:buNone/>
             </a:pPr>
             <a:r>
@@ -5308,7 +5200,7 @@
           <a:bodyPr wrap="square" lIns="0" tIns="0" rIns="0" bIns="0" rtlCol="0" anchor="ctr"/>
           <a:lstStyle/>
           <a:p>
-            <a:pPr indent="0" marL="0">
+            <a:pPr marL="0" indent="0">
               <a:buNone/>
             </a:pPr>
             <a:r>
@@ -5454,6 +5346,7 @@
         <a:solidFill>
           <a:srgbClr val="FFFFFF"/>
         </a:solidFill>
+        <a:effectLst/>
       </p:bgPr>
     </p:bg>
     <p:spTree>
@@ -5494,6 +5387,13 @@
             <a:prstDash val="solid"/>
           </a:ln>
         </p:spPr>
+        <p:txBody>
+          <a:bodyPr/>
+          <a:lstStyle/>
+          <a:p>
+            <a:endParaRPr lang="zh-TW" altLang="en-US"/>
+          </a:p>
+        </p:txBody>
       </p:sp>
       <p:sp>
         <p:nvSpPr>
@@ -5516,7 +5416,7 @@
           <a:bodyPr wrap="square" lIns="0" tIns="0" rIns="0" bIns="0" rtlCol="0" anchor="t"/>
           <a:lstStyle/>
           <a:p>
-            <a:pPr indent="0" marL="0">
+            <a:pPr marL="0" indent="0">
               <a:buNone/>
             </a:pPr>
             <a:r>
@@ -5555,7 +5455,7 @@
           <a:bodyPr wrap="square" lIns="0" tIns="0" rIns="0" bIns="0" rtlCol="0" anchor="t"/>
           <a:lstStyle/>
           <a:p>
-            <a:pPr indent="0" marL="0">
+            <a:pPr marL="0" indent="0">
               <a:buNone/>
             </a:pPr>
             <a:r>
@@ -5594,7 +5494,7 @@
           <a:bodyPr wrap="square" lIns="0" tIns="0" rIns="0" bIns="0" rtlCol="0" anchor="ctr"/>
           <a:lstStyle/>
           <a:p>
-            <a:pPr indent="0" marL="0">
+            <a:pPr marL="0" indent="0">
               <a:buNone/>
             </a:pPr>
             <a:r>
@@ -5633,7 +5533,7 @@
           <a:bodyPr wrap="square" lIns="0" tIns="0" rIns="0" bIns="0" rtlCol="0" anchor="ctr"/>
           <a:lstStyle/>
           <a:p>
-            <a:pPr algn="r" indent="0" marL="0">
+            <a:pPr marL="0" indent="0" algn="r">
               <a:buNone/>
             </a:pPr>
             <a:r>
@@ -5672,7 +5572,7 @@
           <a:bodyPr wrap="square" lIns="0" tIns="0" rIns="0" bIns="0" rtlCol="0" anchor="ctr"/>
           <a:lstStyle/>
           <a:p>
-            <a:pPr algn="r" indent="0" marL="0">
+            <a:pPr marL="0" indent="0" algn="r">
               <a:buNone/>
             </a:pPr>
             <a:r>
@@ -5714,6 +5614,13 @@
             <a:prstDash val="solid"/>
           </a:ln>
         </p:spPr>
+        <p:txBody>
+          <a:bodyPr/>
+          <a:lstStyle/>
+          <a:p>
+            <a:endParaRPr lang="zh-TW" altLang="en-US"/>
+          </a:p>
+        </p:txBody>
       </p:sp>
       <p:sp>
         <p:nvSpPr>
@@ -5739,6 +5646,13 @@
             <a:prstDash val="solid"/>
           </a:ln>
         </p:spPr>
+        <p:txBody>
+          <a:bodyPr/>
+          <a:lstStyle/>
+          <a:p>
+            <a:endParaRPr lang="zh-TW" altLang="en-US"/>
+          </a:p>
+        </p:txBody>
       </p:sp>
       <p:sp>
         <p:nvSpPr>
@@ -5761,7 +5675,7 @@
           <a:bodyPr wrap="square" lIns="0" tIns="0" rIns="0" bIns="0" rtlCol="0" anchor="ctr"/>
           <a:lstStyle/>
           <a:p>
-            <a:pPr algn="ctr" indent="0" marL="0">
+            <a:pPr marL="0" indent="0" algn="ctr">
               <a:buNone/>
             </a:pPr>
             <a:r>
@@ -5800,7 +5714,7 @@
           <a:bodyPr wrap="square" lIns="0" tIns="0" rIns="0" bIns="0" rtlCol="0" anchor="ctr"/>
           <a:lstStyle/>
           <a:p>
-            <a:pPr algn="ctr" indent="0" marL="0">
+            <a:pPr marL="0" indent="0" algn="ctr">
               <a:buNone/>
             </a:pPr>
             <a:r>
@@ -5839,7 +5753,7 @@
           <a:bodyPr wrap="square" lIns="0" tIns="0" rIns="0" bIns="0" rtlCol="0" anchor="t"/>
           <a:lstStyle/>
           <a:p>
-            <a:pPr indent="0" marL="0">
+            <a:pPr marL="0" indent="0">
               <a:buNone/>
             </a:pPr>
             <a:r>
@@ -5878,7 +5792,7 @@
           <a:bodyPr wrap="square" lIns="0" tIns="0" rIns="0" bIns="0" rtlCol="0" anchor="ctr"/>
           <a:lstStyle/>
           <a:p>
-            <a:pPr algn="ctr" indent="0" marL="0">
+            <a:pPr marL="0" indent="0" algn="ctr">
               <a:buNone/>
             </a:pPr>
             <a:r>
@@ -5919,6 +5833,13 @@
             <a:tailEnd type="triangle"/>
           </a:ln>
         </p:spPr>
+        <p:txBody>
+          <a:bodyPr/>
+          <a:lstStyle/>
+          <a:p>
+            <a:endParaRPr lang="zh-TW" altLang="en-US"/>
+          </a:p>
+        </p:txBody>
       </p:sp>
       <p:sp>
         <p:nvSpPr>
@@ -5944,6 +5865,13 @@
             <a:prstDash val="solid"/>
           </a:ln>
         </p:spPr>
+        <p:txBody>
+          <a:bodyPr/>
+          <a:lstStyle/>
+          <a:p>
+            <a:endParaRPr lang="zh-TW" altLang="en-US"/>
+          </a:p>
+        </p:txBody>
       </p:sp>
       <p:sp>
         <p:nvSpPr>
@@ -5969,6 +5897,13 @@
             <a:prstDash val="solid"/>
           </a:ln>
         </p:spPr>
+        <p:txBody>
+          <a:bodyPr/>
+          <a:lstStyle/>
+          <a:p>
+            <a:endParaRPr lang="zh-TW" altLang="en-US"/>
+          </a:p>
+        </p:txBody>
       </p:sp>
       <p:sp>
         <p:nvSpPr>
@@ -5991,7 +5926,7 @@
           <a:bodyPr wrap="square" lIns="0" tIns="0" rIns="0" bIns="0" rtlCol="0" anchor="ctr"/>
           <a:lstStyle/>
           <a:p>
-            <a:pPr algn="ctr" indent="0" marL="0">
+            <a:pPr marL="0" indent="0" algn="ctr">
               <a:buNone/>
             </a:pPr>
             <a:r>
@@ -6030,7 +5965,7 @@
           <a:bodyPr wrap="square" lIns="0" tIns="0" rIns="0" bIns="0" rtlCol="0" anchor="ctr"/>
           <a:lstStyle/>
           <a:p>
-            <a:pPr algn="ctr" indent="0" marL="0">
+            <a:pPr marL="0" indent="0" algn="ctr">
               <a:buNone/>
             </a:pPr>
             <a:r>
@@ -6069,7 +6004,7 @@
           <a:bodyPr wrap="square" lIns="0" tIns="0" rIns="0" bIns="0" rtlCol="0" anchor="t"/>
           <a:lstStyle/>
           <a:p>
-            <a:pPr indent="0" marL="0">
+            <a:pPr marL="0" indent="0">
               <a:buNone/>
             </a:pPr>
             <a:r>
@@ -6108,7 +6043,7 @@
           <a:bodyPr wrap="square" lIns="0" tIns="0" rIns="0" bIns="0" rtlCol="0" anchor="ctr"/>
           <a:lstStyle/>
           <a:p>
-            <a:pPr algn="ctr" indent="0" marL="0">
+            <a:pPr marL="0" indent="0" algn="ctr">
               <a:buNone/>
             </a:pPr>
             <a:r>
@@ -6149,6 +6084,13 @@
             <a:tailEnd type="triangle"/>
           </a:ln>
         </p:spPr>
+        <p:txBody>
+          <a:bodyPr/>
+          <a:lstStyle/>
+          <a:p>
+            <a:endParaRPr lang="zh-TW" altLang="en-US"/>
+          </a:p>
+        </p:txBody>
       </p:sp>
       <p:sp>
         <p:nvSpPr>
@@ -6174,6 +6116,13 @@
             <a:prstDash val="solid"/>
           </a:ln>
         </p:spPr>
+        <p:txBody>
+          <a:bodyPr/>
+          <a:lstStyle/>
+          <a:p>
+            <a:endParaRPr lang="zh-TW" altLang="en-US"/>
+          </a:p>
+        </p:txBody>
       </p:sp>
       <p:sp>
         <p:nvSpPr>
@@ -6199,6 +6148,13 @@
             <a:prstDash val="solid"/>
           </a:ln>
         </p:spPr>
+        <p:txBody>
+          <a:bodyPr/>
+          <a:lstStyle/>
+          <a:p>
+            <a:endParaRPr lang="zh-TW" altLang="en-US"/>
+          </a:p>
+        </p:txBody>
       </p:sp>
       <p:sp>
         <p:nvSpPr>
@@ -6221,7 +6177,7 @@
           <a:bodyPr wrap="square" lIns="0" tIns="0" rIns="0" bIns="0" rtlCol="0" anchor="ctr"/>
           <a:lstStyle/>
           <a:p>
-            <a:pPr algn="ctr" indent="0" marL="0">
+            <a:pPr marL="0" indent="0" algn="ctr">
               <a:buNone/>
             </a:pPr>
             <a:r>
@@ -6260,7 +6216,7 @@
           <a:bodyPr wrap="square" lIns="0" tIns="0" rIns="0" bIns="0" rtlCol="0" anchor="ctr"/>
           <a:lstStyle/>
           <a:p>
-            <a:pPr algn="ctr" indent="0" marL="0">
+            <a:pPr marL="0" indent="0" algn="ctr">
               <a:buNone/>
             </a:pPr>
             <a:r>
@@ -6299,7 +6255,7 @@
           <a:bodyPr wrap="square" lIns="0" tIns="0" rIns="0" bIns="0" rtlCol="0" anchor="t"/>
           <a:lstStyle/>
           <a:p>
-            <a:pPr indent="0" marL="0">
+            <a:pPr marL="0" indent="0">
               <a:buNone/>
             </a:pPr>
             <a:r>
@@ -6340,6 +6296,13 @@
             <a:tailEnd type="triangle"/>
           </a:ln>
         </p:spPr>
+        <p:txBody>
+          <a:bodyPr/>
+          <a:lstStyle/>
+          <a:p>
+            <a:endParaRPr lang="zh-TW" altLang="en-US"/>
+          </a:p>
+        </p:txBody>
       </p:sp>
       <p:sp>
         <p:nvSpPr>
@@ -6365,6 +6328,13 @@
             <a:prstDash val="solid"/>
           </a:ln>
         </p:spPr>
+        <p:txBody>
+          <a:bodyPr/>
+          <a:lstStyle/>
+          <a:p>
+            <a:endParaRPr lang="zh-TW" altLang="en-US"/>
+          </a:p>
+        </p:txBody>
       </p:sp>
       <p:sp>
         <p:nvSpPr>
@@ -6390,6 +6360,13 @@
             <a:prstDash val="solid"/>
           </a:ln>
         </p:spPr>
+        <p:txBody>
+          <a:bodyPr/>
+          <a:lstStyle/>
+          <a:p>
+            <a:endParaRPr lang="zh-TW" altLang="en-US"/>
+          </a:p>
+        </p:txBody>
       </p:sp>
       <p:sp>
         <p:nvSpPr>
@@ -6412,7 +6389,7 @@
           <a:bodyPr wrap="square" lIns="0" tIns="0" rIns="0" bIns="0" rtlCol="0" anchor="ctr"/>
           <a:lstStyle/>
           <a:p>
-            <a:pPr algn="ctr" indent="0" marL="0">
+            <a:pPr marL="0" indent="0" algn="ctr">
               <a:buNone/>
             </a:pPr>
             <a:r>
@@ -6451,7 +6428,7 @@
           <a:bodyPr wrap="square" lIns="0" tIns="0" rIns="0" bIns="0" rtlCol="0" anchor="ctr"/>
           <a:lstStyle/>
           <a:p>
-            <a:pPr algn="ctr" indent="0" marL="0">
+            <a:pPr marL="0" indent="0" algn="ctr">
               <a:buNone/>
             </a:pPr>
             <a:r>
@@ -6490,7 +6467,7 @@
           <a:bodyPr wrap="square" lIns="0" tIns="0" rIns="0" bIns="0" rtlCol="0" anchor="t"/>
           <a:lstStyle/>
           <a:p>
-            <a:pPr indent="0" marL="0">
+            <a:pPr marL="0" indent="0">
               <a:buNone/>
             </a:pPr>
             <a:r>
@@ -6529,7 +6506,7 @@
           <a:bodyPr wrap="square" lIns="0" tIns="0" rIns="0" bIns="0" rtlCol="0" anchor="ctr"/>
           <a:lstStyle/>
           <a:p>
-            <a:pPr algn="ctr" indent="0" marL="0">
+            <a:pPr marL="0" indent="0" algn="ctr">
               <a:buNone/>
             </a:pPr>
             <a:r>
@@ -6570,6 +6547,13 @@
             <a:tailEnd type="triangle"/>
           </a:ln>
         </p:spPr>
+        <p:txBody>
+          <a:bodyPr/>
+          <a:lstStyle/>
+          <a:p>
+            <a:endParaRPr lang="zh-TW" altLang="en-US"/>
+          </a:p>
+        </p:txBody>
       </p:sp>
       <p:sp>
         <p:nvSpPr>
@@ -6595,6 +6579,13 @@
             <a:prstDash val="solid"/>
           </a:ln>
         </p:spPr>
+        <p:txBody>
+          <a:bodyPr/>
+          <a:lstStyle/>
+          <a:p>
+            <a:endParaRPr lang="zh-TW" altLang="en-US"/>
+          </a:p>
+        </p:txBody>
       </p:sp>
       <p:sp>
         <p:nvSpPr>
@@ -6620,6 +6611,13 @@
             <a:prstDash val="solid"/>
           </a:ln>
         </p:spPr>
+        <p:txBody>
+          <a:bodyPr/>
+          <a:lstStyle/>
+          <a:p>
+            <a:endParaRPr lang="zh-TW" altLang="en-US"/>
+          </a:p>
+        </p:txBody>
       </p:sp>
       <p:sp>
         <p:nvSpPr>
@@ -6642,7 +6640,7 @@
           <a:bodyPr wrap="square" lIns="0" tIns="0" rIns="0" bIns="0" rtlCol="0" anchor="ctr"/>
           <a:lstStyle/>
           <a:p>
-            <a:pPr algn="ctr" indent="0" marL="0">
+            <a:pPr marL="0" indent="0" algn="ctr">
               <a:buNone/>
             </a:pPr>
             <a:r>
@@ -6681,7 +6679,7 @@
           <a:bodyPr wrap="square" lIns="0" tIns="0" rIns="0" bIns="0" rtlCol="0" anchor="ctr"/>
           <a:lstStyle/>
           <a:p>
-            <a:pPr algn="ctr" indent="0" marL="0">
+            <a:pPr marL="0" indent="0" algn="ctr">
               <a:buNone/>
             </a:pPr>
             <a:r>
@@ -6720,7 +6718,7 @@
           <a:bodyPr wrap="square" lIns="0" tIns="0" rIns="0" bIns="0" rtlCol="0" anchor="t"/>
           <a:lstStyle/>
           <a:p>
-            <a:pPr indent="0" marL="0">
+            <a:pPr marL="0" indent="0">
               <a:buNone/>
             </a:pPr>
             <a:r>
@@ -6759,7 +6757,7 @@
           <a:bodyPr wrap="square" lIns="0" tIns="0" rIns="0" bIns="0" rtlCol="0" anchor="ctr"/>
           <a:lstStyle/>
           <a:p>
-            <a:pPr algn="ctr" indent="0" marL="0">
+            <a:pPr marL="0" indent="0" algn="ctr">
               <a:buNone/>
             </a:pPr>
             <a:r>
@@ -6800,6 +6798,13 @@
             <a:tailEnd type="triangle"/>
           </a:ln>
         </p:spPr>
+        <p:txBody>
+          <a:bodyPr/>
+          <a:lstStyle/>
+          <a:p>
+            <a:endParaRPr lang="zh-TW" altLang="en-US"/>
+          </a:p>
+        </p:txBody>
       </p:sp>
       <p:sp>
         <p:nvSpPr>
@@ -6825,6 +6830,13 @@
             <a:prstDash val="solid"/>
           </a:ln>
         </p:spPr>
+        <p:txBody>
+          <a:bodyPr/>
+          <a:lstStyle/>
+          <a:p>
+            <a:endParaRPr lang="zh-TW" altLang="en-US"/>
+          </a:p>
+        </p:txBody>
       </p:sp>
       <p:sp>
         <p:nvSpPr>
@@ -6850,6 +6862,13 @@
             <a:prstDash val="solid"/>
           </a:ln>
         </p:spPr>
+        <p:txBody>
+          <a:bodyPr/>
+          <a:lstStyle/>
+          <a:p>
+            <a:endParaRPr lang="zh-TW" altLang="en-US"/>
+          </a:p>
+        </p:txBody>
       </p:sp>
       <p:sp>
         <p:nvSpPr>
@@ -6872,7 +6891,7 @@
           <a:bodyPr wrap="square" lIns="0" tIns="0" rIns="0" bIns="0" rtlCol="0" anchor="ctr"/>
           <a:lstStyle/>
           <a:p>
-            <a:pPr algn="ctr" indent="0" marL="0">
+            <a:pPr marL="0" indent="0" algn="ctr">
               <a:buNone/>
             </a:pPr>
             <a:r>
@@ -6911,7 +6930,7 @@
           <a:bodyPr wrap="square" lIns="0" tIns="0" rIns="0" bIns="0" rtlCol="0" anchor="ctr"/>
           <a:lstStyle/>
           <a:p>
-            <a:pPr algn="ctr" indent="0" marL="0">
+            <a:pPr marL="0" indent="0" algn="ctr">
               <a:buNone/>
             </a:pPr>
             <a:r>
@@ -6950,7 +6969,7 @@
           <a:bodyPr wrap="square" lIns="0" tIns="0" rIns="0" bIns="0" rtlCol="0" anchor="t"/>
           <a:lstStyle/>
           <a:p>
-            <a:pPr indent="0" marL="0">
+            <a:pPr marL="0" indent="0">
               <a:buNone/>
             </a:pPr>
             <a:r>
@@ -6989,7 +7008,7 @@
           <a:bodyPr wrap="square" lIns="0" tIns="0" rIns="0" bIns="0" rtlCol="0" anchor="ctr"/>
           <a:lstStyle/>
           <a:p>
-            <a:pPr algn="ctr" indent="0" marL="0">
+            <a:pPr marL="0" indent="0" algn="ctr">
               <a:buNone/>
             </a:pPr>
             <a:r>
@@ -7030,6 +7049,13 @@
             <a:tailEnd type="triangle"/>
           </a:ln>
         </p:spPr>
+        <p:txBody>
+          <a:bodyPr/>
+          <a:lstStyle/>
+          <a:p>
+            <a:endParaRPr lang="zh-TW" altLang="en-US"/>
+          </a:p>
+        </p:txBody>
       </p:sp>
       <p:sp>
         <p:nvSpPr>
@@ -7055,6 +7081,13 @@
             <a:prstDash val="solid"/>
           </a:ln>
         </p:spPr>
+        <p:txBody>
+          <a:bodyPr/>
+          <a:lstStyle/>
+          <a:p>
+            <a:endParaRPr lang="zh-TW" altLang="en-US"/>
+          </a:p>
+        </p:txBody>
       </p:sp>
       <p:sp>
         <p:nvSpPr>
@@ -7080,6 +7113,13 @@
             <a:prstDash val="solid"/>
           </a:ln>
         </p:spPr>
+        <p:txBody>
+          <a:bodyPr/>
+          <a:lstStyle/>
+          <a:p>
+            <a:endParaRPr lang="zh-TW" altLang="en-US"/>
+          </a:p>
+        </p:txBody>
       </p:sp>
       <p:sp>
         <p:nvSpPr>
@@ -7102,7 +7142,7 @@
           <a:bodyPr wrap="square" lIns="0" tIns="0" rIns="0" bIns="0" rtlCol="0" anchor="ctr"/>
           <a:lstStyle/>
           <a:p>
-            <a:pPr algn="ctr" indent="0" marL="0">
+            <a:pPr marL="0" indent="0" algn="ctr">
               <a:buNone/>
             </a:pPr>
             <a:r>
@@ -7141,7 +7181,7 @@
           <a:bodyPr wrap="square" lIns="0" tIns="0" rIns="0" bIns="0" rtlCol="0" anchor="ctr"/>
           <a:lstStyle/>
           <a:p>
-            <a:pPr algn="ctr" indent="0" marL="0">
+            <a:pPr marL="0" indent="0" algn="ctr">
               <a:buNone/>
             </a:pPr>
             <a:r>
@@ -7180,7 +7220,7 @@
           <a:bodyPr wrap="square" lIns="0" tIns="0" rIns="0" bIns="0" rtlCol="0" anchor="t"/>
           <a:lstStyle/>
           <a:p>
-            <a:pPr indent="0" marL="0">
+            <a:pPr marL="0" indent="0">
               <a:buNone/>
             </a:pPr>
             <a:r>
@@ -7219,7 +7259,7 @@
           <a:bodyPr wrap="square" lIns="0" tIns="0" rIns="0" bIns="0" rtlCol="0" anchor="ctr"/>
           <a:lstStyle/>
           <a:p>
-            <a:pPr indent="0" marL="0">
+            <a:pPr marL="0" indent="0">
               <a:buNone/>
             </a:pPr>
             <a:r>
@@ -7258,7 +7298,7 @@
           <a:bodyPr wrap="square" lIns="0" tIns="0" rIns="0" bIns="0" rtlCol="0" anchor="ctr"/>
           <a:lstStyle/>
           <a:p>
-            <a:pPr indent="0" marL="0">
+            <a:pPr marL="0" indent="0">
               <a:buNone/>
             </a:pPr>
             <a:r>
@@ -7292,6 +7332,7 @@
         <a:solidFill>
           <a:srgbClr val="FFFFFF"/>
         </a:solidFill>
+        <a:effectLst/>
       </p:bgPr>
     </p:bg>
     <p:spTree>
@@ -7332,6 +7373,13 @@
             <a:prstDash val="solid"/>
           </a:ln>
         </p:spPr>
+        <p:txBody>
+          <a:bodyPr/>
+          <a:lstStyle/>
+          <a:p>
+            <a:endParaRPr lang="zh-TW" altLang="en-US"/>
+          </a:p>
+        </p:txBody>
       </p:sp>
       <p:sp>
         <p:nvSpPr>
@@ -7354,7 +7402,7 @@
           <a:bodyPr wrap="square" lIns="0" tIns="0" rIns="0" bIns="0" rtlCol="0" anchor="t"/>
           <a:lstStyle/>
           <a:p>
-            <a:pPr indent="0" marL="0">
+            <a:pPr marL="0" indent="0">
               <a:buNone/>
             </a:pPr>
             <a:r>
@@ -7393,7 +7441,7 @@
           <a:bodyPr wrap="square" lIns="0" tIns="0" rIns="0" bIns="0" rtlCol="0" anchor="ctr"/>
           <a:lstStyle/>
           <a:p>
-            <a:pPr indent="0" marL="0">
+            <a:pPr marL="0" indent="0">
               <a:buNone/>
             </a:pPr>
             <a:r>
@@ -7432,7 +7480,7 @@
           <a:bodyPr wrap="square" lIns="0" tIns="0" rIns="0" bIns="0" rtlCol="0" anchor="ctr"/>
           <a:lstStyle/>
           <a:p>
-            <a:pPr algn="r" indent="0" marL="0">
+            <a:pPr marL="0" indent="0" algn="r">
               <a:buNone/>
             </a:pPr>
             <a:r>
@@ -7471,7 +7519,7 @@
           <a:bodyPr wrap="square" lIns="0" tIns="0" rIns="0" bIns="0" rtlCol="0" anchor="ctr"/>
           <a:lstStyle/>
           <a:p>
-            <a:pPr algn="r" indent="0" marL="0">
+            <a:pPr marL="0" indent="0" algn="r">
               <a:buNone/>
             </a:pPr>
             <a:r>
@@ -7510,7 +7558,7 @@
           <a:bodyPr wrap="square" lIns="0" tIns="0" rIns="0" bIns="0" rtlCol="0" anchor="ctr"/>
           <a:lstStyle/>
           <a:p>
-            <a:pPr indent="0" marL="0">
+            <a:pPr marL="0" indent="0">
               <a:buNone/>
             </a:pPr>
             <a:r>
@@ -7544,17 +7592,41 @@
         </p:nvGraphicFramePr>
         <p:xfrm>
           <a:off x="457200" y="1828800"/>
-          <a:ext cx="6400800" cy="914400"/>
+          <a:ext cx="6400800" cy="1234440"/>
         </p:xfrm>
         <a:graphic>
           <a:graphicData uri="http://schemas.openxmlformats.org/drawingml/2006/table">
             <a:tbl>
               <a:tblPr/>
               <a:tblGrid>
-                <a:gridCol w="1371600"/>
-                <a:gridCol w="2926080"/>
-                <a:gridCol w="731520"/>
-                <a:gridCol w="1371600"/>
+                <a:gridCol w="1371600">
+                  <a:extLst>
+                    <a:ext uri="{9D8B030D-6E8A-4147-A177-3AD203B41FA5}">
+                      <a16:colId xmlns:a16="http://schemas.microsoft.com/office/drawing/2014/main" val="20000"/>
+                    </a:ext>
+                  </a:extLst>
+                </a:gridCol>
+                <a:gridCol w="2926080">
+                  <a:extLst>
+                    <a:ext uri="{9D8B030D-6E8A-4147-A177-3AD203B41FA5}">
+                      <a16:colId xmlns:a16="http://schemas.microsoft.com/office/drawing/2014/main" val="20001"/>
+                    </a:ext>
+                  </a:extLst>
+                </a:gridCol>
+                <a:gridCol w="731520">
+                  <a:extLst>
+                    <a:ext uri="{9D8B030D-6E8A-4147-A177-3AD203B41FA5}">
+                      <a16:colId xmlns:a16="http://schemas.microsoft.com/office/drawing/2014/main" val="20002"/>
+                    </a:ext>
+                  </a:extLst>
+                </a:gridCol>
+                <a:gridCol w="1371600">
+                  <a:extLst>
+                    <a:ext uri="{9D8B030D-6E8A-4147-A177-3AD203B41FA5}">
+                      <a16:colId xmlns:a16="http://schemas.microsoft.com/office/drawing/2014/main" val="20003"/>
+                    </a:ext>
+                  </a:extLst>
+                </a:gridCol>
               </a:tblGrid>
               <a:tr h="0">
                 <a:tc>
@@ -7562,7 +7634,7 @@
                     <a:bodyPr/>
                     <a:lstStyle/>
                     <a:p>
-                      <a:pPr indent="0" marL="0">
+                      <a:pPr marL="0" indent="0">
                         <a:buNone/>
                       </a:pPr>
                       <a:r>
@@ -7583,7 +7655,7 @@
                       </a:endParaRPr>
                     </a:p>
                   </a:txBody>
-                  <a:tcPr marL="91440" marR="91440" marT="45720" marB="45720">
+                  <a:tcPr>
                     <a:lnL w="6350" cap="flat" cmpd="sng" algn="ctr">
                       <a:solidFill>
                         <a:srgbClr val="D5C8EE"/>
@@ -7630,7 +7702,7 @@
                     <a:bodyPr/>
                     <a:lstStyle/>
                     <a:p>
-                      <a:pPr indent="0" marL="0">
+                      <a:pPr marL="0" indent="0">
                         <a:buNone/>
                       </a:pPr>
                       <a:r>
@@ -7651,7 +7723,7 @@
                       </a:endParaRPr>
                     </a:p>
                   </a:txBody>
-                  <a:tcPr marL="91440" marR="91440" marT="45720" marB="45720">
+                  <a:tcPr>
                     <a:lnL w="6350" cap="flat" cmpd="sng" algn="ctr">
                       <a:solidFill>
                         <a:srgbClr val="D5C8EE"/>
@@ -7698,7 +7770,7 @@
                     <a:bodyPr/>
                     <a:lstStyle/>
                     <a:p>
-                      <a:pPr indent="0" marL="0">
+                      <a:pPr marL="0" indent="0">
                         <a:buNone/>
                       </a:pPr>
                       <a:r>
@@ -7719,7 +7791,7 @@
                       </a:endParaRPr>
                     </a:p>
                   </a:txBody>
-                  <a:tcPr marL="91440" marR="91440" marT="45720" marB="45720">
+                  <a:tcPr>
                     <a:lnL w="6350" cap="flat" cmpd="sng" algn="ctr">
                       <a:solidFill>
                         <a:srgbClr val="D5C8EE"/>
@@ -7766,7 +7838,7 @@
                     <a:bodyPr/>
                     <a:lstStyle/>
                     <a:p>
-                      <a:pPr indent="0" marL="0">
+                      <a:pPr marL="0" indent="0">
                         <a:buNone/>
                       </a:pPr>
                       <a:r>
@@ -7787,7 +7859,7 @@
                       </a:endParaRPr>
                     </a:p>
                   </a:txBody>
-                  <a:tcPr marL="91440" marR="91440" marT="45720" marB="45720">
+                  <a:tcPr>
                     <a:lnL w="6350" cap="flat" cmpd="sng" algn="ctr">
                       <a:solidFill>
                         <a:srgbClr val="D5C8EE"/>
@@ -7829,6 +7901,11 @@
                     </a:solidFill>
                   </a:tcPr>
                 </a:tc>
+                <a:extLst>
+                  <a:ext uri="{0D108BD9-81ED-4DB2-BD59-A6C34878D82A}">
+                    <a16:rowId xmlns:a16="http://schemas.microsoft.com/office/drawing/2014/main" val="10000"/>
+                  </a:ext>
+                </a:extLst>
               </a:tr>
               <a:tr h="0">
                 <a:tc>
@@ -7836,7 +7913,7 @@
                     <a:bodyPr/>
                     <a:lstStyle/>
                     <a:p>
-                      <a:pPr indent="0" marL="0">
+                      <a:pPr marL="0" indent="0">
                         <a:buNone/>
                       </a:pPr>
                       <a:r>
@@ -7857,7 +7934,7 @@
                       </a:endParaRPr>
                     </a:p>
                   </a:txBody>
-                  <a:tcPr marL="91440" marR="91440" marT="45720" marB="45720">
+                  <a:tcPr>
                     <a:lnL w="6350" cap="flat" cmpd="sng" algn="ctr">
                       <a:solidFill>
                         <a:srgbClr val="D5C8EE"/>
@@ -7901,7 +7978,7 @@
                     <a:bodyPr/>
                     <a:lstStyle/>
                     <a:p>
-                      <a:pPr indent="0" marL="0">
+                      <a:pPr marL="0" indent="0">
                         <a:buNone/>
                       </a:pPr>
                       <a:r>
@@ -7922,7 +7999,7 @@
                       </a:endParaRPr>
                     </a:p>
                   </a:txBody>
-                  <a:tcPr marL="91440" marR="91440" marT="45720" marB="45720">
+                  <a:tcPr>
                     <a:lnL w="6350" cap="flat" cmpd="sng" algn="ctr">
                       <a:solidFill>
                         <a:srgbClr val="D5C8EE"/>
@@ -7966,7 +8043,7 @@
                     <a:bodyPr/>
                     <a:lstStyle/>
                     <a:p>
-                      <a:pPr algn="ctr" indent="0" marL="0">
+                      <a:pPr marL="0" indent="0" algn="ctr">
                         <a:buNone/>
                       </a:pPr>
                       <a:r>
@@ -7987,7 +8064,7 @@
                       </a:endParaRPr>
                     </a:p>
                   </a:txBody>
-                  <a:tcPr marL="91440" marR="91440" marT="45720" marB="45720">
+                  <a:tcPr>
                     <a:lnL w="6350" cap="flat" cmpd="sng" algn="ctr">
                       <a:solidFill>
                         <a:srgbClr val="D5C8EE"/>
@@ -8031,7 +8108,7 @@
                     <a:bodyPr/>
                     <a:lstStyle/>
                     <a:p>
-                      <a:pPr indent="0" marL="0">
+                      <a:pPr marL="0" indent="0">
                         <a:buNone/>
                       </a:pPr>
                       <a:r>
@@ -8052,7 +8129,7 @@
                       </a:endParaRPr>
                     </a:p>
                   </a:txBody>
-                  <a:tcPr marL="91440" marR="91440" marT="45720" marB="45720">
+                  <a:tcPr>
                     <a:lnL w="6350" cap="flat" cmpd="sng" algn="ctr">
                       <a:solidFill>
                         <a:srgbClr val="D5C8EE"/>
@@ -8091,6 +8168,11 @@
                     </a:lnB>
                   </a:tcPr>
                 </a:tc>
+                <a:extLst>
+                  <a:ext uri="{0D108BD9-81ED-4DB2-BD59-A6C34878D82A}">
+                    <a16:rowId xmlns:a16="http://schemas.microsoft.com/office/drawing/2014/main" val="10001"/>
+                  </a:ext>
+                </a:extLst>
               </a:tr>
               <a:tr h="0">
                 <a:tc>
@@ -8098,7 +8180,7 @@
                     <a:bodyPr/>
                     <a:lstStyle/>
                     <a:p>
-                      <a:pPr indent="0" marL="0">
+                      <a:pPr marL="0" indent="0">
                         <a:buNone/>
                       </a:pPr>
                       <a:r>
@@ -8119,7 +8201,7 @@
                       </a:endParaRPr>
                     </a:p>
                   </a:txBody>
-                  <a:tcPr marL="91440" marR="91440" marT="45720" marB="45720">
+                  <a:tcPr>
                     <a:lnL w="6350" cap="flat" cmpd="sng" algn="ctr">
                       <a:solidFill>
                         <a:srgbClr val="D5C8EE"/>
@@ -8166,7 +8248,7 @@
                     <a:bodyPr/>
                     <a:lstStyle/>
                     <a:p>
-                      <a:pPr indent="0" marL="0">
+                      <a:pPr marL="0" indent="0">
                         <a:buNone/>
                       </a:pPr>
                       <a:r>
@@ -8187,7 +8269,7 @@
                       </a:endParaRPr>
                     </a:p>
                   </a:txBody>
-                  <a:tcPr marL="91440" marR="91440" marT="45720" marB="45720">
+                  <a:tcPr>
                     <a:lnL w="6350" cap="flat" cmpd="sng" algn="ctr">
                       <a:solidFill>
                         <a:srgbClr val="D5C8EE"/>
@@ -8234,7 +8316,7 @@
                     <a:bodyPr/>
                     <a:lstStyle/>
                     <a:p>
-                      <a:pPr algn="ctr" indent="0" marL="0">
+                      <a:pPr marL="0" indent="0" algn="ctr">
                         <a:buNone/>
                       </a:pPr>
                       <a:r>
@@ -8255,7 +8337,7 @@
                       </a:endParaRPr>
                     </a:p>
                   </a:txBody>
-                  <a:tcPr marL="91440" marR="91440" marT="45720" marB="45720">
+                  <a:tcPr>
                     <a:lnL w="6350" cap="flat" cmpd="sng" algn="ctr">
                       <a:solidFill>
                         <a:srgbClr val="D5C8EE"/>
@@ -8302,7 +8384,7 @@
                     <a:bodyPr/>
                     <a:lstStyle/>
                     <a:p>
-                      <a:pPr indent="0" marL="0">
+                      <a:pPr marL="0" indent="0">
                         <a:buNone/>
                       </a:pPr>
                       <a:r>
@@ -8323,7 +8405,7 @@
                       </a:endParaRPr>
                     </a:p>
                   </a:txBody>
-                  <a:tcPr marL="91440" marR="91440" marT="45720" marB="45720">
+                  <a:tcPr>
                     <a:lnL w="6350" cap="flat" cmpd="sng" algn="ctr">
                       <a:solidFill>
                         <a:srgbClr val="D5C8EE"/>
@@ -8365,6 +8447,11 @@
                     </a:solidFill>
                   </a:tcPr>
                 </a:tc>
+                <a:extLst>
+                  <a:ext uri="{0D108BD9-81ED-4DB2-BD59-A6C34878D82A}">
+                    <a16:rowId xmlns:a16="http://schemas.microsoft.com/office/drawing/2014/main" val="10002"/>
+                  </a:ext>
+                </a:extLst>
               </a:tr>
               <a:tr h="0">
                 <a:tc>
@@ -8372,7 +8459,7 @@
                     <a:bodyPr/>
                     <a:lstStyle/>
                     <a:p>
-                      <a:pPr indent="0" marL="0">
+                      <a:pPr marL="0" indent="0">
                         <a:buNone/>
                       </a:pPr>
                       <a:r>
@@ -8393,7 +8480,7 @@
                       </a:endParaRPr>
                     </a:p>
                   </a:txBody>
-                  <a:tcPr marL="91440" marR="91440" marT="45720" marB="45720">
+                  <a:tcPr>
                     <a:lnL w="6350" cap="flat" cmpd="sng" algn="ctr">
                       <a:solidFill>
                         <a:srgbClr val="D5C8EE"/>
@@ -8437,7 +8524,7 @@
                     <a:bodyPr/>
                     <a:lstStyle/>
                     <a:p>
-                      <a:pPr indent="0" marL="0">
+                      <a:pPr marL="0" indent="0">
                         <a:buNone/>
                       </a:pPr>
                       <a:r>
@@ -8458,7 +8545,7 @@
                       </a:endParaRPr>
                     </a:p>
                   </a:txBody>
-                  <a:tcPr marL="91440" marR="91440" marT="45720" marB="45720">
+                  <a:tcPr>
                     <a:lnL w="6350" cap="flat" cmpd="sng" algn="ctr">
                       <a:solidFill>
                         <a:srgbClr val="D5C8EE"/>
@@ -8502,7 +8589,7 @@
                     <a:bodyPr/>
                     <a:lstStyle/>
                     <a:p>
-                      <a:pPr algn="ctr" indent="0" marL="0">
+                      <a:pPr marL="0" indent="0" algn="ctr">
                         <a:buNone/>
                       </a:pPr>
                       <a:r>
@@ -8523,7 +8610,7 @@
                       </a:endParaRPr>
                     </a:p>
                   </a:txBody>
-                  <a:tcPr marL="91440" marR="91440" marT="45720" marB="45720">
+                  <a:tcPr>
                     <a:lnL w="6350" cap="flat" cmpd="sng" algn="ctr">
                       <a:solidFill>
                         <a:srgbClr val="D5C8EE"/>
@@ -8567,7 +8654,7 @@
                     <a:bodyPr/>
                     <a:lstStyle/>
                     <a:p>
-                      <a:pPr indent="0" marL="0">
+                      <a:pPr marL="0" indent="0">
                         <a:buNone/>
                       </a:pPr>
                       <a:r>
@@ -8588,7 +8675,7 @@
                       </a:endParaRPr>
                     </a:p>
                   </a:txBody>
-                  <a:tcPr marL="91440" marR="91440" marT="45720" marB="45720">
+                  <a:tcPr>
                     <a:lnL w="6350" cap="flat" cmpd="sng" algn="ctr">
                       <a:solidFill>
                         <a:srgbClr val="D5C8EE"/>
@@ -8627,6 +8714,11 @@
                     </a:lnB>
                   </a:tcPr>
                 </a:tc>
+                <a:extLst>
+                  <a:ext uri="{0D108BD9-81ED-4DB2-BD59-A6C34878D82A}">
+                    <a16:rowId xmlns:a16="http://schemas.microsoft.com/office/drawing/2014/main" val="10003"/>
+                  </a:ext>
+                </a:extLst>
               </a:tr>
               <a:tr h="0">
                 <a:tc>
@@ -8634,7 +8726,7 @@
                     <a:bodyPr/>
                     <a:lstStyle/>
                     <a:p>
-                      <a:pPr indent="0" marL="0">
+                      <a:pPr marL="0" indent="0">
                         <a:buNone/>
                       </a:pPr>
                       <a:r>
@@ -8655,7 +8747,7 @@
                       </a:endParaRPr>
                     </a:p>
                   </a:txBody>
-                  <a:tcPr marL="91440" marR="91440" marT="45720" marB="45720">
+                  <a:tcPr>
                     <a:lnL w="6350" cap="flat" cmpd="sng" algn="ctr">
                       <a:solidFill>
                         <a:srgbClr val="D5C8EE"/>
@@ -8702,7 +8794,7 @@
                     <a:bodyPr/>
                     <a:lstStyle/>
                     <a:p>
-                      <a:pPr indent="0" marL="0">
+                      <a:pPr marL="0" indent="0">
                         <a:buNone/>
                       </a:pPr>
                       <a:r>
@@ -8723,7 +8815,7 @@
                       </a:endParaRPr>
                     </a:p>
                   </a:txBody>
-                  <a:tcPr marL="91440" marR="91440" marT="45720" marB="45720">
+                  <a:tcPr>
                     <a:lnL w="6350" cap="flat" cmpd="sng" algn="ctr">
                       <a:solidFill>
                         <a:srgbClr val="D5C8EE"/>
@@ -8770,7 +8862,7 @@
                     <a:bodyPr/>
                     <a:lstStyle/>
                     <a:p>
-                      <a:pPr algn="ctr" indent="0" marL="0">
+                      <a:pPr marL="0" indent="0" algn="ctr">
                         <a:buNone/>
                       </a:pPr>
                       <a:r>
@@ -8791,7 +8883,7 @@
                       </a:endParaRPr>
                     </a:p>
                   </a:txBody>
-                  <a:tcPr marL="91440" marR="91440" marT="45720" marB="45720">
+                  <a:tcPr>
                     <a:lnL w="6350" cap="flat" cmpd="sng" algn="ctr">
                       <a:solidFill>
                         <a:srgbClr val="D5C8EE"/>
@@ -8838,7 +8930,7 @@
                     <a:bodyPr/>
                     <a:lstStyle/>
                     <a:p>
-                      <a:pPr indent="0" marL="0">
+                      <a:pPr marL="0" indent="0">
                         <a:buNone/>
                       </a:pPr>
                       <a:r>
@@ -8859,7 +8951,7 @@
                       </a:endParaRPr>
                     </a:p>
                   </a:txBody>
-                  <a:tcPr marL="91440" marR="91440" marT="45720" marB="45720">
+                  <a:tcPr>
                     <a:lnL w="6350" cap="flat" cmpd="sng" algn="ctr">
                       <a:solidFill>
                         <a:srgbClr val="D5C8EE"/>
@@ -8901,6 +8993,11 @@
                     </a:solidFill>
                   </a:tcPr>
                 </a:tc>
+                <a:extLst>
+                  <a:ext uri="{0D108BD9-81ED-4DB2-BD59-A6C34878D82A}">
+                    <a16:rowId xmlns:a16="http://schemas.microsoft.com/office/drawing/2014/main" val="10004"/>
+                  </a:ext>
+                </a:extLst>
               </a:tr>
             </a:tbl>
           </a:graphicData>
@@ -8927,7 +9024,7 @@
           <a:bodyPr wrap="square" lIns="0" tIns="0" rIns="0" bIns="0" rtlCol="0" anchor="ctr"/>
           <a:lstStyle/>
           <a:p>
-            <a:pPr indent="0" marL="0">
+            <a:pPr marL="0" indent="0">
               <a:buNone/>
             </a:pPr>
             <a:r>
@@ -8969,6 +9066,13 @@
             <a:prstDash val="solid"/>
           </a:ln>
         </p:spPr>
+        <p:txBody>
+          <a:bodyPr/>
+          <a:lstStyle/>
+          <a:p>
+            <a:endParaRPr lang="zh-TW" altLang="en-US"/>
+          </a:p>
+        </p:txBody>
       </p:sp>
       <p:sp>
         <p:nvSpPr>
@@ -8994,6 +9098,13 @@
             <a:prstDash val="solid"/>
           </a:ln>
         </p:spPr>
+        <p:txBody>
+          <a:bodyPr/>
+          <a:lstStyle/>
+          <a:p>
+            <a:endParaRPr lang="zh-TW" altLang="en-US"/>
+          </a:p>
+        </p:txBody>
       </p:sp>
       <p:sp>
         <p:nvSpPr>
@@ -9016,7 +9127,7 @@
           <a:bodyPr wrap="square" lIns="0" tIns="0" rIns="0" bIns="0" rtlCol="0" anchor="ctr"/>
           <a:lstStyle/>
           <a:p>
-            <a:pPr indent="0" marL="0">
+            <a:pPr marL="0" indent="0">
               <a:buNone/>
             </a:pPr>
             <a:r>
@@ -9055,7 +9166,7 @@
           <a:bodyPr wrap="square" lIns="0" tIns="0" rIns="0" bIns="0" rtlCol="0" anchor="ctr"/>
           <a:lstStyle/>
           <a:p>
-            <a:pPr indent="0" marL="0">
+            <a:pPr marL="0" indent="0">
               <a:buNone/>
             </a:pPr>
             <a:r>
@@ -9075,7 +9186,7 @@
       </p:sp>
       <p:sp>
         <p:nvSpPr>
-          <p:cNvPr id="14" name="Text 11"/>
+          <p:cNvPr id="8" name="Text 11"/>
           <p:cNvSpPr/>
           <p:nvPr/>
         </p:nvSpPr>
@@ -9094,7 +9205,7 @@
           <a:bodyPr wrap="square" lIns="0" tIns="0" rIns="0" bIns="0" rtlCol="0" anchor="ctr"/>
           <a:lstStyle/>
           <a:p>
-            <a:pPr indent="0" marL="0">
+            <a:pPr marL="0" indent="0">
               <a:buNone/>
             </a:pPr>
             <a:r>
@@ -9136,6 +9247,13 @@
             <a:prstDash val="solid"/>
           </a:ln>
         </p:spPr>
+        <p:txBody>
+          <a:bodyPr/>
+          <a:lstStyle/>
+          <a:p>
+            <a:endParaRPr lang="zh-TW" altLang="en-US"/>
+          </a:p>
+        </p:txBody>
       </p:sp>
       <p:sp>
         <p:nvSpPr>
@@ -9161,6 +9279,13 @@
             <a:prstDash val="solid"/>
           </a:ln>
         </p:spPr>
+        <p:txBody>
+          <a:bodyPr/>
+          <a:lstStyle/>
+          <a:p>
+            <a:endParaRPr lang="zh-TW" altLang="en-US"/>
+          </a:p>
+        </p:txBody>
       </p:sp>
       <p:sp>
         <p:nvSpPr>
@@ -9183,7 +9308,7 @@
           <a:bodyPr wrap="square" lIns="0" tIns="0" rIns="0" bIns="0" rtlCol="0" anchor="ctr"/>
           <a:lstStyle/>
           <a:p>
-            <a:pPr indent="0" marL="0">
+            <a:pPr marL="0" indent="0">
               <a:buNone/>
             </a:pPr>
             <a:r>
@@ -9222,7 +9347,7 @@
           <a:bodyPr wrap="square" lIns="0" tIns="0" rIns="0" bIns="0" rtlCol="0" anchor="ctr"/>
           <a:lstStyle/>
           <a:p>
-            <a:pPr indent="0" marL="0">
+            <a:pPr marL="0" indent="0">
               <a:buNone/>
             </a:pPr>
             <a:r>
@@ -9261,7 +9386,7 @@
           <a:bodyPr wrap="square" lIns="0" tIns="0" rIns="0" bIns="0" rtlCol="0" anchor="ctr"/>
           <a:lstStyle/>
           <a:p>
-            <a:pPr indent="0" marL="0">
+            <a:pPr marL="0" indent="0">
               <a:buNone/>
             </a:pPr>
             <a:r>
@@ -9394,7 +9519,7 @@
           <a:bodyPr wrap="square" lIns="0" tIns="0" rIns="0" bIns="0" rtlCol="0" anchor="ctr"/>
           <a:lstStyle/>
           <a:p>
-            <a:pPr indent="0" marL="0">
+            <a:pPr marL="0" indent="0">
               <a:buNone/>
             </a:pPr>
             <a:r>
@@ -9428,6 +9553,7 @@
         <a:solidFill>
           <a:srgbClr val="FFFFFF"/>
         </a:solidFill>
+        <a:effectLst/>
       </p:bgPr>
     </p:bg>
     <p:spTree>
@@ -9468,6 +9594,13 @@
             <a:prstDash val="solid"/>
           </a:ln>
         </p:spPr>
+        <p:txBody>
+          <a:bodyPr/>
+          <a:lstStyle/>
+          <a:p>
+            <a:endParaRPr lang="zh-TW" altLang="en-US"/>
+          </a:p>
+        </p:txBody>
       </p:sp>
       <p:sp>
         <p:nvSpPr>
@@ -9490,7 +9623,7 @@
           <a:bodyPr wrap="square" lIns="0" tIns="0" rIns="0" bIns="0" rtlCol="0" anchor="t"/>
           <a:lstStyle/>
           <a:p>
-            <a:pPr indent="0" marL="0">
+            <a:pPr marL="0" indent="0">
               <a:buNone/>
             </a:pPr>
             <a:r>
@@ -9529,7 +9662,7 @@
           <a:bodyPr wrap="square" lIns="0" tIns="0" rIns="0" bIns="0" rtlCol="0" anchor="t"/>
           <a:lstStyle/>
           <a:p>
-            <a:pPr indent="0" marL="0">
+            <a:pPr marL="0" indent="0">
               <a:buNone/>
             </a:pPr>
             <a:r>
@@ -9568,7 +9701,7 @@
           <a:bodyPr wrap="square" lIns="0" tIns="0" rIns="0" bIns="0" rtlCol="0" anchor="ctr"/>
           <a:lstStyle/>
           <a:p>
-            <a:pPr indent="0" marL="0">
+            <a:pPr marL="0" indent="0">
               <a:buNone/>
             </a:pPr>
             <a:r>
@@ -9607,7 +9740,7 @@
           <a:bodyPr wrap="square" lIns="0" tIns="0" rIns="0" bIns="0" rtlCol="0" anchor="ctr"/>
           <a:lstStyle/>
           <a:p>
-            <a:pPr algn="r" indent="0" marL="0">
+            <a:pPr marL="0" indent="0" algn="r">
               <a:buNone/>
             </a:pPr>
             <a:r>
@@ -9646,7 +9779,7 @@
           <a:bodyPr wrap="square" lIns="0" tIns="0" rIns="0" bIns="0" rtlCol="0" anchor="ctr"/>
           <a:lstStyle/>
           <a:p>
-            <a:pPr algn="r" indent="0" marL="0">
+            <a:pPr marL="0" indent="0" algn="r">
               <a:buNone/>
             </a:pPr>
             <a:r>
@@ -9688,6 +9821,13 @@
             <a:prstDash val="solid"/>
           </a:ln>
         </p:spPr>
+        <p:txBody>
+          <a:bodyPr/>
+          <a:lstStyle/>
+          <a:p>
+            <a:endParaRPr lang="zh-TW" altLang="en-US"/>
+          </a:p>
+        </p:txBody>
       </p:sp>
       <p:sp>
         <p:nvSpPr>
@@ -9710,7 +9850,7 @@
           <a:bodyPr wrap="square" lIns="0" tIns="0" rIns="0" bIns="0" rtlCol="0" anchor="ctr"/>
           <a:lstStyle/>
           <a:p>
-            <a:pPr indent="0" marL="0">
+            <a:pPr marL="0" indent="0">
               <a:buNone/>
             </a:pPr>
             <a:r>
@@ -9749,7 +9889,7 @@
           <a:bodyPr wrap="square" lIns="0" tIns="0" rIns="0" bIns="0" rtlCol="0" anchor="ctr"/>
           <a:lstStyle/>
           <a:p>
-            <a:pPr algn="ctr" indent="0" marL="0">
+            <a:pPr marL="0" indent="0" algn="ctr">
               <a:buNone/>
             </a:pPr>
             <a:r>
@@ -9788,7 +9928,7 @@
           <a:bodyPr wrap="square" lIns="0" tIns="0" rIns="0" bIns="0" rtlCol="0" anchor="ctr"/>
           <a:lstStyle/>
           <a:p>
-            <a:pPr algn="ctr" indent="0" marL="0">
+            <a:pPr marL="0" indent="0" algn="ctr">
               <a:buNone/>
             </a:pPr>
             <a:r>
@@ -9827,7 +9967,7 @@
           <a:bodyPr wrap="square" lIns="0" tIns="0" rIns="0" bIns="0" rtlCol="0" anchor="ctr"/>
           <a:lstStyle/>
           <a:p>
-            <a:pPr algn="ctr" indent="0" marL="0">
+            <a:pPr marL="0" indent="0" algn="ctr">
               <a:buNone/>
             </a:pPr>
             <a:r>
@@ -9866,7 +10006,7 @@
           <a:bodyPr wrap="square" lIns="0" tIns="0" rIns="0" bIns="0" rtlCol="0" anchor="ctr"/>
           <a:lstStyle/>
           <a:p>
-            <a:pPr algn="ctr" indent="0" marL="0">
+            <a:pPr marL="0" indent="0" algn="ctr">
               <a:buNone/>
             </a:pPr>
             <a:r>
@@ -9905,7 +10045,7 @@
           <a:bodyPr wrap="square" lIns="0" tIns="0" rIns="0" bIns="0" rtlCol="0" anchor="ctr"/>
           <a:lstStyle/>
           <a:p>
-            <a:pPr algn="ctr" indent="0" marL="0">
+            <a:pPr marL="0" indent="0" algn="ctr">
               <a:buNone/>
             </a:pPr>
             <a:r>
@@ -9944,7 +10084,7 @@
           <a:bodyPr wrap="square" lIns="0" tIns="0" rIns="0" bIns="0" rtlCol="0" anchor="ctr"/>
           <a:lstStyle/>
           <a:p>
-            <a:pPr algn="ctr" indent="0" marL="0">
+            <a:pPr marL="0" indent="0" algn="ctr">
               <a:buNone/>
             </a:pPr>
             <a:r>
@@ -9983,7 +10123,7 @@
           <a:bodyPr wrap="square" lIns="0" tIns="0" rIns="0" bIns="0" rtlCol="0" anchor="ctr"/>
           <a:lstStyle/>
           <a:p>
-            <a:pPr algn="ctr" indent="0" marL="0">
+            <a:pPr marL="0" indent="0" algn="ctr">
               <a:buNone/>
             </a:pPr>
             <a:r>
@@ -10022,7 +10162,7 @@
           <a:bodyPr wrap="square" lIns="0" tIns="0" rIns="0" bIns="0" rtlCol="0" anchor="ctr"/>
           <a:lstStyle/>
           <a:p>
-            <a:pPr algn="ctr" indent="0" marL="0">
+            <a:pPr marL="0" indent="0" algn="ctr">
               <a:buNone/>
             </a:pPr>
             <a:r>
@@ -10062,6 +10202,13 @@
             <a:prstDash val="dash"/>
           </a:ln>
         </p:spPr>
+        <p:txBody>
+          <a:bodyPr/>
+          <a:lstStyle/>
+          <a:p>
+            <a:endParaRPr lang="zh-TW" altLang="en-US"/>
+          </a:p>
+        </p:txBody>
       </p:sp>
       <p:sp>
         <p:nvSpPr>
@@ -10085,6 +10232,13 @@
             <a:prstDash val="dash"/>
           </a:ln>
         </p:spPr>
+        <p:txBody>
+          <a:bodyPr/>
+          <a:lstStyle/>
+          <a:p>
+            <a:endParaRPr lang="zh-TW" altLang="en-US"/>
+          </a:p>
+        </p:txBody>
       </p:sp>
       <p:sp>
         <p:nvSpPr>
@@ -10108,6 +10262,13 @@
             <a:prstDash val="dash"/>
           </a:ln>
         </p:spPr>
+        <p:txBody>
+          <a:bodyPr/>
+          <a:lstStyle/>
+          <a:p>
+            <a:endParaRPr lang="zh-TW" altLang="en-US"/>
+          </a:p>
+        </p:txBody>
       </p:sp>
       <p:sp>
         <p:nvSpPr>
@@ -10131,6 +10292,13 @@
             <a:prstDash val="dash"/>
           </a:ln>
         </p:spPr>
+        <p:txBody>
+          <a:bodyPr/>
+          <a:lstStyle/>
+          <a:p>
+            <a:endParaRPr lang="zh-TW" altLang="en-US"/>
+          </a:p>
+        </p:txBody>
       </p:sp>
       <p:sp>
         <p:nvSpPr>
@@ -10154,6 +10322,13 @@
             <a:prstDash val="dash"/>
           </a:ln>
         </p:spPr>
+        <p:txBody>
+          <a:bodyPr/>
+          <a:lstStyle/>
+          <a:p>
+            <a:endParaRPr lang="zh-TW" altLang="en-US"/>
+          </a:p>
+        </p:txBody>
       </p:sp>
       <p:sp>
         <p:nvSpPr>
@@ -10177,6 +10352,13 @@
             <a:prstDash val="solid"/>
           </a:ln>
         </p:spPr>
+        <p:txBody>
+          <a:bodyPr/>
+          <a:lstStyle/>
+          <a:p>
+            <a:endParaRPr lang="zh-TW" altLang="en-US"/>
+          </a:p>
+        </p:txBody>
       </p:sp>
       <p:sp>
         <p:nvSpPr>
@@ -10200,6 +10382,13 @@
             <a:prstDash val="solid"/>
           </a:ln>
         </p:spPr>
+        <p:txBody>
+          <a:bodyPr/>
+          <a:lstStyle/>
+          <a:p>
+            <a:endParaRPr lang="zh-TW" altLang="en-US"/>
+          </a:p>
+        </p:txBody>
       </p:sp>
       <p:sp>
         <p:nvSpPr>
@@ -10223,6 +10412,13 @@
             <a:prstDash val="solid"/>
           </a:ln>
         </p:spPr>
+        <p:txBody>
+          <a:bodyPr/>
+          <a:lstStyle/>
+          <a:p>
+            <a:endParaRPr lang="zh-TW" altLang="en-US"/>
+          </a:p>
+        </p:txBody>
       </p:sp>
       <p:sp>
         <p:nvSpPr>
@@ -10246,6 +10442,13 @@
             <a:prstDash val="solid"/>
           </a:ln>
         </p:spPr>
+        <p:txBody>
+          <a:bodyPr/>
+          <a:lstStyle/>
+          <a:p>
+            <a:endParaRPr lang="zh-TW" altLang="en-US"/>
+          </a:p>
+        </p:txBody>
       </p:sp>
       <p:sp>
         <p:nvSpPr>
@@ -10269,6 +10472,13 @@
             <a:prstDash val="solid"/>
           </a:ln>
         </p:spPr>
+        <p:txBody>
+          <a:bodyPr/>
+          <a:lstStyle/>
+          <a:p>
+            <a:endParaRPr lang="zh-TW" altLang="en-US"/>
+          </a:p>
+        </p:txBody>
       </p:sp>
       <p:sp>
         <p:nvSpPr>
@@ -10292,6 +10502,13 @@
             <a:prstDash val="solid"/>
           </a:ln>
         </p:spPr>
+        <p:txBody>
+          <a:bodyPr/>
+          <a:lstStyle/>
+          <a:p>
+            <a:endParaRPr lang="zh-TW" altLang="en-US"/>
+          </a:p>
+        </p:txBody>
       </p:sp>
       <p:sp>
         <p:nvSpPr>
@@ -10315,6 +10532,13 @@
             <a:prstDash val="solid"/>
           </a:ln>
         </p:spPr>
+        <p:txBody>
+          <a:bodyPr/>
+          <a:lstStyle/>
+          <a:p>
+            <a:endParaRPr lang="zh-TW" altLang="en-US"/>
+          </a:p>
+        </p:txBody>
       </p:sp>
       <p:sp>
         <p:nvSpPr>
@@ -10338,6 +10562,13 @@
             <a:prstDash val="solid"/>
           </a:ln>
         </p:spPr>
+        <p:txBody>
+          <a:bodyPr/>
+          <a:lstStyle/>
+          <a:p>
+            <a:endParaRPr lang="zh-TW" altLang="en-US"/>
+          </a:p>
+        </p:txBody>
       </p:sp>
       <p:sp>
         <p:nvSpPr>
@@ -10361,6 +10592,13 @@
             <a:prstDash val="solid"/>
           </a:ln>
         </p:spPr>
+        <p:txBody>
+          <a:bodyPr/>
+          <a:lstStyle/>
+          <a:p>
+            <a:endParaRPr lang="zh-TW" altLang="en-US"/>
+          </a:p>
+        </p:txBody>
       </p:sp>
       <p:sp>
         <p:nvSpPr>
@@ -10384,6 +10622,13 @@
             <a:prstDash val="solid"/>
           </a:ln>
         </p:spPr>
+        <p:txBody>
+          <a:bodyPr/>
+          <a:lstStyle/>
+          <a:p>
+            <a:endParaRPr lang="zh-TW" altLang="en-US"/>
+          </a:p>
+        </p:txBody>
       </p:sp>
       <p:sp>
         <p:nvSpPr>
@@ -10407,6 +10652,13 @@
             <a:prstDash val="solid"/>
           </a:ln>
         </p:spPr>
+        <p:txBody>
+          <a:bodyPr/>
+          <a:lstStyle/>
+          <a:p>
+            <a:endParaRPr lang="zh-TW" altLang="en-US"/>
+          </a:p>
+        </p:txBody>
       </p:sp>
       <p:sp>
         <p:nvSpPr>
@@ -10430,6 +10682,13 @@
             <a:prstDash val="solid"/>
           </a:ln>
         </p:spPr>
+        <p:txBody>
+          <a:bodyPr/>
+          <a:lstStyle/>
+          <a:p>
+            <a:endParaRPr lang="zh-TW" altLang="en-US"/>
+          </a:p>
+        </p:txBody>
       </p:sp>
       <p:sp>
         <p:nvSpPr>
@@ -10453,6 +10712,13 @@
             <a:prstDash val="solid"/>
           </a:ln>
         </p:spPr>
+        <p:txBody>
+          <a:bodyPr/>
+          <a:lstStyle/>
+          <a:p>
+            <a:endParaRPr lang="zh-TW" altLang="en-US"/>
+          </a:p>
+        </p:txBody>
       </p:sp>
       <p:sp>
         <p:nvSpPr>
@@ -10475,7 +10741,7 @@
           <a:bodyPr wrap="square" lIns="0" tIns="0" rIns="0" bIns="0" rtlCol="0" anchor="ctr"/>
           <a:lstStyle/>
           <a:p>
-            <a:pPr indent="0" marL="0">
+            <a:pPr marL="0" indent="0">
               <a:buNone/>
             </a:pPr>
             <a:r>
@@ -10514,7 +10780,7 @@
           <a:bodyPr wrap="square" lIns="0" tIns="0" rIns="0" bIns="0" rtlCol="0" anchor="ctr"/>
           <a:lstStyle/>
           <a:p>
-            <a:pPr algn="r" indent="0" marL="0">
+            <a:pPr marL="0" indent="0" algn="r">
               <a:buNone/>
             </a:pPr>
             <a:r>
@@ -10556,6 +10822,13 @@
             <a:prstDash val="solid"/>
           </a:ln>
         </p:spPr>
+        <p:txBody>
+          <a:bodyPr/>
+          <a:lstStyle/>
+          <a:p>
+            <a:endParaRPr lang="zh-TW" altLang="en-US"/>
+          </a:p>
+        </p:txBody>
       </p:sp>
       <p:sp>
         <p:nvSpPr>
@@ -10578,7 +10851,7 @@
           <a:bodyPr wrap="square" lIns="0" tIns="0" rIns="0" bIns="0" rtlCol="0" anchor="ctr"/>
           <a:lstStyle/>
           <a:p>
-            <a:pPr indent="0" marL="0">
+            <a:pPr marL="0" indent="0">
               <a:buNone/>
             </a:pPr>
             <a:r>
@@ -10617,7 +10890,7 @@
           <a:bodyPr wrap="square" lIns="0" tIns="0" rIns="0" bIns="0" rtlCol="0" anchor="ctr"/>
           <a:lstStyle/>
           <a:p>
-            <a:pPr algn="r" indent="0" marL="0">
+            <a:pPr marL="0" indent="0" algn="r">
               <a:buNone/>
             </a:pPr>
             <a:r>
@@ -10659,6 +10932,13 @@
             <a:prstDash val="solid"/>
           </a:ln>
         </p:spPr>
+        <p:txBody>
+          <a:bodyPr/>
+          <a:lstStyle/>
+          <a:p>
+            <a:endParaRPr lang="zh-TW" altLang="en-US"/>
+          </a:p>
+        </p:txBody>
       </p:sp>
       <p:sp>
         <p:nvSpPr>
@@ -10681,7 +10961,7 @@
           <a:bodyPr wrap="square" lIns="0" tIns="0" rIns="0" bIns="0" rtlCol="0" anchor="ctr"/>
           <a:lstStyle/>
           <a:p>
-            <a:pPr indent="0" marL="0">
+            <a:pPr marL="0" indent="0">
               <a:buNone/>
             </a:pPr>
             <a:r>
@@ -10720,7 +11000,7 @@
           <a:bodyPr wrap="square" lIns="0" tIns="0" rIns="0" bIns="0" rtlCol="0" anchor="ctr"/>
           <a:lstStyle/>
           <a:p>
-            <a:pPr algn="r" indent="0" marL="0">
+            <a:pPr marL="0" indent="0" algn="r">
               <a:buNone/>
             </a:pPr>
             <a:r>
@@ -10762,6 +11042,13 @@
             <a:prstDash val="solid"/>
           </a:ln>
         </p:spPr>
+        <p:txBody>
+          <a:bodyPr/>
+          <a:lstStyle/>
+          <a:p>
+            <a:endParaRPr lang="zh-TW" altLang="en-US"/>
+          </a:p>
+        </p:txBody>
       </p:sp>
       <p:sp>
         <p:nvSpPr>
@@ -10784,7 +11071,7 @@
           <a:bodyPr wrap="square" lIns="0" tIns="0" rIns="0" bIns="0" rtlCol="0" anchor="ctr"/>
           <a:lstStyle/>
           <a:p>
-            <a:pPr indent="0" marL="0">
+            <a:pPr marL="0" indent="0">
               <a:buNone/>
             </a:pPr>
             <a:r>
@@ -10823,7 +11110,7 @@
           <a:bodyPr wrap="square" lIns="0" tIns="0" rIns="0" bIns="0" rtlCol="0" anchor="ctr"/>
           <a:lstStyle/>
           <a:p>
-            <a:pPr algn="r" indent="0" marL="0">
+            <a:pPr marL="0" indent="0" algn="r">
               <a:buNone/>
             </a:pPr>
             <a:r>
@@ -10865,6 +11152,13 @@
             <a:prstDash val="solid"/>
           </a:ln>
         </p:spPr>
+        <p:txBody>
+          <a:bodyPr/>
+          <a:lstStyle/>
+          <a:p>
+            <a:endParaRPr lang="zh-TW" altLang="en-US"/>
+          </a:p>
+        </p:txBody>
       </p:sp>
       <p:sp>
         <p:nvSpPr>
@@ -10887,7 +11181,7 @@
           <a:bodyPr wrap="square" lIns="0" tIns="0" rIns="0" bIns="0" rtlCol="0" anchor="ctr"/>
           <a:lstStyle/>
           <a:p>
-            <a:pPr indent="0" marL="0">
+            <a:pPr marL="0" indent="0">
               <a:buNone/>
             </a:pPr>
             <a:r>
@@ -10926,7 +11220,7 @@
           <a:bodyPr wrap="square" lIns="0" tIns="0" rIns="0" bIns="0" rtlCol="0" anchor="ctr"/>
           <a:lstStyle/>
           <a:p>
-            <a:pPr algn="r" indent="0" marL="0">
+            <a:pPr marL="0" indent="0" algn="r">
               <a:buNone/>
             </a:pPr>
             <a:r>
@@ -10968,6 +11262,13 @@
             <a:prstDash val="solid"/>
           </a:ln>
         </p:spPr>
+        <p:txBody>
+          <a:bodyPr/>
+          <a:lstStyle/>
+          <a:p>
+            <a:endParaRPr lang="zh-TW" altLang="en-US"/>
+          </a:p>
+        </p:txBody>
       </p:sp>
       <p:sp>
         <p:nvSpPr>
@@ -10990,7 +11291,7 @@
           <a:bodyPr wrap="square" lIns="0" tIns="0" rIns="0" bIns="0" rtlCol="0" anchor="ctr"/>
           <a:lstStyle/>
           <a:p>
-            <a:pPr indent="0" marL="0">
+            <a:pPr marL="0" indent="0">
               <a:buNone/>
             </a:pPr>
             <a:r>
@@ -11029,7 +11330,7 @@
           <a:bodyPr wrap="square" lIns="0" tIns="0" rIns="0" bIns="0" rtlCol="0" anchor="ctr"/>
           <a:lstStyle/>
           <a:p>
-            <a:pPr algn="r" indent="0" marL="0">
+            <a:pPr marL="0" indent="0" algn="r">
               <a:buNone/>
             </a:pPr>
             <a:r>
@@ -11071,6 +11372,13 @@
             <a:prstDash val="solid"/>
           </a:ln>
         </p:spPr>
+        <p:txBody>
+          <a:bodyPr/>
+          <a:lstStyle/>
+          <a:p>
+            <a:endParaRPr lang="zh-TW" altLang="en-US"/>
+          </a:p>
+        </p:txBody>
       </p:sp>
       <p:sp>
         <p:nvSpPr>
@@ -11093,7 +11401,7 @@
           <a:bodyPr wrap="square" lIns="0" tIns="0" rIns="0" bIns="0" rtlCol="0" anchor="ctr"/>
           <a:lstStyle/>
           <a:p>
-            <a:pPr indent="0" marL="0">
+            <a:pPr marL="0" indent="0">
               <a:buNone/>
             </a:pPr>
             <a:r>
@@ -11132,7 +11440,7 @@
           <a:bodyPr wrap="square" lIns="0" tIns="0" rIns="0" bIns="0" rtlCol="0" anchor="ctr"/>
           <a:lstStyle/>
           <a:p>
-            <a:pPr algn="r" indent="0" marL="0">
+            <a:pPr marL="0" indent="0" algn="r">
               <a:buNone/>
             </a:pPr>
             <a:r>
@@ -11174,6 +11482,13 @@
             <a:prstDash val="solid"/>
           </a:ln>
         </p:spPr>
+        <p:txBody>
+          <a:bodyPr/>
+          <a:lstStyle/>
+          <a:p>
+            <a:endParaRPr lang="zh-TW" altLang="en-US"/>
+          </a:p>
+        </p:txBody>
       </p:sp>
       <p:sp>
         <p:nvSpPr>
@@ -11196,7 +11511,7 @@
           <a:bodyPr wrap="square" lIns="0" tIns="0" rIns="0" bIns="0" rtlCol="0" anchor="ctr"/>
           <a:lstStyle/>
           <a:p>
-            <a:pPr indent="0" marL="0">
+            <a:pPr marL="0" indent="0">
               <a:buNone/>
             </a:pPr>
             <a:r>
@@ -11235,7 +11550,7 @@
           <a:bodyPr wrap="square" lIns="0" tIns="0" rIns="0" bIns="0" rtlCol="0" anchor="ctr"/>
           <a:lstStyle/>
           <a:p>
-            <a:pPr algn="r" indent="0" marL="0">
+            <a:pPr marL="0" indent="0" algn="r">
               <a:buNone/>
             </a:pPr>
             <a:r>
@@ -11277,6 +11592,13 @@
             <a:prstDash val="solid"/>
           </a:ln>
         </p:spPr>
+        <p:txBody>
+          <a:bodyPr/>
+          <a:lstStyle/>
+          <a:p>
+            <a:endParaRPr lang="zh-TW" altLang="en-US"/>
+          </a:p>
+        </p:txBody>
       </p:sp>
       <p:sp>
         <p:nvSpPr>
@@ -11299,7 +11621,7 @@
           <a:bodyPr wrap="square" lIns="0" tIns="0" rIns="0" bIns="0" rtlCol="0" anchor="ctr"/>
           <a:lstStyle/>
           <a:p>
-            <a:pPr indent="0" marL="0">
+            <a:pPr marL="0" indent="0">
               <a:buNone/>
             </a:pPr>
             <a:r>
@@ -11338,7 +11660,7 @@
           <a:bodyPr wrap="square" lIns="0" tIns="0" rIns="0" bIns="0" rtlCol="0" anchor="ctr"/>
           <a:lstStyle/>
           <a:p>
-            <a:pPr algn="r" indent="0" marL="0">
+            <a:pPr marL="0" indent="0" algn="r">
               <a:buNone/>
             </a:pPr>
             <a:r>
@@ -11380,6 +11702,13 @@
             <a:prstDash val="solid"/>
           </a:ln>
         </p:spPr>
+        <p:txBody>
+          <a:bodyPr/>
+          <a:lstStyle/>
+          <a:p>
+            <a:endParaRPr lang="zh-TW" altLang="en-US"/>
+          </a:p>
+        </p:txBody>
       </p:sp>
       <p:sp>
         <p:nvSpPr>
@@ -11402,7 +11731,7 @@
           <a:bodyPr wrap="square" lIns="0" tIns="0" rIns="0" bIns="0" rtlCol="0" anchor="ctr"/>
           <a:lstStyle/>
           <a:p>
-            <a:pPr indent="0" marL="0">
+            <a:pPr marL="0" indent="0">
               <a:buNone/>
             </a:pPr>
             <a:r>
@@ -11441,7 +11770,7 @@
           <a:bodyPr wrap="square" lIns="0" tIns="0" rIns="0" bIns="0" rtlCol="0" anchor="ctr"/>
           <a:lstStyle/>
           <a:p>
-            <a:pPr algn="r" indent="0" marL="0">
+            <a:pPr marL="0" indent="0" algn="r">
               <a:buNone/>
             </a:pPr>
             <a:r>
@@ -11483,6 +11812,13 @@
             <a:prstDash val="solid"/>
           </a:ln>
         </p:spPr>
+        <p:txBody>
+          <a:bodyPr/>
+          <a:lstStyle/>
+          <a:p>
+            <a:endParaRPr lang="zh-TW" altLang="en-US"/>
+          </a:p>
+        </p:txBody>
       </p:sp>
       <p:sp>
         <p:nvSpPr>
@@ -11505,7 +11841,7 @@
           <a:bodyPr wrap="square" lIns="0" tIns="0" rIns="0" bIns="0" rtlCol="0" anchor="ctr"/>
           <a:lstStyle/>
           <a:p>
-            <a:pPr indent="0" marL="0">
+            <a:pPr marL="0" indent="0">
               <a:buNone/>
             </a:pPr>
             <a:r>
@@ -11544,7 +11880,7 @@
           <a:bodyPr wrap="square" lIns="0" tIns="0" rIns="0" bIns="0" rtlCol="0" anchor="ctr"/>
           <a:lstStyle/>
           <a:p>
-            <a:pPr algn="r" indent="0" marL="0">
+            <a:pPr marL="0" indent="0" algn="r">
               <a:buNone/>
             </a:pPr>
             <a:r>
@@ -11586,6 +11922,13 @@
             <a:prstDash val="solid"/>
           </a:ln>
         </p:spPr>
+        <p:txBody>
+          <a:bodyPr/>
+          <a:lstStyle/>
+          <a:p>
+            <a:endParaRPr lang="zh-TW" altLang="en-US"/>
+          </a:p>
+        </p:txBody>
       </p:sp>
       <p:sp>
         <p:nvSpPr>
@@ -11608,7 +11951,7 @@
           <a:bodyPr wrap="square" lIns="0" tIns="0" rIns="0" bIns="0" rtlCol="0" anchor="ctr"/>
           <a:lstStyle/>
           <a:p>
-            <a:pPr indent="0" marL="0">
+            <a:pPr marL="0" indent="0">
               <a:buNone/>
             </a:pPr>
             <a:r>
@@ -11647,7 +11990,7 @@
           <a:bodyPr wrap="square" lIns="0" tIns="0" rIns="0" bIns="0" rtlCol="0" anchor="ctr"/>
           <a:lstStyle/>
           <a:p>
-            <a:pPr algn="r" indent="0" marL="0">
+            <a:pPr marL="0" indent="0" algn="r">
               <a:buNone/>
             </a:pPr>
             <a:r>
@@ -11689,6 +12032,13 @@
             <a:prstDash val="solid"/>
           </a:ln>
         </p:spPr>
+        <p:txBody>
+          <a:bodyPr/>
+          <a:lstStyle/>
+          <a:p>
+            <a:endParaRPr lang="zh-TW" altLang="en-US"/>
+          </a:p>
+        </p:txBody>
       </p:sp>
       <p:sp>
         <p:nvSpPr>
@@ -11714,6 +12064,13 @@
             <a:prstDash val="solid"/>
           </a:ln>
         </p:spPr>
+        <p:txBody>
+          <a:bodyPr/>
+          <a:lstStyle/>
+          <a:p>
+            <a:endParaRPr lang="zh-TW" altLang="en-US"/>
+          </a:p>
+        </p:txBody>
       </p:sp>
       <p:sp>
         <p:nvSpPr>
@@ -11736,7 +12093,7 @@
           <a:bodyPr wrap="square" lIns="0" tIns="0" rIns="0" bIns="0" rtlCol="0" anchor="ctr"/>
           <a:lstStyle/>
           <a:p>
-            <a:pPr indent="0" marL="0">
+            <a:pPr marL="0" indent="0">
               <a:buNone/>
             </a:pPr>
             <a:r>
@@ -11778,6 +12135,13 @@
             <a:prstDash val="solid"/>
           </a:ln>
         </p:spPr>
+        <p:txBody>
+          <a:bodyPr/>
+          <a:lstStyle/>
+          <a:p>
+            <a:endParaRPr lang="zh-TW" altLang="en-US"/>
+          </a:p>
+        </p:txBody>
       </p:sp>
       <p:sp>
         <p:nvSpPr>
@@ -11800,7 +12164,7 @@
           <a:bodyPr wrap="square" lIns="0" tIns="0" rIns="0" bIns="0" rtlCol="0" anchor="ctr"/>
           <a:lstStyle/>
           <a:p>
-            <a:pPr indent="0" marL="0">
+            <a:pPr marL="0" indent="0">
               <a:buNone/>
             </a:pPr>
             <a:r>
@@ -11842,6 +12206,13 @@
             <a:prstDash val="solid"/>
           </a:ln>
         </p:spPr>
+        <p:txBody>
+          <a:bodyPr/>
+          <a:lstStyle/>
+          <a:p>
+            <a:endParaRPr lang="zh-TW" altLang="en-US"/>
+          </a:p>
+        </p:txBody>
       </p:sp>
       <p:sp>
         <p:nvSpPr>
@@ -11864,7 +12235,7 @@
           <a:bodyPr wrap="square" lIns="0" tIns="0" rIns="0" bIns="0" rtlCol="0" anchor="ctr"/>
           <a:lstStyle/>
           <a:p>
-            <a:pPr indent="0" marL="0">
+            <a:pPr marL="0" indent="0">
               <a:buNone/>
             </a:pPr>
             <a:r>
@@ -11903,7 +12274,7 @@
           <a:bodyPr wrap="square" lIns="0" tIns="0" rIns="0" bIns="0" rtlCol="0" anchor="ctr"/>
           <a:lstStyle/>
           <a:p>
-            <a:pPr indent="0" marL="0">
+            <a:pPr marL="0" indent="0">
               <a:buNone/>
             </a:pPr>
             <a:r>
@@ -11942,7 +12313,7 @@
           <a:bodyPr wrap="square" lIns="0" tIns="0" rIns="0" bIns="0" rtlCol="0" anchor="ctr"/>
           <a:lstStyle/>
           <a:p>
-            <a:pPr indent="0" marL="0">
+            <a:pPr marL="0" indent="0">
               <a:buNone/>
             </a:pPr>
             <a:r>
@@ -11976,6 +12347,7 @@
         <a:solidFill>
           <a:srgbClr val="FFFFFF"/>
         </a:solidFill>
+        <a:effectLst/>
       </p:bgPr>
     </p:bg>
     <p:spTree>
@@ -12016,6 +12388,13 @@
             <a:prstDash val="solid"/>
           </a:ln>
         </p:spPr>
+        <p:txBody>
+          <a:bodyPr/>
+          <a:lstStyle/>
+          <a:p>
+            <a:endParaRPr lang="zh-TW" altLang="en-US"/>
+          </a:p>
+        </p:txBody>
       </p:sp>
       <p:sp>
         <p:nvSpPr>
@@ -12038,7 +12417,7 @@
           <a:bodyPr wrap="square" lIns="0" tIns="0" rIns="0" bIns="0" rtlCol="0" anchor="t"/>
           <a:lstStyle/>
           <a:p>
-            <a:pPr indent="0" marL="0">
+            <a:pPr marL="0" indent="0">
               <a:buNone/>
             </a:pPr>
             <a:r>
@@ -12077,7 +12456,7 @@
           <a:bodyPr wrap="square" lIns="0" tIns="0" rIns="0" bIns="0" rtlCol="0" anchor="t"/>
           <a:lstStyle/>
           <a:p>
-            <a:pPr indent="0" marL="0">
+            <a:pPr marL="0" indent="0">
               <a:buNone/>
             </a:pPr>
             <a:r>
@@ -12116,7 +12495,7 @@
           <a:bodyPr wrap="square" lIns="0" tIns="0" rIns="0" bIns="0" rtlCol="0" anchor="ctr"/>
           <a:lstStyle/>
           <a:p>
-            <a:pPr indent="0" marL="0">
+            <a:pPr marL="0" indent="0">
               <a:buNone/>
             </a:pPr>
             <a:r>
@@ -12155,7 +12534,7 @@
           <a:bodyPr wrap="square" lIns="0" tIns="0" rIns="0" bIns="0" rtlCol="0" anchor="ctr"/>
           <a:lstStyle/>
           <a:p>
-            <a:pPr algn="r" indent="0" marL="0">
+            <a:pPr marL="0" indent="0" algn="r">
               <a:buNone/>
             </a:pPr>
             <a:r>
@@ -12194,7 +12573,7 @@
           <a:bodyPr wrap="square" lIns="0" tIns="0" rIns="0" bIns="0" rtlCol="0" anchor="ctr"/>
           <a:lstStyle/>
           <a:p>
-            <a:pPr algn="r" indent="0" marL="0">
+            <a:pPr marL="0" indent="0" algn="r">
               <a:buNone/>
             </a:pPr>
             <a:r>
@@ -12233,7 +12612,7 @@
           <a:bodyPr wrap="square" lIns="0" tIns="0" rIns="0" bIns="0" rtlCol="0" anchor="ctr"/>
           <a:lstStyle/>
           <a:p>
-            <a:pPr indent="0" marL="0">
+            <a:pPr marL="0" indent="0">
               <a:buNone/>
             </a:pPr>
             <a:r>
@@ -12260,32 +12639,56 @@
           <p:nvPr>
             <p:extLst>
               <p:ext uri="{D42A27DB-BD31-4B8C-83A1-F6EECF244321}">
-                <p14:modId xmlns:p14="http://schemas.microsoft.com/office/powerpoint/2010/main" val="1579011935"/>
+                <p14:modId xmlns:p14="http://schemas.microsoft.com/office/powerpoint/2010/main" val="2248575247"/>
               </p:ext>
             </p:extLst>
           </p:nvPr>
         </p:nvGraphicFramePr>
         <p:xfrm>
           <a:off x="457200" y="1828800"/>
-          <a:ext cx="6858000" cy="914400"/>
+          <a:ext cx="6858000" cy="3155181"/>
         </p:xfrm>
         <a:graphic>
           <a:graphicData uri="http://schemas.openxmlformats.org/drawingml/2006/table">
             <a:tbl>
               <a:tblPr/>
               <a:tblGrid>
-                <a:gridCol w="1280160"/>
-                <a:gridCol w="914400"/>
-                <a:gridCol w="3383280"/>
-                <a:gridCol w="1280160"/>
+                <a:gridCol w="1351503">
+                  <a:extLst>
+                    <a:ext uri="{9D8B030D-6E8A-4147-A177-3AD203B41FA5}">
+                      <a16:colId xmlns:a16="http://schemas.microsoft.com/office/drawing/2014/main" val="20000"/>
+                    </a:ext>
+                  </a:extLst>
+                </a:gridCol>
+                <a:gridCol w="1024932">
+                  <a:extLst>
+                    <a:ext uri="{9D8B030D-6E8A-4147-A177-3AD203B41FA5}">
+                      <a16:colId xmlns:a16="http://schemas.microsoft.com/office/drawing/2014/main" val="20001"/>
+                    </a:ext>
+                  </a:extLst>
+                </a:gridCol>
+                <a:gridCol w="3201405">
+                  <a:extLst>
+                    <a:ext uri="{9D8B030D-6E8A-4147-A177-3AD203B41FA5}">
+                      <a16:colId xmlns:a16="http://schemas.microsoft.com/office/drawing/2014/main" val="20002"/>
+                    </a:ext>
+                  </a:extLst>
+                </a:gridCol>
+                <a:gridCol w="1280160">
+                  <a:extLst>
+                    <a:ext uri="{9D8B030D-6E8A-4147-A177-3AD203B41FA5}">
+                      <a16:colId xmlns:a16="http://schemas.microsoft.com/office/drawing/2014/main" val="20003"/>
+                    </a:ext>
+                  </a:extLst>
+                </a:gridCol>
               </a:tblGrid>
-              <a:tr h="0">
+              <a:tr h="325079">
                 <a:tc>
                   <a:txBody>
                     <a:bodyPr/>
                     <a:lstStyle/>
                     <a:p>
-                      <a:pPr indent="0" marL="0">
+                      <a:pPr marL="0" indent="0">
                         <a:buNone/>
                       </a:pPr>
                       <a:r>
@@ -12306,7 +12709,7 @@
                       </a:endParaRPr>
                     </a:p>
                   </a:txBody>
-                  <a:tcPr marL="91440" marR="91440" marT="45720" marB="45720">
+                  <a:tcPr>
                     <a:lnL w="6350" cap="flat" cmpd="sng" algn="ctr">
                       <a:solidFill>
                         <a:srgbClr val="D5C8EE"/>
@@ -12353,7 +12756,7 @@
                     <a:bodyPr/>
                     <a:lstStyle/>
                     <a:p>
-                      <a:pPr algn="ctr" indent="0" marL="0">
+                      <a:pPr marL="0" indent="0" algn="ctr">
                         <a:buNone/>
                       </a:pPr>
                       <a:r>
@@ -12374,7 +12777,7 @@
                       </a:endParaRPr>
                     </a:p>
                   </a:txBody>
-                  <a:tcPr marL="91440" marR="91440" marT="45720" marB="45720">
+                  <a:tcPr>
                     <a:lnL w="6350" cap="flat" cmpd="sng" algn="ctr">
                       <a:solidFill>
                         <a:srgbClr val="D5C8EE"/>
@@ -12421,7 +12824,7 @@
                     <a:bodyPr/>
                     <a:lstStyle/>
                     <a:p>
-                      <a:pPr indent="0" marL="0">
+                      <a:pPr marL="0" indent="0">
                         <a:buNone/>
                       </a:pPr>
                       <a:r>
@@ -12442,7 +12845,7 @@
                       </a:endParaRPr>
                     </a:p>
                   </a:txBody>
-                  <a:tcPr marL="91440" marR="91440" marT="45720" marB="45720">
+                  <a:tcPr>
                     <a:lnL w="6350" cap="flat" cmpd="sng" algn="ctr">
                       <a:solidFill>
                         <a:srgbClr val="D5C8EE"/>
@@ -12489,7 +12892,7 @@
                     <a:bodyPr/>
                     <a:lstStyle/>
                     <a:p>
-                      <a:pPr algn="ctr" indent="0" marL="0">
+                      <a:pPr marL="0" indent="0" algn="ctr">
                         <a:buNone/>
                       </a:pPr>
                       <a:r>
@@ -12510,7 +12913,7 @@
                       </a:endParaRPr>
                     </a:p>
                   </a:txBody>
-                  <a:tcPr marL="91440" marR="91440" marT="45720" marB="45720">
+                  <a:tcPr>
                     <a:lnL w="6350" cap="flat" cmpd="sng" algn="ctr">
                       <a:solidFill>
                         <a:srgbClr val="D5C8EE"/>
@@ -12552,14 +12955,19 @@
                     </a:solidFill>
                   </a:tcPr>
                 </a:tc>
+                <a:extLst>
+                  <a:ext uri="{0D108BD9-81ED-4DB2-BD59-A6C34878D82A}">
+                    <a16:rowId xmlns:a16="http://schemas.microsoft.com/office/drawing/2014/main" val="10000"/>
+                  </a:ext>
+                </a:extLst>
               </a:tr>
-              <a:tr h="0">
+              <a:tr h="497180">
                 <a:tc>
                   <a:txBody>
                     <a:bodyPr/>
                     <a:lstStyle/>
                     <a:p>
-                      <a:pPr indent="0" marL="0">
+                      <a:pPr marL="0" indent="0">
                         <a:buNone/>
                       </a:pPr>
                       <a:r>
@@ -12580,7 +12988,7 @@
                       </a:endParaRPr>
                     </a:p>
                   </a:txBody>
-                  <a:tcPr marL="91440" marR="91440" marT="45720" marB="45720">
+                  <a:tcPr>
                     <a:lnL w="6350" cap="flat" cmpd="sng" algn="ctr">
                       <a:solidFill>
                         <a:srgbClr val="D5C8EE"/>
@@ -12627,7 +13035,7 @@
                     <a:bodyPr/>
                     <a:lstStyle/>
                     <a:p>
-                      <a:pPr algn="ctr" indent="0" marL="0">
+                      <a:pPr marL="0" indent="0" algn="ctr">
                         <a:buNone/>
                       </a:pPr>
                       <a:r>
@@ -12648,7 +13056,7 @@
                       </a:endParaRPr>
                     </a:p>
                   </a:txBody>
-                  <a:tcPr marL="91440" marR="91440" marT="45720" marB="45720">
+                  <a:tcPr>
                     <a:lnL w="6350" cap="flat" cmpd="sng" algn="ctr">
                       <a:solidFill>
                         <a:srgbClr val="D5C8EE"/>
@@ -12695,7 +13103,7 @@
                     <a:bodyPr/>
                     <a:lstStyle/>
                     <a:p>
-                      <a:pPr indent="0" marL="0">
+                      <a:pPr marL="0" indent="0">
                         <a:buNone/>
                       </a:pPr>
                       <a:r>
@@ -12716,7 +13124,7 @@
                       </a:endParaRPr>
                     </a:p>
                   </a:txBody>
-                  <a:tcPr marL="91440" marR="91440" marT="45720" marB="45720">
+                  <a:tcPr>
                     <a:lnL w="6350" cap="flat" cmpd="sng" algn="ctr">
                       <a:solidFill>
                         <a:srgbClr val="D5C8EE"/>
@@ -12763,7 +13171,7 @@
                     <a:bodyPr/>
                     <a:lstStyle/>
                     <a:p>
-                      <a:pPr algn="ctr" indent="0" marL="0">
+                      <a:pPr marL="0" indent="0" algn="ctr">
                         <a:buNone/>
                       </a:pPr>
                       <a:r>
@@ -12784,7 +13192,7 @@
                       </a:endParaRPr>
                     </a:p>
                   </a:txBody>
-                  <a:tcPr marL="91440" marR="91440" marT="45720" marB="45720">
+                  <a:tcPr>
                     <a:lnL w="6350" cap="flat" cmpd="sng" algn="ctr">
                       <a:solidFill>
                         <a:srgbClr val="D5C8EE"/>
@@ -12826,14 +13234,19 @@
                     </a:solidFill>
                   </a:tcPr>
                 </a:tc>
+                <a:extLst>
+                  <a:ext uri="{0D108BD9-81ED-4DB2-BD59-A6C34878D82A}">
+                    <a16:rowId xmlns:a16="http://schemas.microsoft.com/office/drawing/2014/main" val="10001"/>
+                  </a:ext>
+                </a:extLst>
               </a:tr>
-              <a:tr h="0">
+              <a:tr h="497180">
                 <a:tc>
                   <a:txBody>
                     <a:bodyPr/>
                     <a:lstStyle/>
                     <a:p>
-                      <a:pPr indent="0" marL="0">
+                      <a:pPr marL="0" indent="0">
                         <a:buNone/>
                       </a:pPr>
                       <a:r>
@@ -12854,7 +13267,7 @@
                       </a:endParaRPr>
                     </a:p>
                   </a:txBody>
-                  <a:tcPr marL="91440" marR="91440" marT="45720" marB="45720">
+                  <a:tcPr>
                     <a:lnL w="6350" cap="flat" cmpd="sng" algn="ctr">
                       <a:solidFill>
                         <a:srgbClr val="D5C8EE"/>
@@ -12901,7 +13314,7 @@
                     <a:bodyPr/>
                     <a:lstStyle/>
                     <a:p>
-                      <a:pPr algn="ctr" indent="0" marL="0">
+                      <a:pPr marL="0" indent="0" algn="ctr">
                         <a:buNone/>
                       </a:pPr>
                       <a:r>
@@ -12922,7 +13335,7 @@
                       </a:endParaRPr>
                     </a:p>
                   </a:txBody>
-                  <a:tcPr marL="91440" marR="91440" marT="45720" marB="45720">
+                  <a:tcPr>
                     <a:lnL w="6350" cap="flat" cmpd="sng" algn="ctr">
                       <a:solidFill>
                         <a:srgbClr val="D5C8EE"/>
@@ -12969,7 +13382,7 @@
                     <a:bodyPr/>
                     <a:lstStyle/>
                     <a:p>
-                      <a:pPr indent="0" marL="0">
+                      <a:pPr marL="0" indent="0">
                         <a:buNone/>
                       </a:pPr>
                       <a:r>
@@ -12990,7 +13403,7 @@
                       </a:endParaRPr>
                     </a:p>
                   </a:txBody>
-                  <a:tcPr marL="91440" marR="91440" marT="45720" marB="45720">
+                  <a:tcPr>
                     <a:lnL w="6350" cap="flat" cmpd="sng" algn="ctr">
                       <a:solidFill>
                         <a:srgbClr val="D5C8EE"/>
@@ -13037,7 +13450,7 @@
                     <a:bodyPr/>
                     <a:lstStyle/>
                     <a:p>
-                      <a:pPr algn="ctr" indent="0" marL="0">
+                      <a:pPr marL="0" indent="0" algn="ctr">
                         <a:buNone/>
                       </a:pPr>
                       <a:r>
@@ -13058,7 +13471,7 @@
                       </a:endParaRPr>
                     </a:p>
                   </a:txBody>
-                  <a:tcPr marL="91440" marR="91440" marT="45720" marB="45720">
+                  <a:tcPr>
                     <a:lnL w="6350" cap="flat" cmpd="sng" algn="ctr">
                       <a:solidFill>
                         <a:srgbClr val="D5C8EE"/>
@@ -13100,14 +13513,19 @@
                     </a:solidFill>
                   </a:tcPr>
                 </a:tc>
+                <a:extLst>
+                  <a:ext uri="{0D108BD9-81ED-4DB2-BD59-A6C34878D82A}">
+                    <a16:rowId xmlns:a16="http://schemas.microsoft.com/office/drawing/2014/main" val="10002"/>
+                  </a:ext>
+                </a:extLst>
               </a:tr>
-              <a:tr h="0">
+              <a:tr h="497180">
                 <a:tc>
                   <a:txBody>
                     <a:bodyPr/>
                     <a:lstStyle/>
                     <a:p>
-                      <a:pPr indent="0" marL="0">
+                      <a:pPr marL="0" indent="0">
                         <a:buNone/>
                       </a:pPr>
                       <a:r>
@@ -13128,7 +13546,7 @@
                       </a:endParaRPr>
                     </a:p>
                   </a:txBody>
-                  <a:tcPr marL="91440" marR="91440" marT="45720" marB="45720">
+                  <a:tcPr>
                     <a:lnL w="6350" cap="flat" cmpd="sng" algn="ctr">
                       <a:solidFill>
                         <a:srgbClr val="D5C8EE"/>
@@ -13175,7 +13593,7 @@
                     <a:bodyPr/>
                     <a:lstStyle/>
                     <a:p>
-                      <a:pPr algn="ctr" indent="0" marL="0">
+                      <a:pPr marL="0" indent="0" algn="ctr">
                         <a:buNone/>
                       </a:pPr>
                       <a:r>
@@ -13196,7 +13614,7 @@
                       </a:endParaRPr>
                     </a:p>
                   </a:txBody>
-                  <a:tcPr marL="91440" marR="91440" marT="45720" marB="45720">
+                  <a:tcPr>
                     <a:lnL w="6350" cap="flat" cmpd="sng" algn="ctr">
                       <a:solidFill>
                         <a:srgbClr val="D5C8EE"/>
@@ -13243,7 +13661,7 @@
                     <a:bodyPr/>
                     <a:lstStyle/>
                     <a:p>
-                      <a:pPr indent="0" marL="0">
+                      <a:pPr marL="0" indent="0">
                         <a:buNone/>
                       </a:pPr>
                       <a:r>
@@ -13264,7 +13682,7 @@
                       </a:endParaRPr>
                     </a:p>
                   </a:txBody>
-                  <a:tcPr marL="91440" marR="91440" marT="45720" marB="45720">
+                  <a:tcPr>
                     <a:lnL w="6350" cap="flat" cmpd="sng" algn="ctr">
                       <a:solidFill>
                         <a:srgbClr val="D5C8EE"/>
@@ -13311,7 +13729,7 @@
                     <a:bodyPr/>
                     <a:lstStyle/>
                     <a:p>
-                      <a:pPr algn="ctr" indent="0" marL="0">
+                      <a:pPr marL="0" indent="0" algn="ctr">
                         <a:buNone/>
                       </a:pPr>
                       <a:r>
@@ -13332,7 +13750,7 @@
                       </a:endParaRPr>
                     </a:p>
                   </a:txBody>
-                  <a:tcPr marL="91440" marR="91440" marT="45720" marB="45720">
+                  <a:tcPr>
                     <a:lnL w="6350" cap="flat" cmpd="sng" algn="ctr">
                       <a:solidFill>
                         <a:srgbClr val="D5C8EE"/>
@@ -13374,14 +13792,19 @@
                     </a:solidFill>
                   </a:tcPr>
                 </a:tc>
+                <a:extLst>
+                  <a:ext uri="{0D108BD9-81ED-4DB2-BD59-A6C34878D82A}">
+                    <a16:rowId xmlns:a16="http://schemas.microsoft.com/office/drawing/2014/main" val="10003"/>
+                  </a:ext>
+                </a:extLst>
               </a:tr>
-              <a:tr h="0">
+              <a:tr h="497180">
                 <a:tc>
                   <a:txBody>
                     <a:bodyPr/>
                     <a:lstStyle/>
                     <a:p>
-                      <a:pPr indent="0" marL="0">
+                      <a:pPr marL="0" indent="0">
                         <a:buNone/>
                       </a:pPr>
                       <a:r>
@@ -13402,7 +13825,7 @@
                       </a:endParaRPr>
                     </a:p>
                   </a:txBody>
-                  <a:tcPr marL="91440" marR="91440" marT="45720" marB="45720">
+                  <a:tcPr>
                     <a:lnL w="6350" cap="flat" cmpd="sng" algn="ctr">
                       <a:solidFill>
                         <a:srgbClr val="D5C8EE"/>
@@ -13449,7 +13872,7 @@
                     <a:bodyPr/>
                     <a:lstStyle/>
                     <a:p>
-                      <a:pPr algn="ctr" indent="0" marL="0">
+                      <a:pPr marL="0" indent="0" algn="ctr">
                         <a:buNone/>
                       </a:pPr>
                       <a:r>
@@ -13470,7 +13893,7 @@
                       </a:endParaRPr>
                     </a:p>
                   </a:txBody>
-                  <a:tcPr marL="91440" marR="91440" marT="45720" marB="45720">
+                  <a:tcPr>
                     <a:lnL w="6350" cap="flat" cmpd="sng" algn="ctr">
                       <a:solidFill>
                         <a:srgbClr val="D5C8EE"/>
@@ -13517,7 +13940,7 @@
                     <a:bodyPr/>
                     <a:lstStyle/>
                     <a:p>
-                      <a:pPr indent="0" marL="0">
+                      <a:pPr marL="0" indent="0">
                         <a:buNone/>
                       </a:pPr>
                       <a:r>
@@ -13538,7 +13961,7 @@
                       </a:endParaRPr>
                     </a:p>
                   </a:txBody>
-                  <a:tcPr marL="91440" marR="91440" marT="45720" marB="45720">
+                  <a:tcPr>
                     <a:lnL w="6350" cap="flat" cmpd="sng" algn="ctr">
                       <a:solidFill>
                         <a:srgbClr val="D5C8EE"/>
@@ -13585,7 +14008,7 @@
                     <a:bodyPr/>
                     <a:lstStyle/>
                     <a:p>
-                      <a:pPr algn="ctr" indent="0" marL="0">
+                      <a:pPr marL="0" indent="0" algn="ctr">
                         <a:buNone/>
                       </a:pPr>
                       <a:r>
@@ -13606,7 +14029,7 @@
                       </a:endParaRPr>
                     </a:p>
                   </a:txBody>
-                  <a:tcPr marL="91440" marR="91440" marT="45720" marB="45720">
+                  <a:tcPr>
                     <a:lnL w="6350" cap="flat" cmpd="sng" algn="ctr">
                       <a:solidFill>
                         <a:srgbClr val="D5C8EE"/>
@@ -13648,14 +14071,19 @@
                     </a:solidFill>
                   </a:tcPr>
                 </a:tc>
+                <a:extLst>
+                  <a:ext uri="{0D108BD9-81ED-4DB2-BD59-A6C34878D82A}">
+                    <a16:rowId xmlns:a16="http://schemas.microsoft.com/office/drawing/2014/main" val="10004"/>
+                  </a:ext>
+                </a:extLst>
               </a:tr>
-              <a:tr h="0">
+              <a:tr h="497180">
                 <a:tc>
                   <a:txBody>
                     <a:bodyPr/>
                     <a:lstStyle/>
                     <a:p>
-                      <a:pPr indent="0" marL="0">
+                      <a:pPr marL="0" indent="0">
                         <a:buNone/>
                       </a:pPr>
                       <a:r>
@@ -13676,7 +14104,7 @@
                       </a:endParaRPr>
                     </a:p>
                   </a:txBody>
-                  <a:tcPr marL="91440" marR="91440" marT="45720" marB="45720">
+                  <a:tcPr>
                     <a:lnL w="6350" cap="flat" cmpd="sng" algn="ctr">
                       <a:solidFill>
                         <a:srgbClr val="D5C8EE"/>
@@ -13723,7 +14151,7 @@
                     <a:bodyPr/>
                     <a:lstStyle/>
                     <a:p>
-                      <a:pPr algn="ctr" indent="0" marL="0">
+                      <a:pPr marL="0" indent="0" algn="ctr">
                         <a:buNone/>
                       </a:pPr>
                       <a:r>
@@ -13744,7 +14172,7 @@
                       </a:endParaRPr>
                     </a:p>
                   </a:txBody>
-                  <a:tcPr marL="91440" marR="91440" marT="45720" marB="45720">
+                  <a:tcPr>
                     <a:lnL w="6350" cap="flat" cmpd="sng" algn="ctr">
                       <a:solidFill>
                         <a:srgbClr val="D5C8EE"/>
@@ -13791,7 +14219,7 @@
                     <a:bodyPr/>
                     <a:lstStyle/>
                     <a:p>
-                      <a:pPr indent="0" marL="0">
+                      <a:pPr marL="0" indent="0">
                         <a:buNone/>
                       </a:pPr>
                       <a:r>
@@ -13812,7 +14240,7 @@
                       </a:endParaRPr>
                     </a:p>
                   </a:txBody>
-                  <a:tcPr marL="91440" marR="91440" marT="45720" marB="45720">
+                  <a:tcPr>
                     <a:lnL w="6350" cap="flat" cmpd="sng" algn="ctr">
                       <a:solidFill>
                         <a:srgbClr val="D5C8EE"/>
@@ -13859,7 +14287,7 @@
                     <a:bodyPr/>
                     <a:lstStyle/>
                     <a:p>
-                      <a:pPr algn="ctr" indent="0" marL="0">
+                      <a:pPr marL="0" indent="0" algn="ctr">
                         <a:buNone/>
                       </a:pPr>
                       <a:r>
@@ -13880,7 +14308,7 @@
                       </a:endParaRPr>
                     </a:p>
                   </a:txBody>
-                  <a:tcPr marL="91440" marR="91440" marT="45720" marB="45720">
+                  <a:tcPr>
                     <a:lnL w="6350" cap="flat" cmpd="sng" algn="ctr">
                       <a:solidFill>
                         <a:srgbClr val="D5C8EE"/>
@@ -13922,14 +14350,19 @@
                     </a:solidFill>
                   </a:tcPr>
                 </a:tc>
+                <a:extLst>
+                  <a:ext uri="{0D108BD9-81ED-4DB2-BD59-A6C34878D82A}">
+                    <a16:rowId xmlns:a16="http://schemas.microsoft.com/office/drawing/2014/main" val="10005"/>
+                  </a:ext>
+                </a:extLst>
               </a:tr>
-              <a:tr h="0">
+              <a:tr h="344202">
                 <a:tc>
                   <a:txBody>
                     <a:bodyPr/>
                     <a:lstStyle/>
                     <a:p>
-                      <a:pPr indent="0" marL="0">
+                      <a:pPr marL="0" indent="0">
                         <a:buNone/>
                       </a:pPr>
                       <a:r>
@@ -13950,7 +14383,7 @@
                       </a:endParaRPr>
                     </a:p>
                   </a:txBody>
-                  <a:tcPr marL="91440" marR="91440" marT="45720" marB="45720">
+                  <a:tcPr>
                     <a:lnL w="6350" cap="flat" cmpd="sng" algn="ctr">
                       <a:solidFill>
                         <a:srgbClr val="D5C8EE"/>
@@ -13997,7 +14430,7 @@
                     <a:bodyPr/>
                     <a:lstStyle/>
                     <a:p>
-                      <a:pPr algn="ctr" indent="0" marL="0">
+                      <a:pPr marL="0" indent="0" algn="ctr">
                         <a:buNone/>
                       </a:pPr>
                       <a:r>
@@ -14018,7 +14451,7 @@
                       </a:endParaRPr>
                     </a:p>
                   </a:txBody>
-                  <a:tcPr marL="91440" marR="91440" marT="45720" marB="45720">
+                  <a:tcPr>
                     <a:lnL w="6350" cap="flat" cmpd="sng" algn="ctr">
                       <a:solidFill>
                         <a:srgbClr val="D5C8EE"/>
@@ -14065,7 +14498,7 @@
                     <a:bodyPr/>
                     <a:lstStyle/>
                     <a:p>
-                      <a:pPr indent="0" marL="0">
+                      <a:pPr marL="0" indent="0">
                         <a:buNone/>
                       </a:pPr>
                       <a:r>
@@ -14086,7 +14519,7 @@
                       </a:endParaRPr>
                     </a:p>
                   </a:txBody>
-                  <a:tcPr marL="91440" marR="91440" marT="45720" marB="45720">
+                  <a:tcPr>
                     <a:lnL w="6350" cap="flat" cmpd="sng" algn="ctr">
                       <a:solidFill>
                         <a:srgbClr val="D5C8EE"/>
@@ -14133,7 +14566,7 @@
                     <a:bodyPr/>
                     <a:lstStyle/>
                     <a:p>
-                      <a:pPr algn="ctr" indent="0" marL="0">
+                      <a:pPr marL="0" indent="0" algn="ctr">
                         <a:buNone/>
                       </a:pPr>
                       <a:r>
@@ -14154,7 +14587,7 @@
                       </a:endParaRPr>
                     </a:p>
                   </a:txBody>
-                  <a:tcPr marL="91440" marR="91440" marT="45720" marB="45720">
+                  <a:tcPr>
                     <a:lnL w="6350" cap="flat" cmpd="sng" algn="ctr">
                       <a:solidFill>
                         <a:srgbClr val="D5C8EE"/>
@@ -14196,6 +14629,11 @@
                     </a:solidFill>
                   </a:tcPr>
                 </a:tc>
+                <a:extLst>
+                  <a:ext uri="{0D108BD9-81ED-4DB2-BD59-A6C34878D82A}">
+                    <a16:rowId xmlns:a16="http://schemas.microsoft.com/office/drawing/2014/main" val="10006"/>
+                  </a:ext>
+                </a:extLst>
               </a:tr>
             </a:tbl>
           </a:graphicData>
@@ -14225,6 +14663,13 @@
             <a:prstDash val="solid"/>
           </a:ln>
         </p:spPr>
+        <p:txBody>
+          <a:bodyPr/>
+          <a:lstStyle/>
+          <a:p>
+            <a:endParaRPr lang="zh-TW" altLang="en-US"/>
+          </a:p>
+        </p:txBody>
       </p:sp>
       <p:sp>
         <p:nvSpPr>
@@ -14247,7 +14692,7 @@
           <a:bodyPr wrap="square" lIns="0" tIns="0" rIns="0" bIns="0" rtlCol="0" anchor="ctr"/>
           <a:lstStyle/>
           <a:p>
-            <a:pPr indent="0" marL="0">
+            <a:pPr marL="0" indent="0">
               <a:buNone/>
             </a:pPr>
             <a:r>
@@ -14286,7 +14731,7 @@
           <a:bodyPr wrap="square" lIns="0" tIns="0" rIns="0" bIns="0" rtlCol="0" anchor="ctr"/>
           <a:lstStyle/>
           <a:p>
-            <a:pPr indent="0" marL="0">
+            <a:pPr marL="0" indent="0">
               <a:buNone/>
             </a:pPr>
             <a:r>
@@ -14326,6 +14771,13 @@
             <a:prstDash val="solid"/>
           </a:ln>
         </p:spPr>
+        <p:txBody>
+          <a:bodyPr/>
+          <a:lstStyle/>
+          <a:p>
+            <a:endParaRPr lang="zh-TW" altLang="en-US"/>
+          </a:p>
+        </p:txBody>
       </p:sp>
       <p:sp>
         <p:nvSpPr>
@@ -14348,7 +14800,7 @@
           <a:bodyPr wrap="square" lIns="0" tIns="0" rIns="0" bIns="0" rtlCol="0" anchor="ctr"/>
           <a:lstStyle/>
           <a:p>
-            <a:pPr indent="0" marL="0">
+            <a:pPr marL="0" indent="0">
               <a:buNone/>
             </a:pPr>
             <a:r>
@@ -14387,7 +14839,7 @@
           <a:bodyPr wrap="square" lIns="0" tIns="0" rIns="0" bIns="0" rtlCol="0" anchor="ctr"/>
           <a:lstStyle/>
           <a:p>
-            <a:pPr indent="0" marL="0">
+            <a:pPr marL="0" indent="0">
               <a:buNone/>
             </a:pPr>
             <a:r>
@@ -14407,7 +14859,7 @@
       </p:sp>
       <p:sp>
         <p:nvSpPr>
-          <p:cNvPr id="16" name="Shape 13"/>
+          <p:cNvPr id="9" name="Shape 13"/>
           <p:cNvSpPr/>
           <p:nvPr/>
         </p:nvSpPr>
@@ -14429,6 +14881,13 @@
             <a:prstDash val="solid"/>
           </a:ln>
         </p:spPr>
+        <p:txBody>
+          <a:bodyPr/>
+          <a:lstStyle/>
+          <a:p>
+            <a:endParaRPr lang="zh-TW" altLang="en-US"/>
+          </a:p>
+        </p:txBody>
       </p:sp>
       <p:sp>
         <p:nvSpPr>
@@ -14451,7 +14910,7 @@
           <a:bodyPr wrap="square" lIns="0" tIns="0" rIns="0" bIns="0" rtlCol="0" anchor="ctr"/>
           <a:lstStyle/>
           <a:p>
-            <a:pPr indent="0" marL="0">
+            <a:pPr marL="0" indent="0">
               <a:buNone/>
             </a:pPr>
             <a:r>
@@ -14490,7 +14949,7 @@
           <a:bodyPr wrap="square" lIns="0" tIns="0" rIns="0" bIns="0" rtlCol="0" anchor="ctr"/>
           <a:lstStyle/>
           <a:p>
-            <a:pPr indent="0" marL="0">
+            <a:pPr marL="0" indent="0">
               <a:buNone/>
             </a:pPr>
             <a:r>
@@ -14624,6 +15083,13 @@
             <a:prstDash val="solid"/>
           </a:ln>
         </p:spPr>
+        <p:txBody>
+          <a:bodyPr/>
+          <a:lstStyle/>
+          <a:p>
+            <a:endParaRPr lang="zh-TW" altLang="en-US"/>
+          </a:p>
+        </p:txBody>
       </p:sp>
       <p:sp>
         <p:nvSpPr>
@@ -14646,7 +15112,7 @@
           <a:bodyPr wrap="square" lIns="0" tIns="0" rIns="0" bIns="0" rtlCol="0" anchor="ctr"/>
           <a:lstStyle/>
           <a:p>
-            <a:pPr indent="0" marL="0">
+            <a:pPr marL="0" indent="0">
               <a:buNone/>
             </a:pPr>
             <a:r>
@@ -14685,7 +15151,7 @@
           <a:bodyPr wrap="square" lIns="0" tIns="0" rIns="0" bIns="0" rtlCol="0" anchor="ctr"/>
           <a:lstStyle/>
           <a:p>
-            <a:pPr indent="0" marL="0">
+            <a:pPr marL="0" indent="0">
               <a:buNone/>
             </a:pPr>
             <a:r>
@@ -14719,6 +15185,7 @@
         <a:solidFill>
           <a:srgbClr val="FFFFFF"/>
         </a:solidFill>
+        <a:effectLst/>
       </p:bgPr>
     </p:bg>
     <p:spTree>
@@ -14759,6 +15226,13 @@
             <a:prstDash val="solid"/>
           </a:ln>
         </p:spPr>
+        <p:txBody>
+          <a:bodyPr/>
+          <a:lstStyle/>
+          <a:p>
+            <a:endParaRPr lang="zh-TW" altLang="en-US"/>
+          </a:p>
+        </p:txBody>
       </p:sp>
       <p:sp>
         <p:nvSpPr>
@@ -14781,7 +15255,7 @@
           <a:bodyPr wrap="square" lIns="0" tIns="0" rIns="0" bIns="0" rtlCol="0" anchor="t"/>
           <a:lstStyle/>
           <a:p>
-            <a:pPr indent="0" marL="0">
+            <a:pPr marL="0" indent="0">
               <a:buNone/>
             </a:pPr>
             <a:r>
@@ -14820,7 +15294,7 @@
           <a:bodyPr wrap="square" lIns="0" tIns="0" rIns="0" bIns="0" rtlCol="0" anchor="t"/>
           <a:lstStyle/>
           <a:p>
-            <a:pPr indent="0" marL="0">
+            <a:pPr marL="0" indent="0">
               <a:buNone/>
             </a:pPr>
             <a:r>
@@ -14859,7 +15333,7 @@
           <a:bodyPr wrap="square" lIns="0" tIns="0" rIns="0" bIns="0" rtlCol="0" anchor="ctr"/>
           <a:lstStyle/>
           <a:p>
-            <a:pPr indent="0" marL="0">
+            <a:pPr marL="0" indent="0">
               <a:buNone/>
             </a:pPr>
             <a:r>
@@ -14898,7 +15372,7 @@
           <a:bodyPr wrap="square" lIns="0" tIns="0" rIns="0" bIns="0" rtlCol="0" anchor="ctr"/>
           <a:lstStyle/>
           <a:p>
-            <a:pPr algn="r" indent="0" marL="0">
+            <a:pPr marL="0" indent="0" algn="r">
               <a:buNone/>
             </a:pPr>
             <a:r>
@@ -14937,7 +15411,7 @@
           <a:bodyPr wrap="square" lIns="0" tIns="0" rIns="0" bIns="0" rtlCol="0" anchor="ctr"/>
           <a:lstStyle/>
           <a:p>
-            <a:pPr algn="r" indent="0" marL="0">
+            <a:pPr marL="0" indent="0" algn="r">
               <a:buNone/>
             </a:pPr>
             <a:r>
@@ -14979,6 +15453,13 @@
             <a:prstDash val="solid"/>
           </a:ln>
         </p:spPr>
+        <p:txBody>
+          <a:bodyPr/>
+          <a:lstStyle/>
+          <a:p>
+            <a:endParaRPr lang="zh-TW" altLang="en-US"/>
+          </a:p>
+        </p:txBody>
       </p:sp>
       <p:sp>
         <p:nvSpPr>
@@ -15004,6 +15485,13 @@
             <a:prstDash val="solid"/>
           </a:ln>
         </p:spPr>
+        <p:txBody>
+          <a:bodyPr/>
+          <a:lstStyle/>
+          <a:p>
+            <a:endParaRPr lang="zh-TW" altLang="en-US"/>
+          </a:p>
+        </p:txBody>
       </p:sp>
       <p:sp>
         <p:nvSpPr>
@@ -15026,7 +15514,7 @@
           <a:bodyPr wrap="square" lIns="0" tIns="0" rIns="0" bIns="0" rtlCol="0" anchor="ctr"/>
           <a:lstStyle/>
           <a:p>
-            <a:pPr algn="ctr" indent="0" marL="0">
+            <a:pPr marL="0" indent="0" algn="ctr">
               <a:buNone/>
             </a:pPr>
             <a:r>
@@ -15065,7 +15553,7 @@
           <a:bodyPr wrap="square" lIns="0" tIns="0" rIns="0" bIns="0" rtlCol="0" anchor="ctr"/>
           <a:lstStyle/>
           <a:p>
-            <a:pPr indent="0" marL="0">
+            <a:pPr marL="0" indent="0">
               <a:buNone/>
             </a:pPr>
             <a:r>
@@ -15104,7 +15592,7 @@
           <a:bodyPr wrap="square" lIns="0" tIns="0" rIns="0" bIns="0" rtlCol="0" anchor="ctr"/>
           <a:lstStyle/>
           <a:p>
-            <a:pPr indent="0" marL="0">
+            <a:pPr marL="0" indent="0">
               <a:buNone/>
             </a:pPr>
             <a:r>
@@ -15144,6 +15632,13 @@
             <a:prstDash val="solid"/>
           </a:ln>
         </p:spPr>
+        <p:txBody>
+          <a:bodyPr/>
+          <a:lstStyle/>
+          <a:p>
+            <a:endParaRPr lang="zh-TW" altLang="en-US"/>
+          </a:p>
+        </p:txBody>
       </p:sp>
       <p:sp>
         <p:nvSpPr>
@@ -15166,7 +15661,7 @@
           <a:bodyPr wrap="square" lIns="0" tIns="0" rIns="0" bIns="0" rtlCol="0" anchor="ctr"/>
           <a:lstStyle/>
           <a:p>
-            <a:pPr indent="0" marL="0">
+            <a:pPr marL="0" indent="0">
               <a:buNone/>
             </a:pPr>
             <a:r>
@@ -15205,7 +15700,7 @@
           <a:bodyPr wrap="square" lIns="0" tIns="0" rIns="0" bIns="0" rtlCol="0" anchor="ctr"/>
           <a:lstStyle/>
           <a:p>
-            <a:pPr indent="0" marL="0">
+            <a:pPr marL="0" indent="0">
               <a:buNone/>
             </a:pPr>
             <a:r>
@@ -15247,6 +15742,13 @@
             <a:prstDash val="solid"/>
           </a:ln>
         </p:spPr>
+        <p:txBody>
+          <a:bodyPr/>
+          <a:lstStyle/>
+          <a:p>
+            <a:endParaRPr lang="zh-TW" altLang="en-US"/>
+          </a:p>
+        </p:txBody>
       </p:sp>
       <p:sp>
         <p:nvSpPr>
@@ -15272,6 +15774,13 @@
             <a:prstDash val="solid"/>
           </a:ln>
         </p:spPr>
+        <p:txBody>
+          <a:bodyPr/>
+          <a:lstStyle/>
+          <a:p>
+            <a:endParaRPr lang="zh-TW" altLang="en-US"/>
+          </a:p>
+        </p:txBody>
       </p:sp>
       <p:sp>
         <p:nvSpPr>
@@ -15294,7 +15803,7 @@
           <a:bodyPr wrap="square" lIns="0" tIns="0" rIns="0" bIns="0" rtlCol="0" anchor="ctr"/>
           <a:lstStyle/>
           <a:p>
-            <a:pPr algn="ctr" indent="0" marL="0">
+            <a:pPr marL="0" indent="0" algn="ctr">
               <a:buNone/>
             </a:pPr>
             <a:r>
@@ -15333,7 +15842,7 @@
           <a:bodyPr wrap="square" lIns="0" tIns="0" rIns="0" bIns="0" rtlCol="0" anchor="ctr"/>
           <a:lstStyle/>
           <a:p>
-            <a:pPr indent="0" marL="0">
+            <a:pPr marL="0" indent="0">
               <a:buNone/>
             </a:pPr>
             <a:r>
@@ -15372,7 +15881,7 @@
           <a:bodyPr wrap="square" lIns="0" tIns="0" rIns="0" bIns="0" rtlCol="0" anchor="ctr"/>
           <a:lstStyle/>
           <a:p>
-            <a:pPr indent="0" marL="0">
+            <a:pPr marL="0" indent="0">
               <a:buNone/>
             </a:pPr>
             <a:r>
@@ -15412,6 +15921,13 @@
             <a:prstDash val="solid"/>
           </a:ln>
         </p:spPr>
+        <p:txBody>
+          <a:bodyPr/>
+          <a:lstStyle/>
+          <a:p>
+            <a:endParaRPr lang="zh-TW" altLang="en-US"/>
+          </a:p>
+        </p:txBody>
       </p:sp>
       <p:sp>
         <p:nvSpPr>
@@ -15434,7 +15950,7 @@
           <a:bodyPr wrap="square" lIns="0" tIns="0" rIns="0" bIns="0" rtlCol="0" anchor="ctr"/>
           <a:lstStyle/>
           <a:p>
-            <a:pPr indent="0" marL="0">
+            <a:pPr marL="0" indent="0">
               <a:buNone/>
             </a:pPr>
             <a:r>
@@ -15473,7 +15989,7 @@
           <a:bodyPr wrap="square" lIns="0" tIns="0" rIns="0" bIns="0" rtlCol="0" anchor="ctr"/>
           <a:lstStyle/>
           <a:p>
-            <a:pPr indent="0" marL="0">
+            <a:pPr marL="0" indent="0">
               <a:buNone/>
             </a:pPr>
             <a:r>
@@ -15515,6 +16031,13 @@
             <a:prstDash val="solid"/>
           </a:ln>
         </p:spPr>
+        <p:txBody>
+          <a:bodyPr/>
+          <a:lstStyle/>
+          <a:p>
+            <a:endParaRPr lang="zh-TW" altLang="en-US"/>
+          </a:p>
+        </p:txBody>
       </p:sp>
       <p:sp>
         <p:nvSpPr>
@@ -15540,6 +16063,13 @@
             <a:prstDash val="solid"/>
           </a:ln>
         </p:spPr>
+        <p:txBody>
+          <a:bodyPr/>
+          <a:lstStyle/>
+          <a:p>
+            <a:endParaRPr lang="zh-TW" altLang="en-US"/>
+          </a:p>
+        </p:txBody>
       </p:sp>
       <p:sp>
         <p:nvSpPr>
@@ -15562,7 +16092,7 @@
           <a:bodyPr wrap="square" lIns="0" tIns="0" rIns="0" bIns="0" rtlCol="0" anchor="ctr"/>
           <a:lstStyle/>
           <a:p>
-            <a:pPr algn="ctr" indent="0" marL="0">
+            <a:pPr marL="0" indent="0" algn="ctr">
               <a:buNone/>
             </a:pPr>
             <a:r>
@@ -15601,7 +16131,7 @@
           <a:bodyPr wrap="square" lIns="0" tIns="0" rIns="0" bIns="0" rtlCol="0" anchor="ctr"/>
           <a:lstStyle/>
           <a:p>
-            <a:pPr indent="0" marL="0">
+            <a:pPr marL="0" indent="0">
               <a:buNone/>
             </a:pPr>
             <a:r>
@@ -15640,7 +16170,7 @@
           <a:bodyPr wrap="square" lIns="0" tIns="0" rIns="0" bIns="0" rtlCol="0" anchor="ctr"/>
           <a:lstStyle/>
           <a:p>
-            <a:pPr indent="0" marL="0">
+            <a:pPr marL="0" indent="0">
               <a:buNone/>
             </a:pPr>
             <a:r>
@@ -15680,6 +16210,13 @@
             <a:prstDash val="solid"/>
           </a:ln>
         </p:spPr>
+        <p:txBody>
+          <a:bodyPr/>
+          <a:lstStyle/>
+          <a:p>
+            <a:endParaRPr lang="zh-TW" altLang="en-US"/>
+          </a:p>
+        </p:txBody>
       </p:sp>
       <p:sp>
         <p:nvSpPr>
@@ -15702,7 +16239,7 @@
           <a:bodyPr wrap="square" lIns="0" tIns="0" rIns="0" bIns="0" rtlCol="0" anchor="ctr"/>
           <a:lstStyle/>
           <a:p>
-            <a:pPr indent="0" marL="0">
+            <a:pPr marL="0" indent="0">
               <a:buNone/>
             </a:pPr>
             <a:r>
@@ -15741,7 +16278,7 @@
           <a:bodyPr wrap="square" lIns="0" tIns="0" rIns="0" bIns="0" rtlCol="0" anchor="ctr"/>
           <a:lstStyle/>
           <a:p>
-            <a:pPr indent="0" marL="0">
+            <a:pPr marL="0" indent="0">
               <a:buNone/>
             </a:pPr>
             <a:r>
@@ -15783,6 +16320,13 @@
             <a:prstDash val="solid"/>
           </a:ln>
         </p:spPr>
+        <p:txBody>
+          <a:bodyPr/>
+          <a:lstStyle/>
+          <a:p>
+            <a:endParaRPr lang="zh-TW" altLang="en-US"/>
+          </a:p>
+        </p:txBody>
       </p:sp>
       <p:sp>
         <p:nvSpPr>
@@ -15808,6 +16352,13 @@
             <a:prstDash val="solid"/>
           </a:ln>
         </p:spPr>
+        <p:txBody>
+          <a:bodyPr/>
+          <a:lstStyle/>
+          <a:p>
+            <a:endParaRPr lang="zh-TW" altLang="en-US"/>
+          </a:p>
+        </p:txBody>
       </p:sp>
       <p:sp>
         <p:nvSpPr>
@@ -15830,7 +16381,7 @@
           <a:bodyPr wrap="square" lIns="0" tIns="0" rIns="0" bIns="0" rtlCol="0" anchor="ctr"/>
           <a:lstStyle/>
           <a:p>
-            <a:pPr algn="ctr" indent="0" marL="0">
+            <a:pPr marL="0" indent="0" algn="ctr">
               <a:buNone/>
             </a:pPr>
             <a:r>
@@ -15869,7 +16420,7 @@
           <a:bodyPr wrap="square" lIns="0" tIns="0" rIns="0" bIns="0" rtlCol="0" anchor="ctr"/>
           <a:lstStyle/>
           <a:p>
-            <a:pPr indent="0" marL="0">
+            <a:pPr marL="0" indent="0">
               <a:buNone/>
             </a:pPr>
             <a:r>
@@ -15908,7 +16459,7 @@
           <a:bodyPr wrap="square" lIns="0" tIns="0" rIns="0" bIns="0" rtlCol="0" anchor="ctr"/>
           <a:lstStyle/>
           <a:p>
-            <a:pPr indent="0" marL="0">
+            <a:pPr marL="0" indent="0">
               <a:buNone/>
             </a:pPr>
             <a:r>
@@ -15948,6 +16499,13 @@
             <a:prstDash val="solid"/>
           </a:ln>
         </p:spPr>
+        <p:txBody>
+          <a:bodyPr/>
+          <a:lstStyle/>
+          <a:p>
+            <a:endParaRPr lang="zh-TW" altLang="en-US"/>
+          </a:p>
+        </p:txBody>
       </p:sp>
       <p:sp>
         <p:nvSpPr>
@@ -15970,7 +16528,7 @@
           <a:bodyPr wrap="square" lIns="0" tIns="0" rIns="0" bIns="0" rtlCol="0" anchor="ctr"/>
           <a:lstStyle/>
           <a:p>
-            <a:pPr indent="0" marL="0">
+            <a:pPr marL="0" indent="0">
               <a:buNone/>
             </a:pPr>
             <a:r>
@@ -16009,7 +16567,7 @@
           <a:bodyPr wrap="square" lIns="0" tIns="0" rIns="0" bIns="0" rtlCol="0" anchor="ctr"/>
           <a:lstStyle/>
           <a:p>
-            <a:pPr indent="0" marL="0">
+            <a:pPr marL="0" indent="0">
               <a:buNone/>
             </a:pPr>
             <a:r>
@@ -16051,6 +16609,13 @@
             <a:prstDash val="solid"/>
           </a:ln>
         </p:spPr>
+        <p:txBody>
+          <a:bodyPr/>
+          <a:lstStyle/>
+          <a:p>
+            <a:endParaRPr lang="zh-TW" altLang="en-US"/>
+          </a:p>
+        </p:txBody>
       </p:sp>
       <p:sp>
         <p:nvSpPr>
@@ -16076,6 +16641,13 @@
             <a:prstDash val="solid"/>
           </a:ln>
         </p:spPr>
+        <p:txBody>
+          <a:bodyPr/>
+          <a:lstStyle/>
+          <a:p>
+            <a:endParaRPr lang="zh-TW" altLang="en-US"/>
+          </a:p>
+        </p:txBody>
       </p:sp>
       <p:sp>
         <p:nvSpPr>
@@ -16098,7 +16670,7 @@
           <a:bodyPr wrap="square" lIns="0" tIns="0" rIns="0" bIns="0" rtlCol="0" anchor="ctr"/>
           <a:lstStyle/>
           <a:p>
-            <a:pPr algn="ctr" indent="0" marL="0">
+            <a:pPr marL="0" indent="0" algn="ctr">
               <a:buNone/>
             </a:pPr>
             <a:r>
@@ -16137,7 +16709,7 @@
           <a:bodyPr wrap="square" lIns="0" tIns="0" rIns="0" bIns="0" rtlCol="0" anchor="ctr"/>
           <a:lstStyle/>
           <a:p>
-            <a:pPr indent="0" marL="0">
+            <a:pPr marL="0" indent="0">
               <a:buNone/>
             </a:pPr>
             <a:r>
@@ -16176,7 +16748,7 @@
           <a:bodyPr wrap="square" lIns="0" tIns="0" rIns="0" bIns="0" rtlCol="0" anchor="ctr"/>
           <a:lstStyle/>
           <a:p>
-            <a:pPr indent="0" marL="0">
+            <a:pPr marL="0" indent="0">
               <a:buNone/>
             </a:pPr>
             <a:r>
@@ -16216,6 +16788,13 @@
             <a:prstDash val="solid"/>
           </a:ln>
         </p:spPr>
+        <p:txBody>
+          <a:bodyPr/>
+          <a:lstStyle/>
+          <a:p>
+            <a:endParaRPr lang="zh-TW" altLang="en-US"/>
+          </a:p>
+        </p:txBody>
       </p:sp>
       <p:sp>
         <p:nvSpPr>
@@ -16238,7 +16817,7 @@
           <a:bodyPr wrap="square" lIns="0" tIns="0" rIns="0" bIns="0" rtlCol="0" anchor="ctr"/>
           <a:lstStyle/>
           <a:p>
-            <a:pPr indent="0" marL="0">
+            <a:pPr marL="0" indent="0">
               <a:buNone/>
             </a:pPr>
             <a:r>
@@ -16277,7 +16856,7 @@
           <a:bodyPr wrap="square" lIns="0" tIns="0" rIns="0" bIns="0" rtlCol="0" anchor="ctr"/>
           <a:lstStyle/>
           <a:p>
-            <a:pPr indent="0" marL="0">
+            <a:pPr marL="0" indent="0">
               <a:buNone/>
             </a:pPr>
             <a:r>
@@ -16319,6 +16898,13 @@
             <a:prstDash val="solid"/>
           </a:ln>
         </p:spPr>
+        <p:txBody>
+          <a:bodyPr/>
+          <a:lstStyle/>
+          <a:p>
+            <a:endParaRPr lang="zh-TW" altLang="en-US"/>
+          </a:p>
+        </p:txBody>
       </p:sp>
       <p:sp>
         <p:nvSpPr>
@@ -16344,6 +16930,13 @@
             <a:prstDash val="solid"/>
           </a:ln>
         </p:spPr>
+        <p:txBody>
+          <a:bodyPr/>
+          <a:lstStyle/>
+          <a:p>
+            <a:endParaRPr lang="zh-TW" altLang="en-US"/>
+          </a:p>
+        </p:txBody>
       </p:sp>
       <p:sp>
         <p:nvSpPr>
@@ -16366,7 +16959,7 @@
           <a:bodyPr wrap="square" lIns="0" tIns="0" rIns="0" bIns="0" rtlCol="0" anchor="ctr"/>
           <a:lstStyle/>
           <a:p>
-            <a:pPr algn="ctr" indent="0" marL="0">
+            <a:pPr marL="0" indent="0" algn="ctr">
               <a:buNone/>
             </a:pPr>
             <a:r>
@@ -16405,7 +16998,7 @@
           <a:bodyPr wrap="square" lIns="0" tIns="0" rIns="0" bIns="0" rtlCol="0" anchor="ctr"/>
           <a:lstStyle/>
           <a:p>
-            <a:pPr indent="0" marL="0">
+            <a:pPr marL="0" indent="0">
               <a:buNone/>
             </a:pPr>
             <a:r>
@@ -16444,7 +17037,7 @@
           <a:bodyPr wrap="square" lIns="0" tIns="0" rIns="0" bIns="0" rtlCol="0" anchor="ctr"/>
           <a:lstStyle/>
           <a:p>
-            <a:pPr indent="0" marL="0">
+            <a:pPr marL="0" indent="0">
               <a:buNone/>
             </a:pPr>
             <a:r>
@@ -16484,6 +17077,13 @@
             <a:prstDash val="solid"/>
           </a:ln>
         </p:spPr>
+        <p:txBody>
+          <a:bodyPr/>
+          <a:lstStyle/>
+          <a:p>
+            <a:endParaRPr lang="zh-TW" altLang="en-US"/>
+          </a:p>
+        </p:txBody>
       </p:sp>
       <p:sp>
         <p:nvSpPr>
@@ -16506,7 +17106,7 @@
           <a:bodyPr wrap="square" lIns="0" tIns="0" rIns="0" bIns="0" rtlCol="0" anchor="ctr"/>
           <a:lstStyle/>
           <a:p>
-            <a:pPr indent="0" marL="0">
+            <a:pPr marL="0" indent="0">
               <a:buNone/>
             </a:pPr>
             <a:r>
@@ -16545,7 +17145,7 @@
           <a:bodyPr wrap="square" lIns="0" tIns="0" rIns="0" bIns="0" rtlCol="0" anchor="ctr"/>
           <a:lstStyle/>
           <a:p>
-            <a:pPr indent="0" marL="0">
+            <a:pPr marL="0" indent="0">
               <a:buNone/>
             </a:pPr>
             <a:r>
@@ -16579,6 +17179,7 @@
         <a:solidFill>
           <a:srgbClr val="FFFFFF"/>
         </a:solidFill>
+        <a:effectLst/>
       </p:bgPr>
     </p:bg>
     <p:spTree>
@@ -16619,6 +17220,13 @@
             <a:prstDash val="solid"/>
           </a:ln>
         </p:spPr>
+        <p:txBody>
+          <a:bodyPr/>
+          <a:lstStyle/>
+          <a:p>
+            <a:endParaRPr lang="zh-TW" altLang="en-US"/>
+          </a:p>
+        </p:txBody>
       </p:sp>
       <p:sp>
         <p:nvSpPr>
@@ -16641,7 +17249,7 @@
           <a:bodyPr wrap="square" lIns="0" tIns="0" rIns="0" bIns="0" rtlCol="0" anchor="t"/>
           <a:lstStyle/>
           <a:p>
-            <a:pPr indent="0" marL="0">
+            <a:pPr marL="0" indent="0">
               <a:buNone/>
             </a:pPr>
             <a:r>
@@ -16680,7 +17288,7 @@
           <a:bodyPr wrap="square" lIns="0" tIns="0" rIns="0" bIns="0" rtlCol="0" anchor="t"/>
           <a:lstStyle/>
           <a:p>
-            <a:pPr indent="0" marL="0">
+            <a:pPr marL="0" indent="0">
               <a:buNone/>
             </a:pPr>
             <a:r>
@@ -16719,7 +17327,7 @@
           <a:bodyPr wrap="square" lIns="0" tIns="0" rIns="0" bIns="0" rtlCol="0" anchor="ctr"/>
           <a:lstStyle/>
           <a:p>
-            <a:pPr indent="0" marL="0">
+            <a:pPr marL="0" indent="0">
               <a:buNone/>
             </a:pPr>
             <a:r>
@@ -16758,7 +17366,7 @@
           <a:bodyPr wrap="square" lIns="0" tIns="0" rIns="0" bIns="0" rtlCol="0" anchor="ctr"/>
           <a:lstStyle/>
           <a:p>
-            <a:pPr algn="r" indent="0" marL="0">
+            <a:pPr marL="0" indent="0" algn="r">
               <a:buNone/>
             </a:pPr>
             <a:r>
@@ -16797,7 +17405,7 @@
           <a:bodyPr wrap="square" lIns="0" tIns="0" rIns="0" bIns="0" rtlCol="0" anchor="ctr"/>
           <a:lstStyle/>
           <a:p>
-            <a:pPr algn="r" indent="0" marL="0">
+            <a:pPr marL="0" indent="0" algn="r">
               <a:buNone/>
             </a:pPr>
             <a:r>
@@ -16839,6 +17447,13 @@
             <a:prstDash val="solid"/>
           </a:ln>
         </p:spPr>
+        <p:txBody>
+          <a:bodyPr/>
+          <a:lstStyle/>
+          <a:p>
+            <a:endParaRPr lang="zh-TW" altLang="en-US"/>
+          </a:p>
+        </p:txBody>
       </p:sp>
       <p:sp>
         <p:nvSpPr>
@@ -16864,6 +17479,13 @@
             <a:prstDash val="solid"/>
           </a:ln>
         </p:spPr>
+        <p:txBody>
+          <a:bodyPr/>
+          <a:lstStyle/>
+          <a:p>
+            <a:endParaRPr lang="zh-TW" altLang="en-US"/>
+          </a:p>
+        </p:txBody>
       </p:sp>
       <p:sp>
         <p:nvSpPr>
@@ -16886,7 +17508,7 @@
           <a:bodyPr wrap="square" lIns="0" tIns="0" rIns="0" bIns="0" rtlCol="0" anchor="ctr"/>
           <a:lstStyle/>
           <a:p>
-            <a:pPr indent="0" marL="0">
+            <a:pPr marL="0" indent="0">
               <a:buNone/>
             </a:pPr>
             <a:r>
@@ -16925,7 +17547,7 @@
           <a:bodyPr wrap="square" lIns="0" tIns="0" rIns="0" bIns="0" rtlCol="0" anchor="ctr"/>
           <a:lstStyle/>
           <a:p>
-            <a:pPr indent="0" marL="0">
+            <a:pPr marL="0" indent="0">
               <a:buNone/>
             </a:pPr>
             <a:r>
@@ -16964,7 +17586,7 @@
           <a:bodyPr wrap="square" lIns="0" tIns="0" rIns="0" bIns="0" rtlCol="0" anchor="ctr"/>
           <a:lstStyle/>
           <a:p>
-            <a:pPr indent="0" marL="0">
+            <a:pPr marL="0" indent="0">
               <a:buNone/>
             </a:pPr>
             <a:r>
@@ -17082,6 +17704,13 @@
             <a:prstDash val="solid"/>
           </a:ln>
         </p:spPr>
+        <p:txBody>
+          <a:bodyPr/>
+          <a:lstStyle/>
+          <a:p>
+            <a:endParaRPr lang="zh-TW" altLang="en-US"/>
+          </a:p>
+        </p:txBody>
       </p:sp>
       <p:sp>
         <p:nvSpPr>
@@ -17107,6 +17736,13 @@
             <a:prstDash val="solid"/>
           </a:ln>
         </p:spPr>
+        <p:txBody>
+          <a:bodyPr/>
+          <a:lstStyle/>
+          <a:p>
+            <a:endParaRPr lang="zh-TW" altLang="en-US"/>
+          </a:p>
+        </p:txBody>
       </p:sp>
       <p:sp>
         <p:nvSpPr>
@@ -17129,7 +17765,7 @@
           <a:bodyPr wrap="square" lIns="0" tIns="0" rIns="0" bIns="0" rtlCol="0" anchor="ctr"/>
           <a:lstStyle/>
           <a:p>
-            <a:pPr indent="0" marL="0">
+            <a:pPr marL="0" indent="0">
               <a:buNone/>
             </a:pPr>
             <a:r>
@@ -17168,7 +17804,7 @@
           <a:bodyPr wrap="square" lIns="0" tIns="0" rIns="0" bIns="0" rtlCol="0" anchor="ctr"/>
           <a:lstStyle/>
           <a:p>
-            <a:pPr indent="0" marL="0">
+            <a:pPr marL="0" indent="0">
               <a:buNone/>
             </a:pPr>
             <a:r>
@@ -17207,7 +17843,7 @@
           <a:bodyPr wrap="square" lIns="0" tIns="0" rIns="0" bIns="0" rtlCol="0" anchor="ctr"/>
           <a:lstStyle/>
           <a:p>
-            <a:pPr indent="0" marL="0">
+            <a:pPr marL="0" indent="0">
               <a:buNone/>
             </a:pPr>
             <a:r>
@@ -17325,6 +17961,13 @@
             <a:prstDash val="solid"/>
           </a:ln>
         </p:spPr>
+        <p:txBody>
+          <a:bodyPr/>
+          <a:lstStyle/>
+          <a:p>
+            <a:endParaRPr lang="zh-TW" altLang="en-US"/>
+          </a:p>
+        </p:txBody>
       </p:sp>
       <p:sp>
         <p:nvSpPr>
@@ -17350,6 +17993,13 @@
             <a:prstDash val="solid"/>
           </a:ln>
         </p:spPr>
+        <p:txBody>
+          <a:bodyPr/>
+          <a:lstStyle/>
+          <a:p>
+            <a:endParaRPr lang="zh-TW" altLang="en-US"/>
+          </a:p>
+        </p:txBody>
       </p:sp>
       <p:sp>
         <p:nvSpPr>
@@ -17372,7 +18022,7 @@
           <a:bodyPr wrap="square" lIns="0" tIns="0" rIns="0" bIns="0" rtlCol="0" anchor="ctr"/>
           <a:lstStyle/>
           <a:p>
-            <a:pPr indent="0" marL="0">
+            <a:pPr marL="0" indent="0">
               <a:buNone/>
             </a:pPr>
             <a:r>
@@ -17411,7 +18061,7 @@
           <a:bodyPr wrap="square" lIns="0" tIns="0" rIns="0" bIns="0" rtlCol="0" anchor="ctr"/>
           <a:lstStyle/>
           <a:p>
-            <a:pPr indent="0" marL="0">
+            <a:pPr marL="0" indent="0">
               <a:buNone/>
             </a:pPr>
             <a:r>
@@ -17450,7 +18100,7 @@
           <a:bodyPr wrap="square" lIns="0" tIns="0" rIns="0" bIns="0" rtlCol="0" anchor="ctr"/>
           <a:lstStyle/>
           <a:p>
-            <a:pPr indent="0" marL="0">
+            <a:pPr marL="0" indent="0">
               <a:buNone/>
             </a:pPr>
             <a:r>
@@ -17568,6 +18218,13 @@
             <a:prstDash val="solid"/>
           </a:ln>
         </p:spPr>
+        <p:txBody>
+          <a:bodyPr/>
+          <a:lstStyle/>
+          <a:p>
+            <a:endParaRPr lang="zh-TW" altLang="en-US"/>
+          </a:p>
+        </p:txBody>
       </p:sp>
       <p:sp>
         <p:nvSpPr>
@@ -17590,7 +18247,7 @@
           <a:bodyPr wrap="square" lIns="0" tIns="0" rIns="0" bIns="0" rtlCol="0" anchor="ctr"/>
           <a:lstStyle/>
           <a:p>
-            <a:pPr indent="0" marL="0">
+            <a:pPr marL="0" indent="0">
               <a:buNone/>
             </a:pPr>
             <a:r>
@@ -17629,7 +18286,7 @@
           <a:bodyPr wrap="square" lIns="0" tIns="0" rIns="0" bIns="0" rtlCol="0" anchor="ctr"/>
           <a:lstStyle/>
           <a:p>
-            <a:pPr indent="0" marL="0">
+            <a:pPr marL="0" indent="0">
               <a:buNone/>
             </a:pPr>
             <a:r>
@@ -17668,7 +18325,7 @@
           <a:bodyPr wrap="square" lIns="0" tIns="0" rIns="0" bIns="0" rtlCol="0" anchor="ctr"/>
           <a:lstStyle/>
           <a:p>
-            <a:pPr indent="0" marL="0">
+            <a:pPr marL="0" indent="0">
               <a:buNone/>
             </a:pPr>
             <a:r>
@@ -17702,6 +18359,7 @@
         <a:solidFill>
           <a:srgbClr val="FFFFFF"/>
         </a:solidFill>
+        <a:effectLst/>
       </p:bgPr>
     </p:bg>
     <p:spTree>
@@ -17742,6 +18400,13 @@
             <a:prstDash val="solid"/>
           </a:ln>
         </p:spPr>
+        <p:txBody>
+          <a:bodyPr/>
+          <a:lstStyle/>
+          <a:p>
+            <a:endParaRPr lang="zh-TW" altLang="en-US"/>
+          </a:p>
+        </p:txBody>
       </p:sp>
       <p:sp>
         <p:nvSpPr>
@@ -17764,7 +18429,7 @@
           <a:bodyPr wrap="square" lIns="0" tIns="0" rIns="0" bIns="0" rtlCol="0" anchor="t"/>
           <a:lstStyle/>
           <a:p>
-            <a:pPr indent="0" marL="0">
+            <a:pPr marL="0" indent="0">
               <a:buNone/>
             </a:pPr>
             <a:r>
@@ -17803,7 +18468,7 @@
           <a:bodyPr wrap="square" lIns="0" tIns="0" rIns="0" bIns="0" rtlCol="0" anchor="t"/>
           <a:lstStyle/>
           <a:p>
-            <a:pPr indent="0" marL="0">
+            <a:pPr marL="0" indent="0">
               <a:buNone/>
             </a:pPr>
             <a:r>
@@ -17829,7 +18494,7 @@
         </p:nvSpPr>
         <p:spPr>
           <a:xfrm>
-            <a:off x="457200" y="6537960"/>
+            <a:off x="457200" y="6598249"/>
             <a:ext cx="7315200" cy="228600"/>
           </a:xfrm>
           <a:prstGeom prst="rect">
@@ -17842,7 +18507,7 @@
           <a:bodyPr wrap="square" lIns="0" tIns="0" rIns="0" bIns="0" rtlCol="0" anchor="ctr"/>
           <a:lstStyle/>
           <a:p>
-            <a:pPr indent="0" marL="0">
+            <a:pPr marL="0" indent="0">
               <a:buNone/>
             </a:pPr>
             <a:r>
@@ -17881,7 +18546,7 @@
           <a:bodyPr wrap="square" lIns="0" tIns="0" rIns="0" bIns="0" rtlCol="0" anchor="ctr"/>
           <a:lstStyle/>
           <a:p>
-            <a:pPr algn="r" indent="0" marL="0">
+            <a:pPr marL="0" indent="0" algn="r">
               <a:buNone/>
             </a:pPr>
             <a:r>
@@ -17920,7 +18585,7 @@
           <a:bodyPr wrap="square" lIns="0" tIns="0" rIns="0" bIns="0" rtlCol="0" anchor="ctr"/>
           <a:lstStyle/>
           <a:p>
-            <a:pPr algn="r" indent="0" marL="0">
+            <a:pPr marL="0" indent="0" algn="r">
               <a:buNone/>
             </a:pPr>
             <a:r>
@@ -17954,16 +18619,34 @@
         </p:nvGraphicFramePr>
         <p:xfrm>
           <a:off x="457200" y="1417320"/>
-          <a:ext cx="11247120" cy="914400"/>
+          <a:ext cx="11247120" cy="3733800"/>
         </p:xfrm>
         <a:graphic>
           <a:graphicData uri="http://schemas.openxmlformats.org/drawingml/2006/table">
             <a:tbl>
               <a:tblPr/>
               <a:tblGrid>
-                <a:gridCol w="2286000"/>
-                <a:gridCol w="5486400"/>
-                <a:gridCol w="3474720"/>
+                <a:gridCol w="2286000">
+                  <a:extLst>
+                    <a:ext uri="{9D8B030D-6E8A-4147-A177-3AD203B41FA5}">
+                      <a16:colId xmlns:a16="http://schemas.microsoft.com/office/drawing/2014/main" val="20000"/>
+                    </a:ext>
+                  </a:extLst>
+                </a:gridCol>
+                <a:gridCol w="5486400">
+                  <a:extLst>
+                    <a:ext uri="{9D8B030D-6E8A-4147-A177-3AD203B41FA5}">
+                      <a16:colId xmlns:a16="http://schemas.microsoft.com/office/drawing/2014/main" val="20001"/>
+                    </a:ext>
+                  </a:extLst>
+                </a:gridCol>
+                <a:gridCol w="3474720">
+                  <a:extLst>
+                    <a:ext uri="{9D8B030D-6E8A-4147-A177-3AD203B41FA5}">
+                      <a16:colId xmlns:a16="http://schemas.microsoft.com/office/drawing/2014/main" val="20002"/>
+                    </a:ext>
+                  </a:extLst>
+                </a:gridCol>
               </a:tblGrid>
               <a:tr h="411480">
                 <a:tc>
@@ -17971,7 +18654,7 @@
                     <a:bodyPr/>
                     <a:lstStyle/>
                     <a:p>
-                      <a:pPr algn="ctr" indent="0" marL="0">
+                      <a:pPr marL="0" indent="0" algn="ctr">
                         <a:buNone/>
                       </a:pPr>
                       <a:r>
@@ -17992,7 +18675,7 @@
                       </a:endParaRPr>
                     </a:p>
                   </a:txBody>
-                  <a:tcPr marL="91440" marR="91440" marT="45720" marB="45720">
+                  <a:tcPr>
                     <a:lnL w="6350" cap="flat" cmpd="sng" algn="ctr">
                       <a:solidFill>
                         <a:srgbClr val="D5C8EE"/>
@@ -18039,7 +18722,7 @@
                     <a:bodyPr/>
                     <a:lstStyle/>
                     <a:p>
-                      <a:pPr indent="0" marL="0">
+                      <a:pPr marL="0" indent="0">
                         <a:buNone/>
                       </a:pPr>
                       <a:r>
@@ -18060,7 +18743,7 @@
                       </a:endParaRPr>
                     </a:p>
                   </a:txBody>
-                  <a:tcPr marL="91440" marR="91440" marT="45720" marB="45720">
+                  <a:tcPr>
                     <a:lnL w="6350" cap="flat" cmpd="sng" algn="ctr">
                       <a:solidFill>
                         <a:srgbClr val="D5C8EE"/>
@@ -18107,7 +18790,7 @@
                     <a:bodyPr/>
                     <a:lstStyle/>
                     <a:p>
-                      <a:pPr indent="0" marL="0">
+                      <a:pPr marL="0" indent="0">
                         <a:buNone/>
                       </a:pPr>
                       <a:r>
@@ -18128,7 +18811,7 @@
                       </a:endParaRPr>
                     </a:p>
                   </a:txBody>
-                  <a:tcPr marL="91440" marR="91440" marT="45720" marB="45720">
+                  <a:tcPr>
                     <a:lnL w="6350" cap="flat" cmpd="sng" algn="ctr">
                       <a:solidFill>
                         <a:srgbClr val="D5C8EE"/>
@@ -18170,6 +18853,11 @@
                     </a:solidFill>
                   </a:tcPr>
                 </a:tc>
+                <a:extLst>
+                  <a:ext uri="{0D108BD9-81ED-4DB2-BD59-A6C34878D82A}">
+                    <a16:rowId xmlns:a16="http://schemas.microsoft.com/office/drawing/2014/main" val="10000"/>
+                  </a:ext>
+                </a:extLst>
               </a:tr>
               <a:tr h="411480">
                 <a:tc>
@@ -18177,7 +18865,7 @@
                     <a:bodyPr/>
                     <a:lstStyle/>
                     <a:p>
-                      <a:pPr algn="ctr" indent="0" marL="0">
+                      <a:pPr marL="0" indent="0" algn="ctr">
                         <a:buNone/>
                       </a:pPr>
                       <a:r>
@@ -18198,7 +18886,7 @@
                       </a:endParaRPr>
                     </a:p>
                   </a:txBody>
-                  <a:tcPr marL="91440" marR="91440" marT="45720" marB="45720">
+                  <a:tcPr>
                     <a:lnL w="6350" cap="flat" cmpd="sng" algn="ctr">
                       <a:solidFill>
                         <a:srgbClr val="D5C8EE"/>
@@ -18245,7 +18933,7 @@
                     <a:bodyPr/>
                     <a:lstStyle/>
                     <a:p>
-                      <a:pPr indent="0" marL="0">
+                      <a:pPr marL="0" indent="0">
                         <a:buNone/>
                       </a:pPr>
                       <a:r>
@@ -18266,7 +18954,7 @@
                       </a:endParaRPr>
                     </a:p>
                   </a:txBody>
-                  <a:tcPr marL="91440" marR="91440" marT="45720" marB="45720">
+                  <a:tcPr>
                     <a:lnL w="6350" cap="flat" cmpd="sng" algn="ctr">
                       <a:solidFill>
                         <a:srgbClr val="D5C8EE"/>
@@ -18313,7 +19001,7 @@
                     <a:bodyPr/>
                     <a:lstStyle/>
                     <a:p>
-                      <a:pPr indent="0" marL="0">
+                      <a:pPr marL="0" indent="0">
                         <a:buNone/>
                       </a:pPr>
                       <a:r>
@@ -18334,7 +19022,7 @@
                       </a:endParaRPr>
                     </a:p>
                   </a:txBody>
-                  <a:tcPr marL="91440" marR="91440" marT="45720" marB="45720">
+                  <a:tcPr>
                     <a:lnL w="6350" cap="flat" cmpd="sng" algn="ctr">
                       <a:solidFill>
                         <a:srgbClr val="D5C8EE"/>
@@ -18376,6 +19064,11 @@
                     </a:solidFill>
                   </a:tcPr>
                 </a:tc>
+                <a:extLst>
+                  <a:ext uri="{0D108BD9-81ED-4DB2-BD59-A6C34878D82A}">
+                    <a16:rowId xmlns:a16="http://schemas.microsoft.com/office/drawing/2014/main" val="10001"/>
+                  </a:ext>
+                </a:extLst>
               </a:tr>
               <a:tr h="411480">
                 <a:tc>
@@ -18383,7 +19076,7 @@
                     <a:bodyPr/>
                     <a:lstStyle/>
                     <a:p>
-                      <a:pPr algn="ctr" indent="0" marL="0">
+                      <a:pPr marL="0" indent="0" algn="ctr">
                         <a:buNone/>
                       </a:pPr>
                       <a:r>
@@ -18404,7 +19097,7 @@
                       </a:endParaRPr>
                     </a:p>
                   </a:txBody>
-                  <a:tcPr marL="91440" marR="91440" marT="45720" marB="45720">
+                  <a:tcPr>
                     <a:lnL w="6350" cap="flat" cmpd="sng" algn="ctr">
                       <a:solidFill>
                         <a:srgbClr val="D5C8EE"/>
@@ -18451,7 +19144,7 @@
                     <a:bodyPr/>
                     <a:lstStyle/>
                     <a:p>
-                      <a:pPr indent="0" marL="0">
+                      <a:pPr marL="0" indent="0">
                         <a:buNone/>
                       </a:pPr>
                       <a:r>
@@ -18472,7 +19165,7 @@
                       </a:endParaRPr>
                     </a:p>
                   </a:txBody>
-                  <a:tcPr marL="91440" marR="91440" marT="45720" marB="45720">
+                  <a:tcPr>
                     <a:lnL w="6350" cap="flat" cmpd="sng" algn="ctr">
                       <a:solidFill>
                         <a:srgbClr val="D5C8EE"/>
@@ -18519,7 +19212,7 @@
                     <a:bodyPr/>
                     <a:lstStyle/>
                     <a:p>
-                      <a:pPr indent="0" marL="0">
+                      <a:pPr marL="0" indent="0">
                         <a:buNone/>
                       </a:pPr>
                       <a:r>
@@ -18540,7 +19233,7 @@
                       </a:endParaRPr>
                     </a:p>
                   </a:txBody>
-                  <a:tcPr marL="91440" marR="91440" marT="45720" marB="45720">
+                  <a:tcPr>
                     <a:lnL w="6350" cap="flat" cmpd="sng" algn="ctr">
                       <a:solidFill>
                         <a:srgbClr val="D5C8EE"/>
@@ -18582,6 +19275,11 @@
                     </a:solidFill>
                   </a:tcPr>
                 </a:tc>
+                <a:extLst>
+                  <a:ext uri="{0D108BD9-81ED-4DB2-BD59-A6C34878D82A}">
+                    <a16:rowId xmlns:a16="http://schemas.microsoft.com/office/drawing/2014/main" val="10002"/>
+                  </a:ext>
+                </a:extLst>
               </a:tr>
               <a:tr h="411480">
                 <a:tc>
@@ -18589,7 +19287,7 @@
                     <a:bodyPr/>
                     <a:lstStyle/>
                     <a:p>
-                      <a:pPr algn="ctr" indent="0" marL="0">
+                      <a:pPr marL="0" indent="0" algn="ctr">
                         <a:buNone/>
                       </a:pPr>
                       <a:r>
@@ -18610,7 +19308,7 @@
                       </a:endParaRPr>
                     </a:p>
                   </a:txBody>
-                  <a:tcPr marL="91440" marR="91440" marT="45720" marB="45720">
+                  <a:tcPr>
                     <a:lnL w="6350" cap="flat" cmpd="sng" algn="ctr">
                       <a:solidFill>
                         <a:srgbClr val="D5C8EE"/>
@@ -18657,7 +19355,7 @@
                     <a:bodyPr/>
                     <a:lstStyle/>
                     <a:p>
-                      <a:pPr indent="0" marL="0">
+                      <a:pPr marL="0" indent="0">
                         <a:buNone/>
                       </a:pPr>
                       <a:r>
@@ -18678,7 +19376,7 @@
                       </a:endParaRPr>
                     </a:p>
                   </a:txBody>
-                  <a:tcPr marL="91440" marR="91440" marT="45720" marB="45720">
+                  <a:tcPr>
                     <a:lnL w="6350" cap="flat" cmpd="sng" algn="ctr">
                       <a:solidFill>
                         <a:srgbClr val="D5C8EE"/>
@@ -18725,7 +19423,7 @@
                     <a:bodyPr/>
                     <a:lstStyle/>
                     <a:p>
-                      <a:pPr indent="0" marL="0">
+                      <a:pPr marL="0" indent="0">
                         <a:buNone/>
                       </a:pPr>
                       <a:r>
@@ -18746,7 +19444,7 @@
                       </a:endParaRPr>
                     </a:p>
                   </a:txBody>
-                  <a:tcPr marL="91440" marR="91440" marT="45720" marB="45720">
+                  <a:tcPr>
                     <a:lnL w="6350" cap="flat" cmpd="sng" algn="ctr">
                       <a:solidFill>
                         <a:srgbClr val="D5C8EE"/>
@@ -18788,6 +19486,11 @@
                     </a:solidFill>
                   </a:tcPr>
                 </a:tc>
+                <a:extLst>
+                  <a:ext uri="{0D108BD9-81ED-4DB2-BD59-A6C34878D82A}">
+                    <a16:rowId xmlns:a16="http://schemas.microsoft.com/office/drawing/2014/main" val="10003"/>
+                  </a:ext>
+                </a:extLst>
               </a:tr>
               <a:tr h="411480">
                 <a:tc>
@@ -18795,7 +19498,7 @@
                     <a:bodyPr/>
                     <a:lstStyle/>
                     <a:p>
-                      <a:pPr algn="ctr" indent="0" marL="0">
+                      <a:pPr marL="0" indent="0" algn="ctr">
                         <a:buNone/>
                       </a:pPr>
                       <a:r>
@@ -18816,7 +19519,7 @@
                       </a:endParaRPr>
                     </a:p>
                   </a:txBody>
-                  <a:tcPr marL="91440" marR="91440" marT="45720" marB="45720">
+                  <a:tcPr>
                     <a:lnL w="6350" cap="flat" cmpd="sng" algn="ctr">
                       <a:solidFill>
                         <a:srgbClr val="D5C8EE"/>
@@ -18863,7 +19566,7 @@
                     <a:bodyPr/>
                     <a:lstStyle/>
                     <a:p>
-                      <a:pPr indent="0" marL="0">
+                      <a:pPr marL="0" indent="0">
                         <a:buNone/>
                       </a:pPr>
                       <a:r>
@@ -18884,7 +19587,7 @@
                       </a:endParaRPr>
                     </a:p>
                   </a:txBody>
-                  <a:tcPr marL="91440" marR="91440" marT="45720" marB="45720">
+                  <a:tcPr>
                     <a:lnL w="6350" cap="flat" cmpd="sng" algn="ctr">
                       <a:solidFill>
                         <a:srgbClr val="D5C8EE"/>
@@ -18931,7 +19634,7 @@
                     <a:bodyPr/>
                     <a:lstStyle/>
                     <a:p>
-                      <a:pPr indent="0" marL="0">
+                      <a:pPr marL="0" indent="0">
                         <a:buNone/>
                       </a:pPr>
                       <a:r>
@@ -18952,7 +19655,7 @@
                       </a:endParaRPr>
                     </a:p>
                   </a:txBody>
-                  <a:tcPr marL="91440" marR="91440" marT="45720" marB="45720">
+                  <a:tcPr>
                     <a:lnL w="6350" cap="flat" cmpd="sng" algn="ctr">
                       <a:solidFill>
                         <a:srgbClr val="D5C8EE"/>
@@ -18994,6 +19697,11 @@
                     </a:solidFill>
                   </a:tcPr>
                 </a:tc>
+                <a:extLst>
+                  <a:ext uri="{0D108BD9-81ED-4DB2-BD59-A6C34878D82A}">
+                    <a16:rowId xmlns:a16="http://schemas.microsoft.com/office/drawing/2014/main" val="10004"/>
+                  </a:ext>
+                </a:extLst>
               </a:tr>
               <a:tr h="411480">
                 <a:tc>
@@ -19001,7 +19709,7 @@
                     <a:bodyPr/>
                     <a:lstStyle/>
                     <a:p>
-                      <a:pPr algn="ctr" indent="0" marL="0">
+                      <a:pPr marL="0" indent="0" algn="ctr">
                         <a:buNone/>
                       </a:pPr>
                       <a:r>
@@ -19022,7 +19730,7 @@
                       </a:endParaRPr>
                     </a:p>
                   </a:txBody>
-                  <a:tcPr marL="91440" marR="91440" marT="45720" marB="45720">
+                  <a:tcPr>
                     <a:lnL w="6350" cap="flat" cmpd="sng" algn="ctr">
                       <a:solidFill>
                         <a:srgbClr val="D5C8EE"/>
@@ -19069,7 +19777,7 @@
                     <a:bodyPr/>
                     <a:lstStyle/>
                     <a:p>
-                      <a:pPr indent="0" marL="0">
+                      <a:pPr marL="0" indent="0">
                         <a:buNone/>
                       </a:pPr>
                       <a:r>
@@ -19090,7 +19798,7 @@
                       </a:endParaRPr>
                     </a:p>
                   </a:txBody>
-                  <a:tcPr marL="91440" marR="91440" marT="45720" marB="45720">
+                  <a:tcPr>
                     <a:lnL w="6350" cap="flat" cmpd="sng" algn="ctr">
                       <a:solidFill>
                         <a:srgbClr val="D5C8EE"/>
@@ -19137,7 +19845,7 @@
                     <a:bodyPr/>
                     <a:lstStyle/>
                     <a:p>
-                      <a:pPr indent="0" marL="0">
+                      <a:pPr marL="0" indent="0">
                         <a:buNone/>
                       </a:pPr>
                       <a:r>
@@ -19158,7 +19866,7 @@
                       </a:endParaRPr>
                     </a:p>
                   </a:txBody>
-                  <a:tcPr marL="91440" marR="91440" marT="45720" marB="45720">
+                  <a:tcPr>
                     <a:lnL w="6350" cap="flat" cmpd="sng" algn="ctr">
                       <a:solidFill>
                         <a:srgbClr val="D5C8EE"/>
@@ -19200,6 +19908,11 @@
                     </a:solidFill>
                   </a:tcPr>
                 </a:tc>
+                <a:extLst>
+                  <a:ext uri="{0D108BD9-81ED-4DB2-BD59-A6C34878D82A}">
+                    <a16:rowId xmlns:a16="http://schemas.microsoft.com/office/drawing/2014/main" val="10005"/>
+                  </a:ext>
+                </a:extLst>
               </a:tr>
               <a:tr h="411480">
                 <a:tc>
@@ -19207,7 +19920,7 @@
                     <a:bodyPr/>
                     <a:lstStyle/>
                     <a:p>
-                      <a:pPr algn="ctr" indent="0" marL="0">
+                      <a:pPr marL="0" indent="0" algn="ctr">
                         <a:buNone/>
                       </a:pPr>
                       <a:r>
@@ -19228,7 +19941,7 @@
                       </a:endParaRPr>
                     </a:p>
                   </a:txBody>
-                  <a:tcPr marL="91440" marR="91440" marT="45720" marB="45720">
+                  <a:tcPr>
                     <a:lnL w="6350" cap="flat" cmpd="sng" algn="ctr">
                       <a:solidFill>
                         <a:srgbClr val="D5C8EE"/>
@@ -19275,7 +19988,7 @@
                     <a:bodyPr/>
                     <a:lstStyle/>
                     <a:p>
-                      <a:pPr indent="0" marL="0">
+                      <a:pPr marL="0" indent="0">
                         <a:buNone/>
                       </a:pPr>
                       <a:r>
@@ -19296,7 +20009,7 @@
                       </a:endParaRPr>
                     </a:p>
                   </a:txBody>
-                  <a:tcPr marL="91440" marR="91440" marT="45720" marB="45720">
+                  <a:tcPr>
                     <a:lnL w="6350" cap="flat" cmpd="sng" algn="ctr">
                       <a:solidFill>
                         <a:srgbClr val="D5C8EE"/>
@@ -19343,7 +20056,7 @@
                     <a:bodyPr/>
                     <a:lstStyle/>
                     <a:p>
-                      <a:pPr indent="0" marL="0">
+                      <a:pPr marL="0" indent="0">
                         <a:buNone/>
                       </a:pPr>
                       <a:r>
@@ -19364,7 +20077,7 @@
                       </a:endParaRPr>
                     </a:p>
                   </a:txBody>
-                  <a:tcPr marL="91440" marR="91440" marT="45720" marB="45720">
+                  <a:tcPr>
                     <a:lnL w="6350" cap="flat" cmpd="sng" algn="ctr">
                       <a:solidFill>
                         <a:srgbClr val="D5C8EE"/>
@@ -19406,6 +20119,11 @@
                     </a:solidFill>
                   </a:tcPr>
                 </a:tc>
+                <a:extLst>
+                  <a:ext uri="{0D108BD9-81ED-4DB2-BD59-A6C34878D82A}">
+                    <a16:rowId xmlns:a16="http://schemas.microsoft.com/office/drawing/2014/main" val="10006"/>
+                  </a:ext>
+                </a:extLst>
               </a:tr>
               <a:tr h="411480">
                 <a:tc>
@@ -19413,7 +20131,7 @@
                     <a:bodyPr/>
                     <a:lstStyle/>
                     <a:p>
-                      <a:pPr algn="ctr" indent="0" marL="0">
+                      <a:pPr marL="0" indent="0" algn="ctr">
                         <a:buNone/>
                       </a:pPr>
                       <a:r>
@@ -19434,7 +20152,7 @@
                       </a:endParaRPr>
                     </a:p>
                   </a:txBody>
-                  <a:tcPr marL="91440" marR="91440" marT="45720" marB="45720">
+                  <a:tcPr>
                     <a:lnL w="6350" cap="flat" cmpd="sng" algn="ctr">
                       <a:solidFill>
                         <a:srgbClr val="D5C8EE"/>
@@ -19481,7 +20199,7 @@
                     <a:bodyPr/>
                     <a:lstStyle/>
                     <a:p>
-                      <a:pPr indent="0" marL="0">
+                      <a:pPr marL="0" indent="0">
                         <a:buNone/>
                       </a:pPr>
                       <a:r>
@@ -19502,7 +20220,7 @@
                       </a:endParaRPr>
                     </a:p>
                   </a:txBody>
-                  <a:tcPr marL="91440" marR="91440" marT="45720" marB="45720">
+                  <a:tcPr>
                     <a:lnL w="6350" cap="flat" cmpd="sng" algn="ctr">
                       <a:solidFill>
                         <a:srgbClr val="D5C8EE"/>
@@ -19549,7 +20267,7 @@
                     <a:bodyPr/>
                     <a:lstStyle/>
                     <a:p>
-                      <a:pPr indent="0" marL="0">
+                      <a:pPr marL="0" indent="0">
                         <a:buNone/>
                       </a:pPr>
                       <a:r>
@@ -19570,7 +20288,7 @@
                       </a:endParaRPr>
                     </a:p>
                   </a:txBody>
-                  <a:tcPr marL="91440" marR="91440" marT="45720" marB="45720">
+                  <a:tcPr>
                     <a:lnL w="6350" cap="flat" cmpd="sng" algn="ctr">
                       <a:solidFill>
                         <a:srgbClr val="D5C8EE"/>
@@ -19612,6 +20330,11 @@
                     </a:solidFill>
                   </a:tcPr>
                 </a:tc>
+                <a:extLst>
+                  <a:ext uri="{0D108BD9-81ED-4DB2-BD59-A6C34878D82A}">
+                    <a16:rowId xmlns:a16="http://schemas.microsoft.com/office/drawing/2014/main" val="10007"/>
+                  </a:ext>
+                </a:extLst>
               </a:tr>
               <a:tr h="411480">
                 <a:tc>
@@ -19619,7 +20342,7 @@
                     <a:bodyPr/>
                     <a:lstStyle/>
                     <a:p>
-                      <a:pPr algn="ctr" indent="0" marL="0">
+                      <a:pPr marL="0" indent="0" algn="ctr">
                         <a:buNone/>
                       </a:pPr>
                       <a:r>
@@ -19640,7 +20363,7 @@
                       </a:endParaRPr>
                     </a:p>
                   </a:txBody>
-                  <a:tcPr marL="91440" marR="91440" marT="45720" marB="45720">
+                  <a:tcPr>
                     <a:lnL w="6350" cap="flat" cmpd="sng" algn="ctr">
                       <a:solidFill>
                         <a:srgbClr val="D5C8EE"/>
@@ -19687,7 +20410,7 @@
                     <a:bodyPr/>
                     <a:lstStyle/>
                     <a:p>
-                      <a:pPr indent="0" marL="0">
+                      <a:pPr marL="0" indent="0">
                         <a:buNone/>
                       </a:pPr>
                       <a:r>
@@ -19708,7 +20431,7 @@
                       </a:endParaRPr>
                     </a:p>
                   </a:txBody>
-                  <a:tcPr marL="91440" marR="91440" marT="45720" marB="45720">
+                  <a:tcPr>
                     <a:lnL w="6350" cap="flat" cmpd="sng" algn="ctr">
                       <a:solidFill>
                         <a:srgbClr val="D5C8EE"/>
@@ -19755,7 +20478,7 @@
                     <a:bodyPr/>
                     <a:lstStyle/>
                     <a:p>
-                      <a:pPr indent="0" marL="0">
+                      <a:pPr marL="0" indent="0">
                         <a:buNone/>
                       </a:pPr>
                       <a:r>
@@ -19776,7 +20499,7 @@
                       </a:endParaRPr>
                     </a:p>
                   </a:txBody>
-                  <a:tcPr marL="91440" marR="91440" marT="45720" marB="45720">
+                  <a:tcPr>
                     <a:lnL w="6350" cap="flat" cmpd="sng" algn="ctr">
                       <a:solidFill>
                         <a:srgbClr val="D5C8EE"/>
@@ -19818,6 +20541,11 @@
                     </a:solidFill>
                   </a:tcPr>
                 </a:tc>
+                <a:extLst>
+                  <a:ext uri="{0D108BD9-81ED-4DB2-BD59-A6C34878D82A}">
+                    <a16:rowId xmlns:a16="http://schemas.microsoft.com/office/drawing/2014/main" val="10008"/>
+                  </a:ext>
+                </a:extLst>
               </a:tr>
             </a:tbl>
           </a:graphicData>
@@ -19831,8 +20559,8 @@
         </p:nvSpPr>
         <p:spPr>
           <a:xfrm>
-            <a:off x="457200" y="4937760"/>
-            <a:ext cx="11247120" cy="1371600"/>
+            <a:off x="457200" y="5199013"/>
+            <a:ext cx="11247120" cy="1278657"/>
           </a:xfrm>
           <a:prstGeom prst="rect">
             <a:avLst/>
@@ -19847,6 +20575,13 @@
             <a:prstDash val="solid"/>
           </a:ln>
         </p:spPr>
+        <p:txBody>
+          <a:bodyPr/>
+          <a:lstStyle/>
+          <a:p>
+            <a:endParaRPr lang="zh-TW" altLang="en-US"/>
+          </a:p>
+        </p:txBody>
       </p:sp>
       <p:sp>
         <p:nvSpPr>
@@ -19856,7 +20591,7 @@
         </p:nvSpPr>
         <p:spPr>
           <a:xfrm>
-            <a:off x="640080" y="5029200"/>
+            <a:off x="640080" y="5290454"/>
             <a:ext cx="10972800" cy="365760"/>
           </a:xfrm>
           <a:prstGeom prst="rect">
@@ -19869,7 +20604,7 @@
           <a:bodyPr wrap="square" lIns="0" tIns="0" rIns="0" bIns="0" rtlCol="0" anchor="ctr"/>
           <a:lstStyle/>
           <a:p>
-            <a:pPr indent="0" marL="0">
+            <a:pPr marL="0" indent="0">
               <a:buNone/>
             </a:pPr>
             <a:r>
@@ -19895,7 +20630,7 @@
         </p:nvSpPr>
         <p:spPr>
           <a:xfrm>
-            <a:off x="640080" y="5440680"/>
+            <a:off x="640080" y="5701934"/>
             <a:ext cx="10972800" cy="868680"/>
           </a:xfrm>
           <a:prstGeom prst="rect">
@@ -19908,7 +20643,7 @@
           <a:bodyPr wrap="square" lIns="0" tIns="0" rIns="0" bIns="0" rtlCol="0" anchor="t"/>
           <a:lstStyle/>
           <a:p>
-            <a:pPr indent="0" marL="0">
+            <a:pPr marL="0" indent="0">
               <a:buNone/>
             </a:pPr>
             <a:r>
@@ -19925,7 +20660,7 @@
             <a:endParaRPr lang="en-US" sz="1150" dirty="0"/>
           </a:p>
           <a:p>
-            <a:pPr indent="0" marL="0">
+            <a:pPr marL="0" indent="0">
               <a:buNone/>
             </a:pPr>
             <a:r>
@@ -19942,7 +20677,7 @@
             <a:endParaRPr lang="en-US" sz="1150" dirty="0"/>
           </a:p>
           <a:p>
-            <a:pPr indent="0" marL="0">
+            <a:pPr marL="0" indent="0">
               <a:buNone/>
             </a:pPr>
             <a:r>
@@ -19976,6 +20711,7 @@
         <a:solidFill>
           <a:srgbClr val="FFFFFF"/>
         </a:solidFill>
+        <a:effectLst/>
       </p:bgPr>
     </p:bg>
     <p:spTree>
@@ -20016,6 +20752,13 @@
             <a:prstDash val="solid"/>
           </a:ln>
         </p:spPr>
+        <p:txBody>
+          <a:bodyPr/>
+          <a:lstStyle/>
+          <a:p>
+            <a:endParaRPr lang="zh-TW" altLang="en-US"/>
+          </a:p>
+        </p:txBody>
       </p:sp>
       <p:sp>
         <p:nvSpPr>
@@ -20038,7 +20781,7 @@
           <a:bodyPr wrap="square" lIns="0" tIns="0" rIns="0" bIns="0" rtlCol="0" anchor="t"/>
           <a:lstStyle/>
           <a:p>
-            <a:pPr indent="0" marL="0">
+            <a:pPr marL="0" indent="0">
               <a:buNone/>
             </a:pPr>
             <a:r>
@@ -20077,7 +20820,7 @@
           <a:bodyPr wrap="square" lIns="0" tIns="0" rIns="0" bIns="0" rtlCol="0" anchor="t"/>
           <a:lstStyle/>
           <a:p>
-            <a:pPr indent="0" marL="0">
+            <a:pPr marL="0" indent="0">
               <a:buNone/>
             </a:pPr>
             <a:r>
@@ -20116,7 +20859,7 @@
           <a:bodyPr wrap="square" lIns="0" tIns="0" rIns="0" bIns="0" rtlCol="0" anchor="ctr"/>
           <a:lstStyle/>
           <a:p>
-            <a:pPr indent="0" marL="0">
+            <a:pPr marL="0" indent="0">
               <a:buNone/>
             </a:pPr>
             <a:r>
@@ -20155,7 +20898,7 @@
           <a:bodyPr wrap="square" lIns="0" tIns="0" rIns="0" bIns="0" rtlCol="0" anchor="ctr"/>
           <a:lstStyle/>
           <a:p>
-            <a:pPr algn="r" indent="0" marL="0">
+            <a:pPr marL="0" indent="0" algn="r">
               <a:buNone/>
             </a:pPr>
             <a:r>
@@ -20194,7 +20937,7 @@
           <a:bodyPr wrap="square" lIns="0" tIns="0" rIns="0" bIns="0" rtlCol="0" anchor="ctr"/>
           <a:lstStyle/>
           <a:p>
-            <a:pPr algn="r" indent="0" marL="0">
+            <a:pPr marL="0" indent="0" algn="r">
               <a:buNone/>
             </a:pPr>
             <a:r>
@@ -20236,6 +20979,13 @@
             <a:prstDash val="solid"/>
           </a:ln>
         </p:spPr>
+        <p:txBody>
+          <a:bodyPr/>
+          <a:lstStyle/>
+          <a:p>
+            <a:endParaRPr lang="zh-TW" altLang="en-US"/>
+          </a:p>
+        </p:txBody>
       </p:sp>
       <p:sp>
         <p:nvSpPr>
@@ -20258,7 +21008,7 @@
           <a:bodyPr wrap="square" lIns="0" tIns="0" rIns="0" bIns="0" rtlCol="0" anchor="ctr"/>
           <a:lstStyle/>
           <a:p>
-            <a:pPr indent="0" marL="0">
+            <a:pPr marL="0" indent="0">
               <a:buNone/>
             </a:pPr>
             <a:r>
@@ -20297,7 +21047,7 @@
           <a:bodyPr wrap="square" lIns="0" tIns="0" rIns="0" bIns="0" rtlCol="0" anchor="ctr"/>
           <a:lstStyle/>
           <a:p>
-            <a:pPr indent="0" marL="0">
+            <a:pPr marL="0" indent="0">
               <a:buNone/>
             </a:pPr>
             <a:r>
@@ -20336,7 +21086,7 @@
           <a:bodyPr wrap="square" lIns="0" tIns="0" rIns="0" bIns="0" rtlCol="0" anchor="ctr"/>
           <a:lstStyle/>
           <a:p>
-            <a:pPr indent="0" marL="0">
+            <a:pPr marL="0" indent="0">
               <a:buNone/>
             </a:pPr>
             <a:r>
@@ -20378,6 +21128,13 @@
             <a:prstDash val="solid"/>
           </a:ln>
         </p:spPr>
+        <p:txBody>
+          <a:bodyPr/>
+          <a:lstStyle/>
+          <a:p>
+            <a:endParaRPr lang="zh-TW" altLang="en-US"/>
+          </a:p>
+        </p:txBody>
       </p:sp>
       <p:sp>
         <p:nvSpPr>
@@ -20400,7 +21157,7 @@
           <a:bodyPr wrap="square" lIns="0" tIns="0" rIns="0" bIns="0" rtlCol="0" anchor="ctr"/>
           <a:lstStyle/>
           <a:p>
-            <a:pPr indent="0" marL="0">
+            <a:pPr marL="0" indent="0">
               <a:buNone/>
             </a:pPr>
             <a:r>
@@ -20439,7 +21196,7 @@
           <a:bodyPr wrap="square" lIns="0" tIns="0" rIns="0" bIns="0" rtlCol="0" anchor="ctr"/>
           <a:lstStyle/>
           <a:p>
-            <a:pPr indent="0" marL="0">
+            <a:pPr marL="0" indent="0">
               <a:buNone/>
             </a:pPr>
             <a:r>
@@ -20478,7 +21235,7 @@
           <a:bodyPr wrap="square" lIns="0" tIns="0" rIns="0" bIns="0" rtlCol="0" anchor="ctr"/>
           <a:lstStyle/>
           <a:p>
-            <a:pPr indent="0" marL="0">
+            <a:pPr marL="0" indent="0">
               <a:buNone/>
             </a:pPr>
             <a:r>
@@ -20520,6 +21277,13 @@
             <a:prstDash val="solid"/>
           </a:ln>
         </p:spPr>
+        <p:txBody>
+          <a:bodyPr/>
+          <a:lstStyle/>
+          <a:p>
+            <a:endParaRPr lang="zh-TW" altLang="en-US"/>
+          </a:p>
+        </p:txBody>
       </p:sp>
       <p:sp>
         <p:nvSpPr>
@@ -20542,7 +21306,7 @@
           <a:bodyPr wrap="square" lIns="0" tIns="0" rIns="0" bIns="0" rtlCol="0" anchor="ctr"/>
           <a:lstStyle/>
           <a:p>
-            <a:pPr indent="0" marL="0">
+            <a:pPr marL="0" indent="0">
               <a:buNone/>
             </a:pPr>
             <a:r>
@@ -20581,7 +21345,7 @@
           <a:bodyPr wrap="square" lIns="0" tIns="0" rIns="0" bIns="0" rtlCol="0" anchor="ctr"/>
           <a:lstStyle/>
           <a:p>
-            <a:pPr indent="0" marL="0">
+            <a:pPr marL="0" indent="0">
               <a:buNone/>
             </a:pPr>
             <a:r>
@@ -20620,7 +21384,7 @@
           <a:bodyPr wrap="square" lIns="0" tIns="0" rIns="0" bIns="0" rtlCol="0" anchor="ctr"/>
           <a:lstStyle/>
           <a:p>
-            <a:pPr indent="0" marL="0">
+            <a:pPr marL="0" indent="0">
               <a:buNone/>
             </a:pPr>
             <a:r>
@@ -20662,6 +21426,13 @@
             <a:prstDash val="solid"/>
           </a:ln>
         </p:spPr>
+        <p:txBody>
+          <a:bodyPr/>
+          <a:lstStyle/>
+          <a:p>
+            <a:endParaRPr lang="zh-TW" altLang="en-US"/>
+          </a:p>
+        </p:txBody>
       </p:sp>
       <p:sp>
         <p:nvSpPr>
@@ -20684,7 +21455,7 @@
           <a:bodyPr wrap="square" lIns="0" tIns="0" rIns="0" bIns="0" rtlCol="0" anchor="ctr"/>
           <a:lstStyle/>
           <a:p>
-            <a:pPr indent="0" marL="0">
+            <a:pPr marL="0" indent="0">
               <a:buNone/>
             </a:pPr>
             <a:r>
@@ -20723,7 +21494,7 @@
           <a:bodyPr wrap="square" lIns="0" tIns="0" rIns="0" bIns="0" rtlCol="0" anchor="ctr"/>
           <a:lstStyle/>
           <a:p>
-            <a:pPr indent="0" marL="0">
+            <a:pPr marL="0" indent="0">
               <a:buNone/>
             </a:pPr>
             <a:r>
@@ -20762,7 +21533,7 @@
           <a:bodyPr wrap="square" lIns="0" tIns="0" rIns="0" bIns="0" rtlCol="0" anchor="ctr"/>
           <a:lstStyle/>
           <a:p>
-            <a:pPr indent="0" marL="0">
+            <a:pPr marL="0" indent="0">
               <a:buNone/>
             </a:pPr>
             <a:r>
@@ -20804,6 +21575,13 @@
             <a:prstDash val="solid"/>
           </a:ln>
         </p:spPr>
+        <p:txBody>
+          <a:bodyPr/>
+          <a:lstStyle/>
+          <a:p>
+            <a:endParaRPr lang="zh-TW" altLang="en-US"/>
+          </a:p>
+        </p:txBody>
       </p:sp>
       <p:sp>
         <p:nvSpPr>
@@ -20826,7 +21604,7 @@
           <a:bodyPr wrap="square" lIns="0" tIns="0" rIns="0" bIns="0" rtlCol="0" anchor="ctr"/>
           <a:lstStyle/>
           <a:p>
-            <a:pPr indent="0" marL="0">
+            <a:pPr marL="0" indent="0">
               <a:buNone/>
             </a:pPr>
             <a:r>
@@ -20865,7 +21643,7 @@
           <a:bodyPr wrap="square" lIns="0" tIns="0" rIns="0" bIns="0" rtlCol="0" anchor="ctr"/>
           <a:lstStyle/>
           <a:p>
-            <a:pPr indent="0" marL="0">
+            <a:pPr marL="0" indent="0">
               <a:buNone/>
             </a:pPr>
             <a:r>
@@ -20904,7 +21682,7 @@
           <a:bodyPr wrap="square" lIns="0" tIns="0" rIns="0" bIns="0" rtlCol="0" anchor="ctr"/>
           <a:lstStyle/>
           <a:p>
-            <a:pPr indent="0" marL="0">
+            <a:pPr marL="0" indent="0">
               <a:buNone/>
             </a:pPr>
             <a:r>
@@ -20946,6 +21724,13 @@
             <a:prstDash val="solid"/>
           </a:ln>
         </p:spPr>
+        <p:txBody>
+          <a:bodyPr/>
+          <a:lstStyle/>
+          <a:p>
+            <a:endParaRPr lang="zh-TW" altLang="en-US"/>
+          </a:p>
+        </p:txBody>
       </p:sp>
       <p:sp>
         <p:nvSpPr>
@@ -20968,7 +21753,7 @@
           <a:bodyPr wrap="square" lIns="0" tIns="0" rIns="0" bIns="0" rtlCol="0" anchor="ctr"/>
           <a:lstStyle/>
           <a:p>
-            <a:pPr indent="0" marL="0">
+            <a:pPr marL="0" indent="0">
               <a:buNone/>
             </a:pPr>
             <a:r>
@@ -21007,7 +21792,7 @@
           <a:bodyPr wrap="square" lIns="0" tIns="0" rIns="0" bIns="0" rtlCol="0" anchor="ctr"/>
           <a:lstStyle/>
           <a:p>
-            <a:pPr indent="0" marL="0">
+            <a:pPr marL="0" indent="0">
               <a:buNone/>
             </a:pPr>
             <a:r>
@@ -21046,7 +21831,7 @@
           <a:bodyPr wrap="square" lIns="0" tIns="0" rIns="0" bIns="0" rtlCol="0" anchor="ctr"/>
           <a:lstStyle/>
           <a:p>
-            <a:pPr indent="0" marL="0">
+            <a:pPr marL="0" indent="0">
               <a:buNone/>
             </a:pPr>
             <a:r>
@@ -21088,6 +21873,13 @@
             <a:prstDash val="solid"/>
           </a:ln>
         </p:spPr>
+        <p:txBody>
+          <a:bodyPr/>
+          <a:lstStyle/>
+          <a:p>
+            <a:endParaRPr lang="zh-TW" altLang="en-US"/>
+          </a:p>
+        </p:txBody>
       </p:sp>
       <p:sp>
         <p:nvSpPr>
@@ -21110,7 +21902,7 @@
           <a:bodyPr wrap="square" lIns="0" tIns="0" rIns="0" bIns="0" rtlCol="0" anchor="ctr"/>
           <a:lstStyle/>
           <a:p>
-            <a:pPr indent="0" marL="0">
+            <a:pPr marL="0" indent="0">
               <a:buNone/>
             </a:pPr>
             <a:r>
@@ -21149,7 +21941,7 @@
           <a:bodyPr wrap="square" lIns="0" tIns="0" rIns="0" bIns="0" rtlCol="0" anchor="ctr"/>
           <a:lstStyle/>
           <a:p>
-            <a:pPr indent="0" marL="0">
+            <a:pPr marL="0" indent="0">
               <a:buNone/>
             </a:pPr>
             <a:r>
@@ -21188,7 +21980,7 @@
           <a:bodyPr wrap="square" lIns="0" tIns="0" rIns="0" bIns="0" rtlCol="0" anchor="ctr"/>
           <a:lstStyle/>
           <a:p>
-            <a:pPr indent="0" marL="0">
+            <a:pPr marL="0" indent="0">
               <a:buNone/>
             </a:pPr>
             <a:r>
@@ -21230,6 +22022,13 @@
             <a:prstDash val="solid"/>
           </a:ln>
         </p:spPr>
+        <p:txBody>
+          <a:bodyPr/>
+          <a:lstStyle/>
+          <a:p>
+            <a:endParaRPr lang="zh-TW" altLang="en-US"/>
+          </a:p>
+        </p:txBody>
       </p:sp>
       <p:sp>
         <p:nvSpPr>
@@ -21252,7 +22051,7 @@
           <a:bodyPr wrap="square" lIns="0" tIns="0" rIns="0" bIns="0" rtlCol="0" anchor="ctr"/>
           <a:lstStyle/>
           <a:p>
-            <a:pPr indent="0" marL="0">
+            <a:pPr marL="0" indent="0">
               <a:buNone/>
             </a:pPr>
             <a:r>
@@ -21291,7 +22090,7 @@
           <a:bodyPr wrap="square" lIns="0" tIns="0" rIns="0" bIns="0" rtlCol="0" anchor="ctr"/>
           <a:lstStyle/>
           <a:p>
-            <a:pPr indent="0" marL="0">
+            <a:pPr marL="0" indent="0">
               <a:buNone/>
             </a:pPr>
             <a:r>
@@ -21330,7 +22129,7 @@
           <a:bodyPr wrap="square" lIns="0" tIns="0" rIns="0" bIns="0" rtlCol="0" anchor="ctr"/>
           <a:lstStyle/>
           <a:p>
-            <a:pPr indent="0" marL="0">
+            <a:pPr marL="0" indent="0">
               <a:buNone/>
             </a:pPr>
             <a:r>
@@ -21372,6 +22171,13 @@
             <a:prstDash val="solid"/>
           </a:ln>
         </p:spPr>
+        <p:txBody>
+          <a:bodyPr/>
+          <a:lstStyle/>
+          <a:p>
+            <a:endParaRPr lang="zh-TW" altLang="en-US"/>
+          </a:p>
+        </p:txBody>
       </p:sp>
       <p:sp>
         <p:nvSpPr>
@@ -21394,7 +22200,7 @@
           <a:bodyPr wrap="square" lIns="0" tIns="0" rIns="0" bIns="0" rtlCol="0" anchor="ctr"/>
           <a:lstStyle/>
           <a:p>
-            <a:pPr indent="0" marL="0">
+            <a:pPr marL="0" indent="0">
               <a:buNone/>
             </a:pPr>
             <a:r>
@@ -21433,7 +22239,7 @@
           <a:bodyPr wrap="square" lIns="0" tIns="0" rIns="0" bIns="0" rtlCol="0" anchor="ctr"/>
           <a:lstStyle/>
           <a:p>
-            <a:pPr indent="0" marL="0">
+            <a:pPr marL="0" indent="0">
               <a:buNone/>
             </a:pPr>
             <a:r>
@@ -21472,7 +22278,7 @@
           <a:bodyPr wrap="square" lIns="0" tIns="0" rIns="0" bIns="0" rtlCol="0" anchor="ctr"/>
           <a:lstStyle/>
           <a:p>
-            <a:pPr indent="0" marL="0">
+            <a:pPr marL="0" indent="0">
               <a:buNone/>
             </a:pPr>
             <a:r>
@@ -21506,6 +22312,7 @@
         <a:solidFill>
           <a:srgbClr val="FFFFFF"/>
         </a:solidFill>
+        <a:effectLst/>
       </p:bgPr>
     </p:bg>
     <p:spTree>
@@ -21546,6 +22353,13 @@
             <a:prstDash val="solid"/>
           </a:ln>
         </p:spPr>
+        <p:txBody>
+          <a:bodyPr/>
+          <a:lstStyle/>
+          <a:p>
+            <a:endParaRPr lang="zh-TW" altLang="en-US"/>
+          </a:p>
+        </p:txBody>
       </p:sp>
       <p:sp>
         <p:nvSpPr>
@@ -21568,7 +22382,7 @@
           <a:bodyPr wrap="square" lIns="0" tIns="0" rIns="0" bIns="0" rtlCol="0" anchor="t"/>
           <a:lstStyle/>
           <a:p>
-            <a:pPr indent="0" marL="0">
+            <a:pPr marL="0" indent="0">
               <a:buNone/>
             </a:pPr>
             <a:r>
@@ -21607,7 +22421,7 @@
           <a:bodyPr wrap="square" lIns="0" tIns="0" rIns="0" bIns="0" rtlCol="0" anchor="t"/>
           <a:lstStyle/>
           <a:p>
-            <a:pPr indent="0" marL="0">
+            <a:pPr marL="0" indent="0">
               <a:buNone/>
             </a:pPr>
             <a:r>
@@ -21646,7 +22460,7 @@
           <a:bodyPr wrap="square" lIns="0" tIns="0" rIns="0" bIns="0" rtlCol="0" anchor="ctr"/>
           <a:lstStyle/>
           <a:p>
-            <a:pPr indent="0" marL="0">
+            <a:pPr marL="0" indent="0">
               <a:buNone/>
             </a:pPr>
             <a:r>
@@ -21685,7 +22499,7 @@
           <a:bodyPr wrap="square" lIns="0" tIns="0" rIns="0" bIns="0" rtlCol="0" anchor="ctr"/>
           <a:lstStyle/>
           <a:p>
-            <a:pPr algn="r" indent="0" marL="0">
+            <a:pPr marL="0" indent="0" algn="r">
               <a:buNone/>
             </a:pPr>
             <a:r>
@@ -21724,7 +22538,7 @@
           <a:bodyPr wrap="square" lIns="0" tIns="0" rIns="0" bIns="0" rtlCol="0" anchor="ctr"/>
           <a:lstStyle/>
           <a:p>
-            <a:pPr algn="r" indent="0" marL="0">
+            <a:pPr marL="0" indent="0" algn="r">
               <a:buNone/>
             </a:pPr>
             <a:r>
@@ -21766,6 +22580,13 @@
             <a:prstDash val="solid"/>
           </a:ln>
         </p:spPr>
+        <p:txBody>
+          <a:bodyPr/>
+          <a:lstStyle/>
+          <a:p>
+            <a:endParaRPr lang="zh-TW" altLang="en-US"/>
+          </a:p>
+        </p:txBody>
       </p:sp>
       <p:sp>
         <p:nvSpPr>
@@ -21791,6 +22612,13 @@
             <a:prstDash val="solid"/>
           </a:ln>
         </p:spPr>
+        <p:txBody>
+          <a:bodyPr/>
+          <a:lstStyle/>
+          <a:p>
+            <a:endParaRPr lang="zh-TW" altLang="en-US"/>
+          </a:p>
+        </p:txBody>
       </p:sp>
       <p:sp>
         <p:nvSpPr>
@@ -21813,7 +22641,7 @@
           <a:bodyPr wrap="square" lIns="0" tIns="0" rIns="0" bIns="0" rtlCol="0" anchor="ctr"/>
           <a:lstStyle/>
           <a:p>
-            <a:pPr indent="0" marL="0">
+            <a:pPr marL="0" indent="0">
               <a:buNone/>
             </a:pPr>
             <a:r>
@@ -21852,7 +22680,7 @@
           <a:bodyPr wrap="square" lIns="0" tIns="0" rIns="0" bIns="0" rtlCol="0" anchor="ctr"/>
           <a:lstStyle/>
           <a:p>
-            <a:pPr indent="0" marL="0">
+            <a:pPr marL="0" indent="0">
               <a:buNone/>
             </a:pPr>
             <a:r>
@@ -21894,6 +22722,13 @@
             <a:prstDash val="solid"/>
           </a:ln>
         </p:spPr>
+        <p:txBody>
+          <a:bodyPr/>
+          <a:lstStyle/>
+          <a:p>
+            <a:endParaRPr lang="zh-TW" altLang="en-US"/>
+          </a:p>
+        </p:txBody>
       </p:sp>
       <p:sp>
         <p:nvSpPr>
@@ -21916,7 +22751,7 @@
           <a:bodyPr wrap="square" lIns="0" tIns="0" rIns="0" bIns="0" rtlCol="0" anchor="ctr"/>
           <a:lstStyle/>
           <a:p>
-            <a:pPr algn="ctr" indent="0" marL="0">
+            <a:pPr marL="0" indent="0" algn="ctr">
               <a:buNone/>
             </a:pPr>
             <a:r>
@@ -21955,7 +22790,7 @@
           <a:bodyPr wrap="square" lIns="0" tIns="0" rIns="0" bIns="0" rtlCol="0" anchor="ctr"/>
           <a:lstStyle/>
           <a:p>
-            <a:pPr indent="0" marL="0">
+            <a:pPr marL="0" indent="0">
               <a:buNone/>
             </a:pPr>
             <a:r>
@@ -21994,7 +22829,7 @@
           <a:bodyPr wrap="square" lIns="0" tIns="0" rIns="0" bIns="0" rtlCol="0" anchor="ctr"/>
           <a:lstStyle/>
           <a:p>
-            <a:pPr indent="0" marL="0">
+            <a:pPr marL="0" indent="0">
               <a:buNone/>
             </a:pPr>
             <a:r>
@@ -22036,6 +22871,13 @@
             <a:prstDash val="solid"/>
           </a:ln>
         </p:spPr>
+        <p:txBody>
+          <a:bodyPr/>
+          <a:lstStyle/>
+          <a:p>
+            <a:endParaRPr lang="zh-TW" altLang="en-US"/>
+          </a:p>
+        </p:txBody>
       </p:sp>
       <p:sp>
         <p:nvSpPr>
@@ -22058,7 +22900,7 @@
           <a:bodyPr wrap="square" lIns="0" tIns="0" rIns="0" bIns="0" rtlCol="0" anchor="ctr"/>
           <a:lstStyle/>
           <a:p>
-            <a:pPr algn="ctr" indent="0" marL="0">
+            <a:pPr marL="0" indent="0" algn="ctr">
               <a:buNone/>
             </a:pPr>
             <a:r>
@@ -22097,7 +22939,7 @@
           <a:bodyPr wrap="square" lIns="0" tIns="0" rIns="0" bIns="0" rtlCol="0" anchor="ctr"/>
           <a:lstStyle/>
           <a:p>
-            <a:pPr indent="0" marL="0">
+            <a:pPr marL="0" indent="0">
               <a:buNone/>
             </a:pPr>
             <a:r>
@@ -22136,7 +22978,7 @@
           <a:bodyPr wrap="square" lIns="0" tIns="0" rIns="0" bIns="0" rtlCol="0" anchor="ctr"/>
           <a:lstStyle/>
           <a:p>
-            <a:pPr indent="0" marL="0">
+            <a:pPr marL="0" indent="0">
               <a:buNone/>
             </a:pPr>
             <a:r>
@@ -22178,6 +23020,13 @@
             <a:prstDash val="solid"/>
           </a:ln>
         </p:spPr>
+        <p:txBody>
+          <a:bodyPr/>
+          <a:lstStyle/>
+          <a:p>
+            <a:endParaRPr lang="zh-TW" altLang="en-US"/>
+          </a:p>
+        </p:txBody>
       </p:sp>
       <p:sp>
         <p:nvSpPr>
@@ -22200,7 +23049,7 @@
           <a:bodyPr wrap="square" lIns="0" tIns="0" rIns="0" bIns="0" rtlCol="0" anchor="ctr"/>
           <a:lstStyle/>
           <a:p>
-            <a:pPr algn="ctr" indent="0" marL="0">
+            <a:pPr marL="0" indent="0" algn="ctr">
               <a:buNone/>
             </a:pPr>
             <a:r>
@@ -22239,7 +23088,7 @@
           <a:bodyPr wrap="square" lIns="0" tIns="0" rIns="0" bIns="0" rtlCol="0" anchor="ctr"/>
           <a:lstStyle/>
           <a:p>
-            <a:pPr indent="0" marL="0">
+            <a:pPr marL="0" indent="0">
               <a:buNone/>
             </a:pPr>
             <a:r>
@@ -22278,7 +23127,7 @@
           <a:bodyPr wrap="square" lIns="0" tIns="0" rIns="0" bIns="0" rtlCol="0" anchor="ctr"/>
           <a:lstStyle/>
           <a:p>
-            <a:pPr indent="0" marL="0">
+            <a:pPr marL="0" indent="0">
               <a:buNone/>
             </a:pPr>
             <a:r>
@@ -22320,6 +23169,13 @@
             <a:prstDash val="solid"/>
           </a:ln>
         </p:spPr>
+        <p:txBody>
+          <a:bodyPr/>
+          <a:lstStyle/>
+          <a:p>
+            <a:endParaRPr lang="zh-TW" altLang="en-US"/>
+          </a:p>
+        </p:txBody>
       </p:sp>
       <p:sp>
         <p:nvSpPr>
@@ -22342,7 +23198,7 @@
           <a:bodyPr wrap="square" lIns="0" tIns="0" rIns="0" bIns="0" rtlCol="0" anchor="ctr"/>
           <a:lstStyle/>
           <a:p>
-            <a:pPr algn="ctr" indent="0" marL="0">
+            <a:pPr marL="0" indent="0" algn="ctr">
               <a:buNone/>
             </a:pPr>
             <a:r>
@@ -22381,7 +23237,7 @@
           <a:bodyPr wrap="square" lIns="0" tIns="0" rIns="0" bIns="0" rtlCol="0" anchor="ctr"/>
           <a:lstStyle/>
           <a:p>
-            <a:pPr indent="0" marL="0">
+            <a:pPr marL="0" indent="0">
               <a:buNone/>
             </a:pPr>
             <a:r>
@@ -22420,7 +23276,7 @@
           <a:bodyPr wrap="square" lIns="0" tIns="0" rIns="0" bIns="0" rtlCol="0" anchor="ctr"/>
           <a:lstStyle/>
           <a:p>
-            <a:pPr indent="0" marL="0">
+            <a:pPr marL="0" indent="0">
               <a:buNone/>
             </a:pPr>
             <a:r>
@@ -22462,6 +23318,13 @@
             <a:prstDash val="solid"/>
           </a:ln>
         </p:spPr>
+        <p:txBody>
+          <a:bodyPr/>
+          <a:lstStyle/>
+          <a:p>
+            <a:endParaRPr lang="zh-TW" altLang="en-US"/>
+          </a:p>
+        </p:txBody>
       </p:sp>
       <p:sp>
         <p:nvSpPr>
@@ -22487,6 +23350,13 @@
             <a:prstDash val="solid"/>
           </a:ln>
         </p:spPr>
+        <p:txBody>
+          <a:bodyPr/>
+          <a:lstStyle/>
+          <a:p>
+            <a:endParaRPr lang="zh-TW" altLang="en-US"/>
+          </a:p>
+        </p:txBody>
       </p:sp>
       <p:sp>
         <p:nvSpPr>
@@ -22509,7 +23379,7 @@
           <a:bodyPr wrap="square" lIns="0" tIns="0" rIns="0" bIns="0" rtlCol="0" anchor="ctr"/>
           <a:lstStyle/>
           <a:p>
-            <a:pPr indent="0" marL="0">
+            <a:pPr marL="0" indent="0">
               <a:buNone/>
             </a:pPr>
             <a:r>
@@ -22548,7 +23418,7 @@
           <a:bodyPr wrap="square" lIns="0" tIns="0" rIns="0" bIns="0" rtlCol="0" anchor="ctr"/>
           <a:lstStyle/>
           <a:p>
-            <a:pPr indent="0" marL="0">
+            <a:pPr marL="0" indent="0">
               <a:buNone/>
             </a:pPr>
             <a:r>
@@ -22590,6 +23460,13 @@
             <a:prstDash val="solid"/>
           </a:ln>
         </p:spPr>
+        <p:txBody>
+          <a:bodyPr/>
+          <a:lstStyle/>
+          <a:p>
+            <a:endParaRPr lang="zh-TW" altLang="en-US"/>
+          </a:p>
+        </p:txBody>
       </p:sp>
       <p:sp>
         <p:nvSpPr>
@@ -22612,7 +23489,7 @@
           <a:bodyPr wrap="square" lIns="0" tIns="0" rIns="0" bIns="0" rtlCol="0" anchor="ctr"/>
           <a:lstStyle/>
           <a:p>
-            <a:pPr algn="ctr" indent="0" marL="0">
+            <a:pPr marL="0" indent="0" algn="ctr">
               <a:buNone/>
             </a:pPr>
             <a:r>
@@ -22651,7 +23528,7 @@
           <a:bodyPr wrap="square" lIns="0" tIns="0" rIns="0" bIns="0" rtlCol="0" anchor="ctr"/>
           <a:lstStyle/>
           <a:p>
-            <a:pPr indent="0" marL="0">
+            <a:pPr marL="0" indent="0">
               <a:buNone/>
             </a:pPr>
             <a:r>
@@ -22690,7 +23567,7 @@
           <a:bodyPr wrap="square" lIns="0" tIns="0" rIns="0" bIns="0" rtlCol="0" anchor="ctr"/>
           <a:lstStyle/>
           <a:p>
-            <a:pPr indent="0" marL="0">
+            <a:pPr marL="0" indent="0">
               <a:buNone/>
             </a:pPr>
             <a:r>
@@ -22732,6 +23609,13 @@
             <a:prstDash val="solid"/>
           </a:ln>
         </p:spPr>
+        <p:txBody>
+          <a:bodyPr/>
+          <a:lstStyle/>
+          <a:p>
+            <a:endParaRPr lang="zh-TW" altLang="en-US"/>
+          </a:p>
+        </p:txBody>
       </p:sp>
       <p:sp>
         <p:nvSpPr>
@@ -22754,7 +23638,7 @@
           <a:bodyPr wrap="square" lIns="0" tIns="0" rIns="0" bIns="0" rtlCol="0" anchor="ctr"/>
           <a:lstStyle/>
           <a:p>
-            <a:pPr algn="ctr" indent="0" marL="0">
+            <a:pPr marL="0" indent="0" algn="ctr">
               <a:buNone/>
             </a:pPr>
             <a:r>
@@ -22793,7 +23677,7 @@
           <a:bodyPr wrap="square" lIns="0" tIns="0" rIns="0" bIns="0" rtlCol="0" anchor="ctr"/>
           <a:lstStyle/>
           <a:p>
-            <a:pPr indent="0" marL="0">
+            <a:pPr marL="0" indent="0">
               <a:buNone/>
             </a:pPr>
             <a:r>
@@ -22832,7 +23716,7 @@
           <a:bodyPr wrap="square" lIns="0" tIns="0" rIns="0" bIns="0" rtlCol="0" anchor="ctr"/>
           <a:lstStyle/>
           <a:p>
-            <a:pPr indent="0" marL="0">
+            <a:pPr marL="0" indent="0">
               <a:buNone/>
             </a:pPr>
             <a:r>
@@ -22874,6 +23758,13 @@
             <a:prstDash val="solid"/>
           </a:ln>
         </p:spPr>
+        <p:txBody>
+          <a:bodyPr/>
+          <a:lstStyle/>
+          <a:p>
+            <a:endParaRPr lang="zh-TW" altLang="en-US"/>
+          </a:p>
+        </p:txBody>
       </p:sp>
       <p:sp>
         <p:nvSpPr>
@@ -22896,7 +23787,7 @@
           <a:bodyPr wrap="square" lIns="0" tIns="0" rIns="0" bIns="0" rtlCol="0" anchor="ctr"/>
           <a:lstStyle/>
           <a:p>
-            <a:pPr algn="ctr" indent="0" marL="0">
+            <a:pPr marL="0" indent="0" algn="ctr">
               <a:buNone/>
             </a:pPr>
             <a:r>
@@ -22935,7 +23826,7 @@
           <a:bodyPr wrap="square" lIns="0" tIns="0" rIns="0" bIns="0" rtlCol="0" anchor="ctr"/>
           <a:lstStyle/>
           <a:p>
-            <a:pPr indent="0" marL="0">
+            <a:pPr marL="0" indent="0">
               <a:buNone/>
             </a:pPr>
             <a:r>
@@ -22974,7 +23865,7 @@
           <a:bodyPr wrap="square" lIns="0" tIns="0" rIns="0" bIns="0" rtlCol="0" anchor="ctr"/>
           <a:lstStyle/>
           <a:p>
-            <a:pPr indent="0" marL="0">
+            <a:pPr marL="0" indent="0">
               <a:buNone/>
             </a:pPr>
             <a:r>
@@ -23016,6 +23907,13 @@
             <a:prstDash val="solid"/>
           </a:ln>
         </p:spPr>
+        <p:txBody>
+          <a:bodyPr/>
+          <a:lstStyle/>
+          <a:p>
+            <a:endParaRPr lang="zh-TW" altLang="en-US"/>
+          </a:p>
+        </p:txBody>
       </p:sp>
       <p:sp>
         <p:nvSpPr>
@@ -23038,7 +23936,7 @@
           <a:bodyPr wrap="square" lIns="0" tIns="0" rIns="0" bIns="0" rtlCol="0" anchor="ctr"/>
           <a:lstStyle/>
           <a:p>
-            <a:pPr algn="ctr" indent="0" marL="0">
+            <a:pPr marL="0" indent="0" algn="ctr">
               <a:buNone/>
             </a:pPr>
             <a:r>
@@ -23077,7 +23975,7 @@
           <a:bodyPr wrap="square" lIns="0" tIns="0" rIns="0" bIns="0" rtlCol="0" anchor="ctr"/>
           <a:lstStyle/>
           <a:p>
-            <a:pPr indent="0" marL="0">
+            <a:pPr marL="0" indent="0">
               <a:buNone/>
             </a:pPr>
             <a:r>
@@ -23116,7 +24014,7 @@
           <a:bodyPr wrap="square" lIns="0" tIns="0" rIns="0" bIns="0" rtlCol="0" anchor="ctr"/>
           <a:lstStyle/>
           <a:p>
-            <a:pPr indent="0" marL="0">
+            <a:pPr marL="0" indent="0">
               <a:buNone/>
             </a:pPr>
             <a:r>
@@ -23150,6 +24048,7 @@
         <a:solidFill>
           <a:srgbClr val="FFFFFF"/>
         </a:solidFill>
+        <a:effectLst/>
       </p:bgPr>
     </p:bg>
     <p:spTree>
@@ -23190,6 +24089,13 @@
             <a:prstDash val="solid"/>
           </a:ln>
         </p:spPr>
+        <p:txBody>
+          <a:bodyPr/>
+          <a:lstStyle/>
+          <a:p>
+            <a:endParaRPr lang="zh-TW" altLang="en-US"/>
+          </a:p>
+        </p:txBody>
       </p:sp>
       <p:sp>
         <p:nvSpPr>
@@ -23212,7 +24118,7 @@
           <a:bodyPr wrap="square" lIns="0" tIns="0" rIns="0" bIns="0" rtlCol="0" anchor="t"/>
           <a:lstStyle/>
           <a:p>
-            <a:pPr indent="0" marL="0">
+            <a:pPr marL="0" indent="0">
               <a:buNone/>
             </a:pPr>
             <a:r>
@@ -23251,7 +24157,7 @@
           <a:bodyPr wrap="square" lIns="0" tIns="0" rIns="0" bIns="0" rtlCol="0" anchor="t"/>
           <a:lstStyle/>
           <a:p>
-            <a:pPr indent="0" marL="0">
+            <a:pPr marL="0" indent="0">
               <a:buNone/>
             </a:pPr>
             <a:r>
@@ -23290,7 +24196,7 @@
           <a:bodyPr wrap="square" lIns="0" tIns="0" rIns="0" bIns="0" rtlCol="0" anchor="ctr"/>
           <a:lstStyle/>
           <a:p>
-            <a:pPr indent="0" marL="0">
+            <a:pPr marL="0" indent="0">
               <a:buNone/>
             </a:pPr>
             <a:r>
@@ -23329,7 +24235,7 @@
           <a:bodyPr wrap="square" lIns="0" tIns="0" rIns="0" bIns="0" rtlCol="0" anchor="ctr"/>
           <a:lstStyle/>
           <a:p>
-            <a:pPr algn="r" indent="0" marL="0">
+            <a:pPr marL="0" indent="0" algn="r">
               <a:buNone/>
             </a:pPr>
             <a:r>
@@ -23368,7 +24274,7 @@
           <a:bodyPr wrap="square" lIns="0" tIns="0" rIns="0" bIns="0" rtlCol="0" anchor="ctr"/>
           <a:lstStyle/>
           <a:p>
-            <a:pPr algn="r" indent="0" marL="0">
+            <a:pPr marL="0" indent="0" algn="r">
               <a:buNone/>
             </a:pPr>
             <a:r>
@@ -23410,6 +24316,13 @@
             <a:prstDash val="solid"/>
           </a:ln>
         </p:spPr>
+        <p:txBody>
+          <a:bodyPr/>
+          <a:lstStyle/>
+          <a:p>
+            <a:endParaRPr lang="zh-TW" altLang="en-US"/>
+          </a:p>
+        </p:txBody>
       </p:sp>
       <p:sp>
         <p:nvSpPr>
@@ -23435,6 +24348,13 @@
             <a:prstDash val="solid"/>
           </a:ln>
         </p:spPr>
+        <p:txBody>
+          <a:bodyPr/>
+          <a:lstStyle/>
+          <a:p>
+            <a:endParaRPr lang="zh-TW" altLang="en-US"/>
+          </a:p>
+        </p:txBody>
       </p:sp>
       <p:sp>
         <p:nvSpPr>
@@ -23457,7 +24377,7 @@
           <a:bodyPr wrap="square" lIns="0" tIns="0" rIns="0" bIns="0" rtlCol="0" anchor="ctr"/>
           <a:lstStyle/>
           <a:p>
-            <a:pPr indent="0" marL="0">
+            <a:pPr marL="0" indent="0">
               <a:buNone/>
             </a:pPr>
             <a:r>
@@ -23496,7 +24416,7 @@
           <a:bodyPr wrap="square" lIns="0" tIns="0" rIns="0" bIns="0" rtlCol="0" anchor="ctr"/>
           <a:lstStyle/>
           <a:p>
-            <a:pPr indent="0" marL="0">
+            <a:pPr marL="0" indent="0">
               <a:buNone/>
             </a:pPr>
             <a:r>
@@ -23535,7 +24455,7 @@
           <a:bodyPr wrap="square" lIns="0" tIns="0" rIns="0" bIns="0" rtlCol="0" anchor="ctr"/>
           <a:lstStyle/>
           <a:p>
-            <a:pPr indent="0" marL="0">
+            <a:pPr marL="0" indent="0">
               <a:buNone/>
             </a:pPr>
             <a:r>
@@ -23577,6 +24497,13 @@
             <a:prstDash val="solid"/>
           </a:ln>
         </p:spPr>
+        <p:txBody>
+          <a:bodyPr/>
+          <a:lstStyle/>
+          <a:p>
+            <a:endParaRPr lang="zh-TW" altLang="en-US"/>
+          </a:p>
+        </p:txBody>
       </p:sp>
       <p:sp>
         <p:nvSpPr>
@@ -23602,6 +24529,13 @@
             <a:prstDash val="solid"/>
           </a:ln>
         </p:spPr>
+        <p:txBody>
+          <a:bodyPr/>
+          <a:lstStyle/>
+          <a:p>
+            <a:endParaRPr lang="zh-TW" altLang="en-US"/>
+          </a:p>
+        </p:txBody>
       </p:sp>
       <p:sp>
         <p:nvSpPr>
@@ -23624,7 +24558,7 @@
           <a:bodyPr wrap="square" lIns="0" tIns="0" rIns="0" bIns="0" rtlCol="0" anchor="ctr"/>
           <a:lstStyle/>
           <a:p>
-            <a:pPr indent="0" marL="0">
+            <a:pPr marL="0" indent="0">
               <a:buNone/>
             </a:pPr>
             <a:r>
@@ -23665,7 +24599,7 @@
           <a:bodyPr wrap="square" lIns="0" tIns="0" rIns="0" bIns="0" rtlCol="0" anchor="ctr"/>
           <a:lstStyle/>
           <a:p>
-            <a:pPr algn="ctr" indent="0" marL="0">
+            <a:pPr marL="0" indent="0" algn="ctr">
               <a:buNone/>
             </a:pPr>
             <a:r>
@@ -23704,7 +24638,7 @@
           <a:bodyPr wrap="square" lIns="0" tIns="0" rIns="0" bIns="0" rtlCol="0" anchor="ctr"/>
           <a:lstStyle/>
           <a:p>
-            <a:pPr indent="0" marL="0">
+            <a:pPr marL="0" indent="0">
               <a:buNone/>
             </a:pPr>
             <a:r>
@@ -23743,7 +24677,7 @@
           <a:bodyPr wrap="square" lIns="0" tIns="0" rIns="0" bIns="0" rtlCol="0" anchor="ctr"/>
           <a:lstStyle/>
           <a:p>
-            <a:pPr indent="0" marL="0">
+            <a:pPr marL="0" indent="0">
               <a:buNone/>
             </a:pPr>
             <a:r>
@@ -23785,6 +24719,13 @@
             <a:prstDash val="solid"/>
           </a:ln>
         </p:spPr>
+        <p:txBody>
+          <a:bodyPr/>
+          <a:lstStyle/>
+          <a:p>
+            <a:endParaRPr lang="zh-TW" altLang="en-US"/>
+          </a:p>
+        </p:txBody>
       </p:sp>
       <p:sp>
         <p:nvSpPr>
@@ -23810,6 +24751,13 @@
             <a:prstDash val="solid"/>
           </a:ln>
         </p:spPr>
+        <p:txBody>
+          <a:bodyPr/>
+          <a:lstStyle/>
+          <a:p>
+            <a:endParaRPr lang="zh-TW" altLang="en-US"/>
+          </a:p>
+        </p:txBody>
       </p:sp>
       <p:sp>
         <p:nvSpPr>
@@ -23832,7 +24780,7 @@
           <a:bodyPr wrap="square" lIns="0" tIns="0" rIns="0" bIns="0" rtlCol="0" anchor="ctr"/>
           <a:lstStyle/>
           <a:p>
-            <a:pPr indent="0" marL="0">
+            <a:pPr marL="0" indent="0">
               <a:buNone/>
             </a:pPr>
             <a:r>
@@ -23871,7 +24819,7 @@
           <a:bodyPr wrap="square" lIns="0" tIns="0" rIns="0" bIns="0" rtlCol="0" anchor="ctr"/>
           <a:lstStyle/>
           <a:p>
-            <a:pPr indent="0" marL="0">
+            <a:pPr marL="0" indent="0">
               <a:buNone/>
             </a:pPr>
             <a:r>
@@ -23910,7 +24858,7 @@
           <a:bodyPr wrap="square" lIns="0" tIns="0" rIns="0" bIns="0" rtlCol="0" anchor="ctr"/>
           <a:lstStyle/>
           <a:p>
-            <a:pPr indent="0" marL="0">
+            <a:pPr marL="0" indent="0">
               <a:buNone/>
             </a:pPr>
             <a:r>
@@ -23952,6 +24900,13 @@
             <a:prstDash val="solid"/>
           </a:ln>
         </p:spPr>
+        <p:txBody>
+          <a:bodyPr/>
+          <a:lstStyle/>
+          <a:p>
+            <a:endParaRPr lang="zh-TW" altLang="en-US"/>
+          </a:p>
+        </p:txBody>
       </p:sp>
       <p:sp>
         <p:nvSpPr>
@@ -23977,6 +24932,13 @@
             <a:prstDash val="solid"/>
           </a:ln>
         </p:spPr>
+        <p:txBody>
+          <a:bodyPr/>
+          <a:lstStyle/>
+          <a:p>
+            <a:endParaRPr lang="zh-TW" altLang="en-US"/>
+          </a:p>
+        </p:txBody>
       </p:sp>
       <p:sp>
         <p:nvSpPr>
@@ -23999,7 +24961,7 @@
           <a:bodyPr wrap="square" lIns="0" tIns="0" rIns="0" bIns="0" rtlCol="0" anchor="ctr"/>
           <a:lstStyle/>
           <a:p>
-            <a:pPr indent="0" marL="0">
+            <a:pPr marL="0" indent="0">
               <a:buNone/>
             </a:pPr>
             <a:r>
@@ -24040,7 +25002,7 @@
           <a:bodyPr wrap="square" lIns="0" tIns="0" rIns="0" bIns="0" rtlCol="0" anchor="ctr"/>
           <a:lstStyle/>
           <a:p>
-            <a:pPr algn="ctr" indent="0" marL="0">
+            <a:pPr marL="0" indent="0" algn="ctr">
               <a:buNone/>
             </a:pPr>
             <a:r>
@@ -24079,7 +25041,7 @@
           <a:bodyPr wrap="square" lIns="0" tIns="0" rIns="0" bIns="0" rtlCol="0" anchor="ctr"/>
           <a:lstStyle/>
           <a:p>
-            <a:pPr indent="0" marL="0">
+            <a:pPr marL="0" indent="0">
               <a:buNone/>
             </a:pPr>
             <a:r>
@@ -24118,7 +25080,7 @@
           <a:bodyPr wrap="square" lIns="0" tIns="0" rIns="0" bIns="0" rtlCol="0" anchor="ctr"/>
           <a:lstStyle/>
           <a:p>
-            <a:pPr indent="0" marL="0">
+            <a:pPr marL="0" indent="0">
               <a:buNone/>
             </a:pPr>
             <a:r>
@@ -24160,6 +25122,13 @@
             <a:prstDash val="solid"/>
           </a:ln>
         </p:spPr>
+        <p:txBody>
+          <a:bodyPr/>
+          <a:lstStyle/>
+          <a:p>
+            <a:endParaRPr lang="zh-TW" altLang="en-US"/>
+          </a:p>
+        </p:txBody>
       </p:sp>
       <p:sp>
         <p:nvSpPr>
@@ -24185,6 +25154,13 @@
             <a:prstDash val="solid"/>
           </a:ln>
         </p:spPr>
+        <p:txBody>
+          <a:bodyPr/>
+          <a:lstStyle/>
+          <a:p>
+            <a:endParaRPr lang="zh-TW" altLang="en-US"/>
+          </a:p>
+        </p:txBody>
       </p:sp>
       <p:sp>
         <p:nvSpPr>
@@ -24207,7 +25183,7 @@
           <a:bodyPr wrap="square" lIns="0" tIns="0" rIns="0" bIns="0" rtlCol="0" anchor="ctr"/>
           <a:lstStyle/>
           <a:p>
-            <a:pPr indent="0" marL="0">
+            <a:pPr marL="0" indent="0">
               <a:buNone/>
             </a:pPr>
             <a:r>
@@ -24246,7 +25222,7 @@
           <a:bodyPr wrap="square" lIns="0" tIns="0" rIns="0" bIns="0" rtlCol="0" anchor="ctr"/>
           <a:lstStyle/>
           <a:p>
-            <a:pPr indent="0" marL="0">
+            <a:pPr marL="0" indent="0">
               <a:buNone/>
             </a:pPr>
             <a:r>
@@ -24285,7 +25261,7 @@
           <a:bodyPr wrap="square" lIns="0" tIns="0" rIns="0" bIns="0" rtlCol="0" anchor="ctr"/>
           <a:lstStyle/>
           <a:p>
-            <a:pPr indent="0" marL="0">
+            <a:pPr marL="0" indent="0">
               <a:buNone/>
             </a:pPr>
             <a:r>
@@ -24327,6 +25303,13 @@
             <a:prstDash val="solid"/>
           </a:ln>
         </p:spPr>
+        <p:txBody>
+          <a:bodyPr/>
+          <a:lstStyle/>
+          <a:p>
+            <a:endParaRPr lang="zh-TW" altLang="en-US"/>
+          </a:p>
+        </p:txBody>
       </p:sp>
       <p:sp>
         <p:nvSpPr>
@@ -24349,7 +25332,7 @@
           <a:bodyPr wrap="square" lIns="0" tIns="0" rIns="0" bIns="0" rtlCol="0" anchor="ctr"/>
           <a:lstStyle/>
           <a:p>
-            <a:pPr indent="0" marL="0">
+            <a:pPr marL="0" indent="0">
               <a:buNone/>
             </a:pPr>
             <a:r>
@@ -24388,7 +25371,7 @@
           <a:bodyPr wrap="square" lIns="0" tIns="0" rIns="0" bIns="0" rtlCol="0" anchor="ctr"/>
           <a:lstStyle/>
           <a:p>
-            <a:pPr indent="0" marL="0">
+            <a:pPr marL="0" indent="0">
               <a:buNone/>
             </a:pPr>
             <a:r>
@@ -24422,6 +25405,7 @@
         <a:solidFill>
           <a:srgbClr val="FFFFFF"/>
         </a:solidFill>
+        <a:effectLst/>
       </p:bgPr>
     </p:bg>
     <p:spTree>
@@ -24462,6 +25446,13 @@
             <a:prstDash val="solid"/>
           </a:ln>
         </p:spPr>
+        <p:txBody>
+          <a:bodyPr/>
+          <a:lstStyle/>
+          <a:p>
+            <a:endParaRPr lang="zh-TW" altLang="en-US"/>
+          </a:p>
+        </p:txBody>
       </p:sp>
       <p:sp>
         <p:nvSpPr>
@@ -24484,7 +25475,7 @@
           <a:bodyPr wrap="square" lIns="0" tIns="0" rIns="0" bIns="0" rtlCol="0" anchor="t"/>
           <a:lstStyle/>
           <a:p>
-            <a:pPr indent="0" marL="0">
+            <a:pPr marL="0" indent="0">
               <a:buNone/>
             </a:pPr>
             <a:r>
@@ -24523,7 +25514,7 @@
           <a:bodyPr wrap="square" lIns="0" tIns="0" rIns="0" bIns="0" rtlCol="0" anchor="t"/>
           <a:lstStyle/>
           <a:p>
-            <a:pPr indent="0" marL="0">
+            <a:pPr marL="0" indent="0">
               <a:buNone/>
             </a:pPr>
             <a:r>
@@ -24562,7 +25553,7 @@
           <a:bodyPr wrap="square" lIns="0" tIns="0" rIns="0" bIns="0" rtlCol="0" anchor="ctr"/>
           <a:lstStyle/>
           <a:p>
-            <a:pPr indent="0" marL="0">
+            <a:pPr marL="0" indent="0">
               <a:buNone/>
             </a:pPr>
             <a:r>
@@ -24601,7 +25592,7 @@
           <a:bodyPr wrap="square" lIns="0" tIns="0" rIns="0" bIns="0" rtlCol="0" anchor="ctr"/>
           <a:lstStyle/>
           <a:p>
-            <a:pPr algn="r" indent="0" marL="0">
+            <a:pPr marL="0" indent="0" algn="r">
               <a:buNone/>
             </a:pPr>
             <a:r>
@@ -24640,7 +25631,7 @@
           <a:bodyPr wrap="square" lIns="0" tIns="0" rIns="0" bIns="0" rtlCol="0" anchor="ctr"/>
           <a:lstStyle/>
           <a:p>
-            <a:pPr algn="r" indent="0" marL="0">
+            <a:pPr marL="0" indent="0" algn="r">
               <a:buNone/>
             </a:pPr>
             <a:r>
@@ -24679,7 +25670,7 @@
           <a:bodyPr wrap="square" lIns="0" tIns="0" rIns="0" bIns="0" rtlCol="0" anchor="ctr"/>
           <a:lstStyle/>
           <a:p>
-            <a:pPr algn="ctr" indent="0" marL="0">
+            <a:pPr marL="0" indent="0" algn="ctr">
               <a:buNone/>
             </a:pPr>
             <a:r>
@@ -24721,6 +25712,13 @@
             <a:prstDash val="solid"/>
           </a:ln>
         </p:spPr>
+        <p:txBody>
+          <a:bodyPr/>
+          <a:lstStyle/>
+          <a:p>
+            <a:endParaRPr lang="zh-TW" altLang="en-US"/>
+          </a:p>
+        </p:txBody>
       </p:sp>
       <p:sp>
         <p:nvSpPr>
@@ -24746,6 +25744,13 @@
             <a:prstDash val="solid"/>
           </a:ln>
         </p:spPr>
+        <p:txBody>
+          <a:bodyPr/>
+          <a:lstStyle/>
+          <a:p>
+            <a:endParaRPr lang="zh-TW" altLang="en-US"/>
+          </a:p>
+        </p:txBody>
       </p:sp>
       <p:sp>
         <p:nvSpPr>
@@ -24768,7 +25773,7 @@
           <a:bodyPr wrap="square" lIns="0" tIns="0" rIns="0" bIns="0" rtlCol="0" anchor="ctr"/>
           <a:lstStyle/>
           <a:p>
-            <a:pPr indent="0" marL="0">
+            <a:pPr marL="0" indent="0">
               <a:buNone/>
             </a:pPr>
             <a:r>
@@ -24807,7 +25812,7 @@
           <a:bodyPr wrap="square" lIns="0" tIns="0" rIns="0" bIns="0" rtlCol="0" anchor="ctr"/>
           <a:lstStyle/>
           <a:p>
-            <a:pPr indent="0" marL="0">
+            <a:pPr marL="0" indent="0">
               <a:buNone/>
             </a:pPr>
             <a:r>
@@ -24846,7 +25851,7 @@
           <a:bodyPr wrap="square" lIns="0" tIns="0" rIns="0" bIns="0" rtlCol="0" anchor="ctr"/>
           <a:lstStyle/>
           <a:p>
-            <a:pPr indent="0" marL="0">
+            <a:pPr marL="0" indent="0">
               <a:buNone/>
             </a:pPr>
             <a:r>
@@ -24888,6 +25893,13 @@
             <a:prstDash val="solid"/>
           </a:ln>
         </p:spPr>
+        <p:txBody>
+          <a:bodyPr/>
+          <a:lstStyle/>
+          <a:p>
+            <a:endParaRPr lang="zh-TW" altLang="en-US"/>
+          </a:p>
+        </p:txBody>
       </p:sp>
       <p:sp>
         <p:nvSpPr>
@@ -24910,7 +25922,7 @@
           <a:bodyPr wrap="square" lIns="0" tIns="0" rIns="0" bIns="0" rtlCol="0" anchor="ctr"/>
           <a:lstStyle/>
           <a:p>
-            <a:pPr indent="0" marL="0">
+            <a:pPr marL="0" indent="0">
               <a:buNone/>
             </a:pPr>
             <a:r>
@@ -24949,7 +25961,7 @@
           <a:bodyPr wrap="square" lIns="0" tIns="0" rIns="0" bIns="0" rtlCol="0" anchor="ctr"/>
           <a:lstStyle/>
           <a:p>
-            <a:pPr indent="0" marL="0">
+            <a:pPr marL="0" indent="0">
               <a:buNone/>
             </a:pPr>
             <a:r>
@@ -24988,7 +26000,7 @@
           <a:bodyPr wrap="square" lIns="0" tIns="0" rIns="0" bIns="0" rtlCol="0" anchor="ctr"/>
           <a:lstStyle/>
           <a:p>
-            <a:pPr indent="0" marL="0">
+            <a:pPr marL="0" indent="0">
               <a:buNone/>
             </a:pPr>
             <a:r>
@@ -25027,7 +26039,7 @@
           <a:bodyPr wrap="square" lIns="0" tIns="0" rIns="0" bIns="0" rtlCol="0" anchor="ctr"/>
           <a:lstStyle/>
           <a:p>
-            <a:pPr indent="0" marL="0">
+            <a:pPr marL="0" indent="0">
               <a:buNone/>
             </a:pPr>
             <a:r>
@@ -25069,6 +26081,13 @@
             <a:prstDash val="solid"/>
           </a:ln>
         </p:spPr>
+        <p:txBody>
+          <a:bodyPr/>
+          <a:lstStyle/>
+          <a:p>
+            <a:endParaRPr lang="zh-TW" altLang="en-US"/>
+          </a:p>
+        </p:txBody>
       </p:sp>
       <p:sp>
         <p:nvSpPr>
@@ -25091,7 +26110,7 @@
           <a:bodyPr wrap="square" lIns="0" tIns="0" rIns="0" bIns="0" rtlCol="0" anchor="ctr"/>
           <a:lstStyle/>
           <a:p>
-            <a:pPr indent="0" marL="0">
+            <a:pPr marL="0" indent="0">
               <a:buNone/>
             </a:pPr>
             <a:r>
@@ -25130,7 +26149,7 @@
           <a:bodyPr wrap="square" lIns="0" tIns="0" rIns="0" bIns="0" rtlCol="0" anchor="ctr"/>
           <a:lstStyle/>
           <a:p>
-            <a:pPr indent="0" marL="0">
+            <a:pPr marL="0" indent="0">
               <a:buNone/>
             </a:pPr>
             <a:r>
@@ -25169,7 +26188,7 @@
           <a:bodyPr wrap="square" lIns="0" tIns="0" rIns="0" bIns="0" rtlCol="0" anchor="ctr"/>
           <a:lstStyle/>
           <a:p>
-            <a:pPr indent="0" marL="0">
+            <a:pPr marL="0" indent="0">
               <a:buNone/>
             </a:pPr>
             <a:r>
@@ -25208,7 +26227,7 @@
           <a:bodyPr wrap="square" lIns="0" tIns="0" rIns="0" bIns="0" rtlCol="0" anchor="ctr"/>
           <a:lstStyle/>
           <a:p>
-            <a:pPr indent="0" marL="0">
+            <a:pPr marL="0" indent="0">
               <a:buNone/>
             </a:pPr>
             <a:r>
@@ -25247,7 +26266,7 @@
           <a:bodyPr wrap="square" lIns="0" tIns="0" rIns="0" bIns="0" rtlCol="0" anchor="ctr"/>
           <a:lstStyle/>
           <a:p>
-            <a:pPr indent="0" marL="0">
+            <a:pPr marL="0" indent="0">
               <a:buNone/>
             </a:pPr>
             <a:r>
@@ -25286,7 +26305,7 @@
           <a:bodyPr wrap="square" lIns="0" tIns="0" rIns="0" bIns="0" rtlCol="0" anchor="ctr"/>
           <a:lstStyle/>
           <a:p>
-            <a:pPr indent="0" marL="0">
+            <a:pPr marL="0" indent="0">
               <a:buNone/>
             </a:pPr>
             <a:r>
@@ -25328,6 +26347,13 @@
             <a:prstDash val="solid"/>
           </a:ln>
         </p:spPr>
+        <p:txBody>
+          <a:bodyPr/>
+          <a:lstStyle/>
+          <a:p>
+            <a:endParaRPr lang="zh-TW" altLang="en-US"/>
+          </a:p>
+        </p:txBody>
       </p:sp>
       <p:sp>
         <p:nvSpPr>
@@ -25353,6 +26379,13 @@
             <a:prstDash val="solid"/>
           </a:ln>
         </p:spPr>
+        <p:txBody>
+          <a:bodyPr/>
+          <a:lstStyle/>
+          <a:p>
+            <a:endParaRPr lang="zh-TW" altLang="en-US"/>
+          </a:p>
+        </p:txBody>
       </p:sp>
       <p:sp>
         <p:nvSpPr>
@@ -25375,7 +26408,7 @@
           <a:bodyPr wrap="square" lIns="0" tIns="0" rIns="0" bIns="0" rtlCol="0" anchor="ctr"/>
           <a:lstStyle/>
           <a:p>
-            <a:pPr indent="0" marL="0">
+            <a:pPr marL="0" indent="0">
               <a:buNone/>
             </a:pPr>
             <a:r>
@@ -25414,7 +26447,7 @@
           <a:bodyPr wrap="square" lIns="0" tIns="0" rIns="0" bIns="0" rtlCol="0" anchor="ctr"/>
           <a:lstStyle/>
           <a:p>
-            <a:pPr indent="0" marL="0">
+            <a:pPr marL="0" indent="0">
               <a:buNone/>
             </a:pPr>
             <a:r>
@@ -25453,7 +26486,7 @@
           <a:bodyPr wrap="square" lIns="0" tIns="0" rIns="0" bIns="0" rtlCol="0" anchor="ctr"/>
           <a:lstStyle/>
           <a:p>
-            <a:pPr indent="0" marL="0">
+            <a:pPr marL="0" indent="0">
               <a:buNone/>
             </a:pPr>
             <a:r>
@@ -25495,6 +26528,13 @@
             <a:prstDash val="solid"/>
           </a:ln>
         </p:spPr>
+        <p:txBody>
+          <a:bodyPr/>
+          <a:lstStyle/>
+          <a:p>
+            <a:endParaRPr lang="zh-TW" altLang="en-US"/>
+          </a:p>
+        </p:txBody>
       </p:sp>
       <p:sp>
         <p:nvSpPr>
@@ -25517,7 +26557,7 @@
           <a:bodyPr wrap="square" lIns="0" tIns="0" rIns="0" bIns="0" rtlCol="0" anchor="ctr"/>
           <a:lstStyle/>
           <a:p>
-            <a:pPr indent="0" marL="0">
+            <a:pPr marL="0" indent="0">
               <a:buNone/>
             </a:pPr>
             <a:r>
@@ -25556,7 +26596,7 @@
           <a:bodyPr wrap="square" lIns="0" tIns="0" rIns="0" bIns="0" rtlCol="0" anchor="ctr"/>
           <a:lstStyle/>
           <a:p>
-            <a:pPr indent="0" marL="0">
+            <a:pPr marL="0" indent="0">
               <a:buNone/>
             </a:pPr>
             <a:r>
@@ -25595,7 +26635,7 @@
           <a:bodyPr wrap="square" lIns="0" tIns="0" rIns="0" bIns="0" rtlCol="0" anchor="ctr"/>
           <a:lstStyle/>
           <a:p>
-            <a:pPr indent="0" marL="0">
+            <a:pPr marL="0" indent="0">
               <a:buNone/>
             </a:pPr>
             <a:r>
@@ -25634,7 +26674,7 @@
           <a:bodyPr wrap="square" lIns="0" tIns="0" rIns="0" bIns="0" rtlCol="0" anchor="ctr"/>
           <a:lstStyle/>
           <a:p>
-            <a:pPr indent="0" marL="0">
+            <a:pPr marL="0" indent="0">
               <a:buNone/>
             </a:pPr>
             <a:r>
@@ -25676,6 +26716,13 @@
             <a:prstDash val="solid"/>
           </a:ln>
         </p:spPr>
+        <p:txBody>
+          <a:bodyPr/>
+          <a:lstStyle/>
+          <a:p>
+            <a:endParaRPr lang="zh-TW" altLang="en-US"/>
+          </a:p>
+        </p:txBody>
       </p:sp>
       <p:sp>
         <p:nvSpPr>
@@ -25698,7 +26745,7 @@
           <a:bodyPr wrap="square" lIns="0" tIns="0" rIns="0" bIns="0" rtlCol="0" anchor="ctr"/>
           <a:lstStyle/>
           <a:p>
-            <a:pPr indent="0" marL="0">
+            <a:pPr marL="0" indent="0">
               <a:buNone/>
             </a:pPr>
             <a:r>
@@ -25737,7 +26784,7 @@
           <a:bodyPr wrap="square" lIns="0" tIns="0" rIns="0" bIns="0" rtlCol="0" anchor="ctr"/>
           <a:lstStyle/>
           <a:p>
-            <a:pPr indent="0" marL="0">
+            <a:pPr marL="0" indent="0">
               <a:buNone/>
             </a:pPr>
             <a:r>
@@ -25776,7 +26823,7 @@
           <a:bodyPr wrap="square" lIns="0" tIns="0" rIns="0" bIns="0" rtlCol="0" anchor="ctr"/>
           <a:lstStyle/>
           <a:p>
-            <a:pPr indent="0" marL="0">
+            <a:pPr marL="0" indent="0">
               <a:buNone/>
             </a:pPr>
             <a:r>
@@ -25815,7 +26862,7 @@
           <a:bodyPr wrap="square" lIns="0" tIns="0" rIns="0" bIns="0" rtlCol="0" anchor="ctr"/>
           <a:lstStyle/>
           <a:p>
-            <a:pPr indent="0" marL="0">
+            <a:pPr marL="0" indent="0">
               <a:buNone/>
             </a:pPr>
             <a:r>
@@ -25854,7 +26901,7 @@
           <a:bodyPr wrap="square" lIns="0" tIns="0" rIns="0" bIns="0" rtlCol="0" anchor="ctr"/>
           <a:lstStyle/>
           <a:p>
-            <a:pPr indent="0" marL="0">
+            <a:pPr marL="0" indent="0">
               <a:buNone/>
             </a:pPr>
             <a:r>
@@ -25893,7 +26940,7 @@
           <a:bodyPr wrap="square" lIns="0" tIns="0" rIns="0" bIns="0" rtlCol="0" anchor="ctr"/>
           <a:lstStyle/>
           <a:p>
-            <a:pPr indent="0" marL="0">
+            <a:pPr marL="0" indent="0">
               <a:buNone/>
             </a:pPr>
             <a:r>
@@ -25932,7 +26979,7 @@
           <a:bodyPr wrap="square" lIns="0" tIns="0" rIns="0" bIns="0" rtlCol="0" anchor="ctr"/>
           <a:lstStyle/>
           <a:p>
-            <a:pPr algn="ctr" indent="0" marL="0">
+            <a:pPr marL="0" indent="0" algn="ctr">
               <a:buNone/>
             </a:pPr>
             <a:r>
@@ -25966,6 +27013,7 @@
         <a:solidFill>
           <a:srgbClr val="FFFFFF"/>
         </a:solidFill>
+        <a:effectLst/>
       </p:bgPr>
     </p:bg>
     <p:spTree>
@@ -26006,6 +27054,13 @@
             <a:prstDash val="solid"/>
           </a:ln>
         </p:spPr>
+        <p:txBody>
+          <a:bodyPr/>
+          <a:lstStyle/>
+          <a:p>
+            <a:endParaRPr lang="zh-TW" altLang="en-US"/>
+          </a:p>
+        </p:txBody>
       </p:sp>
       <p:sp>
         <p:nvSpPr>
@@ -26028,7 +27083,7 @@
           <a:bodyPr wrap="square" lIns="0" tIns="0" rIns="0" bIns="0" rtlCol="0" anchor="t"/>
           <a:lstStyle/>
           <a:p>
-            <a:pPr indent="0" marL="0">
+            <a:pPr marL="0" indent="0">
               <a:buNone/>
             </a:pPr>
             <a:r>
@@ -26067,7 +27122,7 @@
           <a:bodyPr wrap="square" lIns="0" tIns="0" rIns="0" bIns="0" rtlCol="0" anchor="t"/>
           <a:lstStyle/>
           <a:p>
-            <a:pPr indent="0" marL="0">
+            <a:pPr marL="0" indent="0">
               <a:buNone/>
             </a:pPr>
             <a:r>
@@ -26106,7 +27161,7 @@
           <a:bodyPr wrap="square" lIns="0" tIns="0" rIns="0" bIns="0" rtlCol="0" anchor="ctr"/>
           <a:lstStyle/>
           <a:p>
-            <a:pPr indent="0" marL="0">
+            <a:pPr marL="0" indent="0">
               <a:buNone/>
             </a:pPr>
             <a:r>
@@ -26145,7 +27200,7 @@
           <a:bodyPr wrap="square" lIns="0" tIns="0" rIns="0" bIns="0" rtlCol="0" anchor="ctr"/>
           <a:lstStyle/>
           <a:p>
-            <a:pPr algn="r" indent="0" marL="0">
+            <a:pPr marL="0" indent="0" algn="r">
               <a:buNone/>
             </a:pPr>
             <a:r>
@@ -26184,7 +27239,7 @@
           <a:bodyPr wrap="square" lIns="0" tIns="0" rIns="0" bIns="0" rtlCol="0" anchor="ctr"/>
           <a:lstStyle/>
           <a:p>
-            <a:pPr algn="r" indent="0" marL="0">
+            <a:pPr marL="0" indent="0" algn="r">
               <a:buNone/>
             </a:pPr>
             <a:r>
@@ -26226,6 +27281,13 @@
             <a:prstDash val="solid"/>
           </a:ln>
         </p:spPr>
+        <p:txBody>
+          <a:bodyPr/>
+          <a:lstStyle/>
+          <a:p>
+            <a:endParaRPr lang="zh-TW" altLang="en-US"/>
+          </a:p>
+        </p:txBody>
       </p:sp>
       <p:sp>
         <p:nvSpPr>
@@ -26251,6 +27313,13 @@
             <a:prstDash val="solid"/>
           </a:ln>
         </p:spPr>
+        <p:txBody>
+          <a:bodyPr/>
+          <a:lstStyle/>
+          <a:p>
+            <a:endParaRPr lang="zh-TW" altLang="en-US"/>
+          </a:p>
+        </p:txBody>
       </p:sp>
       <p:sp>
         <p:nvSpPr>
@@ -26273,7 +27342,7 @@
           <a:bodyPr wrap="square" lIns="0" tIns="0" rIns="0" bIns="0" rtlCol="0" anchor="ctr"/>
           <a:lstStyle/>
           <a:p>
-            <a:pPr indent="0" marL="0">
+            <a:pPr marL="0" indent="0">
               <a:buNone/>
             </a:pPr>
             <a:r>
@@ -26312,7 +27381,7 @@
           <a:bodyPr wrap="square" lIns="0" tIns="0" rIns="0" bIns="0" rtlCol="0" anchor="ctr"/>
           <a:lstStyle/>
           <a:p>
-            <a:pPr indent="0" marL="0">
+            <a:pPr marL="0" indent="0">
               <a:buNone/>
             </a:pPr>
             <a:r>
@@ -26354,6 +27423,13 @@
             <a:prstDash val="solid"/>
           </a:ln>
         </p:spPr>
+        <p:txBody>
+          <a:bodyPr/>
+          <a:lstStyle/>
+          <a:p>
+            <a:endParaRPr lang="zh-TW" altLang="en-US"/>
+          </a:p>
+        </p:txBody>
       </p:sp>
       <p:sp>
         <p:nvSpPr>
@@ -26379,6 +27455,13 @@
             <a:prstDash val="solid"/>
           </a:ln>
         </p:spPr>
+        <p:txBody>
+          <a:bodyPr/>
+          <a:lstStyle/>
+          <a:p>
+            <a:endParaRPr lang="zh-TW" altLang="en-US"/>
+          </a:p>
+        </p:txBody>
       </p:sp>
       <p:sp>
         <p:nvSpPr>
@@ -26401,7 +27484,7 @@
           <a:bodyPr wrap="square" lIns="0" tIns="0" rIns="0" bIns="0" rtlCol="0" anchor="ctr"/>
           <a:lstStyle/>
           <a:p>
-            <a:pPr indent="0" marL="0">
+            <a:pPr marL="0" indent="0">
               <a:buNone/>
             </a:pPr>
             <a:r>
@@ -26440,7 +27523,7 @@
           <a:bodyPr wrap="square" lIns="0" tIns="0" rIns="0" bIns="0" rtlCol="0" anchor="ctr"/>
           <a:lstStyle/>
           <a:p>
-            <a:pPr indent="0" marL="0">
+            <a:pPr marL="0" indent="0">
               <a:buNone/>
             </a:pPr>
             <a:r>
@@ -26479,7 +27562,7 @@
           <a:bodyPr wrap="square" lIns="0" tIns="0" rIns="0" bIns="0" rtlCol="0" anchor="ctr"/>
           <a:lstStyle/>
           <a:p>
-            <a:pPr indent="0" marL="0">
+            <a:pPr marL="0" indent="0">
               <a:buNone/>
             </a:pPr>
             <a:r>
@@ -26595,6 +27678,13 @@
             <a:prstDash val="solid"/>
           </a:ln>
         </p:spPr>
+        <p:txBody>
+          <a:bodyPr/>
+          <a:lstStyle/>
+          <a:p>
+            <a:endParaRPr lang="zh-TW" altLang="en-US"/>
+          </a:p>
+        </p:txBody>
       </p:sp>
       <p:sp>
         <p:nvSpPr>
@@ -26617,7 +27707,7 @@
           <a:bodyPr wrap="square" lIns="0" tIns="0" rIns="0" bIns="0" rtlCol="0" anchor="ctr"/>
           <a:lstStyle/>
           <a:p>
-            <a:pPr indent="0" marL="0">
+            <a:pPr marL="0" indent="0">
               <a:buNone/>
             </a:pPr>
             <a:r>
@@ -26656,7 +27746,7 @@
           <a:bodyPr wrap="square" lIns="0" tIns="0" rIns="0" bIns="0" rtlCol="0" anchor="ctr"/>
           <a:lstStyle/>
           <a:p>
-            <a:pPr indent="0" marL="0">
+            <a:pPr marL="0" indent="0">
               <a:buNone/>
             </a:pPr>
             <a:r>
@@ -26698,6 +27788,13 @@
             <a:prstDash val="solid"/>
           </a:ln>
         </p:spPr>
+        <p:txBody>
+          <a:bodyPr/>
+          <a:lstStyle/>
+          <a:p>
+            <a:endParaRPr lang="zh-TW" altLang="en-US"/>
+          </a:p>
+        </p:txBody>
       </p:sp>
       <p:sp>
         <p:nvSpPr>
@@ -26723,6 +27820,13 @@
             <a:prstDash val="solid"/>
           </a:ln>
         </p:spPr>
+        <p:txBody>
+          <a:bodyPr/>
+          <a:lstStyle/>
+          <a:p>
+            <a:endParaRPr lang="zh-TW" altLang="en-US"/>
+          </a:p>
+        </p:txBody>
       </p:sp>
       <p:sp>
         <p:nvSpPr>
@@ -26745,7 +27849,7 @@
           <a:bodyPr wrap="square" lIns="0" tIns="0" rIns="0" bIns="0" rtlCol="0" anchor="ctr"/>
           <a:lstStyle/>
           <a:p>
-            <a:pPr indent="0" marL="0">
+            <a:pPr marL="0" indent="0">
               <a:buNone/>
             </a:pPr>
             <a:r>
@@ -26784,7 +27888,7 @@
           <a:bodyPr wrap="square" lIns="0" tIns="0" rIns="0" bIns="0" rtlCol="0" anchor="ctr"/>
           <a:lstStyle/>
           <a:p>
-            <a:pPr indent="0" marL="0">
+            <a:pPr marL="0" indent="0">
               <a:buNone/>
             </a:pPr>
             <a:r>
@@ -26823,7 +27927,7 @@
           <a:bodyPr wrap="square" lIns="0" tIns="0" rIns="0" bIns="0" rtlCol="0" anchor="ctr"/>
           <a:lstStyle/>
           <a:p>
-            <a:pPr indent="0" marL="0">
+            <a:pPr marL="0" indent="0">
               <a:buNone/>
             </a:pPr>
             <a:r>
@@ -26939,6 +28043,13 @@
             <a:prstDash val="solid"/>
           </a:ln>
         </p:spPr>
+        <p:txBody>
+          <a:bodyPr/>
+          <a:lstStyle/>
+          <a:p>
+            <a:endParaRPr lang="zh-TW" altLang="en-US"/>
+          </a:p>
+        </p:txBody>
       </p:sp>
       <p:sp>
         <p:nvSpPr>
@@ -26961,7 +28072,7 @@
           <a:bodyPr wrap="square" lIns="0" tIns="0" rIns="0" bIns="0" rtlCol="0" anchor="ctr"/>
           <a:lstStyle/>
           <a:p>
-            <a:pPr indent="0" marL="0">
+            <a:pPr marL="0" indent="0">
               <a:buNone/>
             </a:pPr>
             <a:r>
@@ -27000,7 +28111,7 @@
           <a:bodyPr wrap="square" lIns="0" tIns="0" rIns="0" bIns="0" rtlCol="0" anchor="ctr"/>
           <a:lstStyle/>
           <a:p>
-            <a:pPr indent="0" marL="0">
+            <a:pPr marL="0" indent="0">
               <a:buNone/>
             </a:pPr>
             <a:r>
@@ -27042,6 +28153,13 @@
             <a:prstDash val="solid"/>
           </a:ln>
         </p:spPr>
+        <p:txBody>
+          <a:bodyPr/>
+          <a:lstStyle/>
+          <a:p>
+            <a:endParaRPr lang="zh-TW" altLang="en-US"/>
+          </a:p>
+        </p:txBody>
       </p:sp>
       <p:sp>
         <p:nvSpPr>
@@ -27067,6 +28185,13 @@
             <a:prstDash val="solid"/>
           </a:ln>
         </p:spPr>
+        <p:txBody>
+          <a:bodyPr/>
+          <a:lstStyle/>
+          <a:p>
+            <a:endParaRPr lang="zh-TW" altLang="en-US"/>
+          </a:p>
+        </p:txBody>
       </p:sp>
       <p:sp>
         <p:nvSpPr>
@@ -27089,7 +28214,7 @@
           <a:bodyPr wrap="square" lIns="0" tIns="0" rIns="0" bIns="0" rtlCol="0" anchor="ctr"/>
           <a:lstStyle/>
           <a:p>
-            <a:pPr indent="0" marL="0">
+            <a:pPr marL="0" indent="0">
               <a:buNone/>
             </a:pPr>
             <a:r>
@@ -27128,7 +28253,7 @@
           <a:bodyPr wrap="square" lIns="0" tIns="0" rIns="0" bIns="0" rtlCol="0" anchor="ctr"/>
           <a:lstStyle/>
           <a:p>
-            <a:pPr indent="0" marL="0">
+            <a:pPr marL="0" indent="0">
               <a:buNone/>
             </a:pPr>
             <a:r>
@@ -27167,7 +28292,7 @@
           <a:bodyPr wrap="square" lIns="0" tIns="0" rIns="0" bIns="0" rtlCol="0" anchor="ctr"/>
           <a:lstStyle/>
           <a:p>
-            <a:pPr indent="0" marL="0">
+            <a:pPr marL="0" indent="0">
               <a:buNone/>
             </a:pPr>
             <a:r>
@@ -27283,6 +28408,13 @@
             <a:prstDash val="solid"/>
           </a:ln>
         </p:spPr>
+        <p:txBody>
+          <a:bodyPr/>
+          <a:lstStyle/>
+          <a:p>
+            <a:endParaRPr lang="zh-TW" altLang="en-US"/>
+          </a:p>
+        </p:txBody>
       </p:sp>
       <p:sp>
         <p:nvSpPr>
@@ -27305,7 +28437,7 @@
           <a:bodyPr wrap="square" lIns="0" tIns="0" rIns="0" bIns="0" rtlCol="0" anchor="ctr"/>
           <a:lstStyle/>
           <a:p>
-            <a:pPr indent="0" marL="0">
+            <a:pPr marL="0" indent="0">
               <a:buNone/>
             </a:pPr>
             <a:r>
@@ -27344,7 +28476,7 @@
           <a:bodyPr wrap="square" lIns="0" tIns="0" rIns="0" bIns="0" rtlCol="0" anchor="ctr"/>
           <a:lstStyle/>
           <a:p>
-            <a:pPr indent="0" marL="0">
+            <a:pPr marL="0" indent="0">
               <a:buNone/>
             </a:pPr>
             <a:r>
@@ -27383,7 +28515,7 @@
           <a:bodyPr wrap="square" lIns="0" tIns="0" rIns="0" bIns="0" rtlCol="0" anchor="ctr"/>
           <a:lstStyle/>
           <a:p>
-            <a:pPr algn="ctr" indent="0" marL="0">
+            <a:pPr marL="0" indent="0" algn="ctr">
               <a:buNone/>
             </a:pPr>
             <a:r>
@@ -27417,6 +28549,7 @@
         <a:solidFill>
           <a:srgbClr val="FFFFFF"/>
         </a:solidFill>
+        <a:effectLst/>
       </p:bgPr>
     </p:bg>
     <p:spTree>
@@ -27457,6 +28590,13 @@
             <a:prstDash val="solid"/>
           </a:ln>
         </p:spPr>
+        <p:txBody>
+          <a:bodyPr/>
+          <a:lstStyle/>
+          <a:p>
+            <a:endParaRPr lang="zh-TW" altLang="en-US"/>
+          </a:p>
+        </p:txBody>
       </p:sp>
       <p:sp>
         <p:nvSpPr>
@@ -27479,7 +28619,7 @@
           <a:bodyPr wrap="square" lIns="0" tIns="0" rIns="0" bIns="0" rtlCol="0" anchor="t"/>
           <a:lstStyle/>
           <a:p>
-            <a:pPr indent="0" marL="0">
+            <a:pPr marL="0" indent="0">
               <a:buNone/>
             </a:pPr>
             <a:r>
@@ -27518,7 +28658,7 @@
           <a:bodyPr wrap="square" lIns="0" tIns="0" rIns="0" bIns="0" rtlCol="0" anchor="t"/>
           <a:lstStyle/>
           <a:p>
-            <a:pPr indent="0" marL="0">
+            <a:pPr marL="0" indent="0">
               <a:buNone/>
             </a:pPr>
             <a:r>
@@ -27557,7 +28697,7 @@
           <a:bodyPr wrap="square" lIns="0" tIns="0" rIns="0" bIns="0" rtlCol="0" anchor="ctr"/>
           <a:lstStyle/>
           <a:p>
-            <a:pPr indent="0" marL="0">
+            <a:pPr marL="0" indent="0">
               <a:buNone/>
             </a:pPr>
             <a:r>
@@ -27596,7 +28736,7 @@
           <a:bodyPr wrap="square" lIns="0" tIns="0" rIns="0" bIns="0" rtlCol="0" anchor="ctr"/>
           <a:lstStyle/>
           <a:p>
-            <a:pPr algn="r" indent="0" marL="0">
+            <a:pPr marL="0" indent="0" algn="r">
               <a:buNone/>
             </a:pPr>
             <a:r>
@@ -27635,7 +28775,7 @@
           <a:bodyPr wrap="square" lIns="0" tIns="0" rIns="0" bIns="0" rtlCol="0" anchor="ctr"/>
           <a:lstStyle/>
           <a:p>
-            <a:pPr algn="r" indent="0" marL="0">
+            <a:pPr marL="0" indent="0" algn="r">
               <a:buNone/>
             </a:pPr>
             <a:r>
@@ -27677,6 +28817,13 @@
             <a:prstDash val="solid"/>
           </a:ln>
         </p:spPr>
+        <p:txBody>
+          <a:bodyPr/>
+          <a:lstStyle/>
+          <a:p>
+            <a:endParaRPr lang="zh-TW" altLang="en-US"/>
+          </a:p>
+        </p:txBody>
       </p:sp>
       <p:sp>
         <p:nvSpPr>
@@ -27702,6 +28849,13 @@
             <a:prstDash val="solid"/>
           </a:ln>
         </p:spPr>
+        <p:txBody>
+          <a:bodyPr/>
+          <a:lstStyle/>
+          <a:p>
+            <a:endParaRPr lang="zh-TW" altLang="en-US"/>
+          </a:p>
+        </p:txBody>
       </p:sp>
       <p:sp>
         <p:nvSpPr>
@@ -27724,7 +28878,7 @@
           <a:bodyPr wrap="square" lIns="0" tIns="0" rIns="0" bIns="0" rtlCol="0" anchor="ctr"/>
           <a:lstStyle/>
           <a:p>
-            <a:pPr indent="0" marL="0">
+            <a:pPr marL="0" indent="0">
               <a:buNone/>
             </a:pPr>
             <a:r>
@@ -27763,7 +28917,7 @@
           <a:bodyPr wrap="square" lIns="0" tIns="0" rIns="0" bIns="0" rtlCol="0" anchor="ctr"/>
           <a:lstStyle/>
           <a:p>
-            <a:pPr indent="0" marL="0">
+            <a:pPr marL="0" indent="0">
               <a:buNone/>
             </a:pPr>
             <a:r>
@@ -27802,7 +28956,7 @@
           <a:bodyPr wrap="square" lIns="0" tIns="0" rIns="0" bIns="0" rtlCol="0" anchor="ctr"/>
           <a:lstStyle/>
           <a:p>
-            <a:pPr indent="0" marL="0">
+            <a:pPr marL="0" indent="0">
               <a:buNone/>
             </a:pPr>
             <a:r>
@@ -27936,6 +29090,13 @@
             <a:prstDash val="solid"/>
           </a:ln>
         </p:spPr>
+        <p:txBody>
+          <a:bodyPr/>
+          <a:lstStyle/>
+          <a:p>
+            <a:endParaRPr lang="zh-TW" altLang="en-US"/>
+          </a:p>
+        </p:txBody>
       </p:sp>
       <p:sp>
         <p:nvSpPr>
@@ -27958,7 +29119,7 @@
           <a:bodyPr wrap="square" lIns="0" tIns="0" rIns="0" bIns="0" rtlCol="0" anchor="ctr"/>
           <a:lstStyle/>
           <a:p>
-            <a:pPr indent="0" marL="0">
+            <a:pPr marL="0" indent="0">
               <a:buNone/>
             </a:pPr>
             <a:r>
@@ -28000,6 +29161,13 @@
             <a:prstDash val="solid"/>
           </a:ln>
         </p:spPr>
+        <p:txBody>
+          <a:bodyPr/>
+          <a:lstStyle/>
+          <a:p>
+            <a:endParaRPr lang="zh-TW" altLang="en-US"/>
+          </a:p>
+        </p:txBody>
       </p:sp>
       <p:sp>
         <p:nvSpPr>
@@ -28025,6 +29193,13 @@
             <a:prstDash val="solid"/>
           </a:ln>
         </p:spPr>
+        <p:txBody>
+          <a:bodyPr/>
+          <a:lstStyle/>
+          <a:p>
+            <a:endParaRPr lang="zh-TW" altLang="en-US"/>
+          </a:p>
+        </p:txBody>
       </p:sp>
       <p:sp>
         <p:nvSpPr>
@@ -28047,7 +29222,7 @@
           <a:bodyPr wrap="square" lIns="0" tIns="0" rIns="0" bIns="0" rtlCol="0" anchor="ctr"/>
           <a:lstStyle/>
           <a:p>
-            <a:pPr indent="0" marL="0">
+            <a:pPr marL="0" indent="0">
               <a:buNone/>
             </a:pPr>
             <a:r>
@@ -28086,7 +29261,7 @@
           <a:bodyPr wrap="square" lIns="0" tIns="0" rIns="0" bIns="0" rtlCol="0" anchor="ctr"/>
           <a:lstStyle/>
           <a:p>
-            <a:pPr indent="0" marL="0">
+            <a:pPr marL="0" indent="0">
               <a:buNone/>
             </a:pPr>
             <a:r>
@@ -28125,7 +29300,7 @@
           <a:bodyPr wrap="square" lIns="0" tIns="0" rIns="0" bIns="0" rtlCol="0" anchor="ctr"/>
           <a:lstStyle/>
           <a:p>
-            <a:pPr indent="0" marL="0">
+            <a:pPr marL="0" indent="0">
               <a:buNone/>
             </a:pPr>
             <a:r>
@@ -28259,6 +29434,13 @@
             <a:prstDash val="solid"/>
           </a:ln>
         </p:spPr>
+        <p:txBody>
+          <a:bodyPr/>
+          <a:lstStyle/>
+          <a:p>
+            <a:endParaRPr lang="zh-TW" altLang="en-US"/>
+          </a:p>
+        </p:txBody>
       </p:sp>
       <p:sp>
         <p:nvSpPr>
@@ -28281,7 +29463,7 @@
           <a:bodyPr wrap="square" lIns="0" tIns="0" rIns="0" bIns="0" rtlCol="0" anchor="ctr"/>
           <a:lstStyle/>
           <a:p>
-            <a:pPr indent="0" marL="0">
+            <a:pPr marL="0" indent="0">
               <a:buNone/>
             </a:pPr>
             <a:r>
@@ -28323,6 +29505,13 @@
             <a:prstDash val="solid"/>
           </a:ln>
         </p:spPr>
+        <p:txBody>
+          <a:bodyPr/>
+          <a:lstStyle/>
+          <a:p>
+            <a:endParaRPr lang="zh-TW" altLang="en-US"/>
+          </a:p>
+        </p:txBody>
       </p:sp>
       <p:sp>
         <p:nvSpPr>
@@ -28348,6 +29537,13 @@
             <a:prstDash val="solid"/>
           </a:ln>
         </p:spPr>
+        <p:txBody>
+          <a:bodyPr/>
+          <a:lstStyle/>
+          <a:p>
+            <a:endParaRPr lang="zh-TW" altLang="en-US"/>
+          </a:p>
+        </p:txBody>
       </p:sp>
       <p:sp>
         <p:nvSpPr>
@@ -28370,7 +29566,7 @@
           <a:bodyPr wrap="square" lIns="0" tIns="0" rIns="0" bIns="0" rtlCol="0" anchor="ctr"/>
           <a:lstStyle/>
           <a:p>
-            <a:pPr indent="0" marL="0">
+            <a:pPr marL="0" indent="0">
               <a:buNone/>
             </a:pPr>
             <a:r>
@@ -28409,7 +29605,7 @@
           <a:bodyPr wrap="square" lIns="0" tIns="0" rIns="0" bIns="0" rtlCol="0" anchor="ctr"/>
           <a:lstStyle/>
           <a:p>
-            <a:pPr indent="0" marL="0">
+            <a:pPr marL="0" indent="0">
               <a:buNone/>
             </a:pPr>
             <a:r>
@@ -28448,7 +29644,7 @@
           <a:bodyPr wrap="square" lIns="0" tIns="0" rIns="0" bIns="0" rtlCol="0" anchor="ctr"/>
           <a:lstStyle/>
           <a:p>
-            <a:pPr indent="0" marL="0">
+            <a:pPr marL="0" indent="0">
               <a:buNone/>
             </a:pPr>
             <a:r>
@@ -28582,6 +29778,13 @@
             <a:prstDash val="solid"/>
           </a:ln>
         </p:spPr>
+        <p:txBody>
+          <a:bodyPr/>
+          <a:lstStyle/>
+          <a:p>
+            <a:endParaRPr lang="zh-TW" altLang="en-US"/>
+          </a:p>
+        </p:txBody>
       </p:sp>
       <p:sp>
         <p:nvSpPr>
@@ -28604,7 +29807,7 @@
           <a:bodyPr wrap="square" lIns="0" tIns="0" rIns="0" bIns="0" rtlCol="0" anchor="ctr"/>
           <a:lstStyle/>
           <a:p>
-            <a:pPr indent="0" marL="0">
+            <a:pPr marL="0" indent="0">
               <a:buNone/>
             </a:pPr>
             <a:r>
@@ -28643,7 +29846,7 @@
           <a:bodyPr wrap="square" lIns="0" tIns="0" rIns="0" bIns="0" rtlCol="0" anchor="ctr"/>
           <a:lstStyle/>
           <a:p>
-            <a:pPr indent="0" marL="0">
+            <a:pPr marL="0" indent="0">
               <a:buNone/>
             </a:pPr>
             <a:r>
@@ -28677,6 +29880,7 @@
         <a:solidFill>
           <a:srgbClr val="FFFFFF"/>
         </a:solidFill>
+        <a:effectLst/>
       </p:bgPr>
     </p:bg>
     <p:spTree>
@@ -28717,6 +29921,13 @@
             <a:prstDash val="solid"/>
           </a:ln>
         </p:spPr>
+        <p:txBody>
+          <a:bodyPr/>
+          <a:lstStyle/>
+          <a:p>
+            <a:endParaRPr lang="zh-TW" altLang="en-US"/>
+          </a:p>
+        </p:txBody>
       </p:sp>
       <p:sp>
         <p:nvSpPr>
@@ -28739,7 +29950,7 @@
           <a:bodyPr wrap="square" lIns="0" tIns="0" rIns="0" bIns="0" rtlCol="0" anchor="t"/>
           <a:lstStyle/>
           <a:p>
-            <a:pPr indent="0" marL="0">
+            <a:pPr marL="0" indent="0">
               <a:buNone/>
             </a:pPr>
             <a:r>
@@ -28778,7 +29989,7 @@
           <a:bodyPr wrap="square" lIns="0" tIns="0" rIns="0" bIns="0" rtlCol="0" anchor="t"/>
           <a:lstStyle/>
           <a:p>
-            <a:pPr indent="0" marL="0">
+            <a:pPr marL="0" indent="0">
               <a:buNone/>
             </a:pPr>
             <a:r>
@@ -28817,7 +30028,7 @@
           <a:bodyPr wrap="square" lIns="0" tIns="0" rIns="0" bIns="0" rtlCol="0" anchor="ctr"/>
           <a:lstStyle/>
           <a:p>
-            <a:pPr indent="0" marL="0">
+            <a:pPr marL="0" indent="0">
               <a:buNone/>
             </a:pPr>
             <a:r>
@@ -28856,7 +30067,7 @@
           <a:bodyPr wrap="square" lIns="0" tIns="0" rIns="0" bIns="0" rtlCol="0" anchor="ctr"/>
           <a:lstStyle/>
           <a:p>
-            <a:pPr algn="r" indent="0" marL="0">
+            <a:pPr marL="0" indent="0" algn="r">
               <a:buNone/>
             </a:pPr>
             <a:r>
@@ -28895,7 +30106,7 @@
           <a:bodyPr wrap="square" lIns="0" tIns="0" rIns="0" bIns="0" rtlCol="0" anchor="ctr"/>
           <a:lstStyle/>
           <a:p>
-            <a:pPr algn="r" indent="0" marL="0">
+            <a:pPr marL="0" indent="0" algn="r">
               <a:buNone/>
             </a:pPr>
             <a:r>
@@ -28937,6 +30148,13 @@
             <a:prstDash val="solid"/>
           </a:ln>
         </p:spPr>
+        <p:txBody>
+          <a:bodyPr/>
+          <a:lstStyle/>
+          <a:p>
+            <a:endParaRPr lang="zh-TW" altLang="en-US"/>
+          </a:p>
+        </p:txBody>
       </p:sp>
       <p:sp>
         <p:nvSpPr>
@@ -28962,6 +30180,13 @@
             <a:prstDash val="solid"/>
           </a:ln>
         </p:spPr>
+        <p:txBody>
+          <a:bodyPr/>
+          <a:lstStyle/>
+          <a:p>
+            <a:endParaRPr lang="zh-TW" altLang="en-US"/>
+          </a:p>
+        </p:txBody>
       </p:sp>
       <p:sp>
         <p:nvSpPr>
@@ -28984,7 +30209,7 @@
           <a:bodyPr wrap="square" lIns="0" tIns="0" rIns="0" bIns="0" rtlCol="0" anchor="ctr"/>
           <a:lstStyle/>
           <a:p>
-            <a:pPr indent="0" marL="0">
+            <a:pPr marL="0" indent="0">
               <a:buNone/>
             </a:pPr>
             <a:r>
@@ -29023,7 +30248,7 @@
           <a:bodyPr wrap="square" lIns="0" tIns="0" rIns="0" bIns="0" rtlCol="0" anchor="ctr"/>
           <a:lstStyle/>
           <a:p>
-            <a:pPr indent="0" marL="0">
+            <a:pPr marL="0" indent="0">
               <a:buNone/>
             </a:pPr>
             <a:r>
@@ -29040,13 +30265,13 @@
             <a:endParaRPr lang="en-US" sz="1150" dirty="0"/>
           </a:p>
           <a:p>
-            <a:pPr indent="0" marL="0">
+            <a:pPr marL="0" indent="0">
               <a:buNone/>
             </a:pPr>
             <a:endParaRPr lang="en-US" sz="1150" dirty="0"/>
           </a:p>
           <a:p>
-            <a:pPr indent="0" marL="0">
+            <a:pPr marL="0" indent="0">
               <a:buNone/>
             </a:pPr>
             <a:r>
@@ -29063,13 +30288,13 @@
             <a:endParaRPr lang="en-US" sz="1150" dirty="0"/>
           </a:p>
           <a:p>
-            <a:pPr indent="0" marL="0">
+            <a:pPr marL="0" indent="0">
               <a:buNone/>
             </a:pPr>
             <a:endParaRPr lang="en-US" sz="1150" dirty="0"/>
           </a:p>
           <a:p>
-            <a:pPr indent="0" marL="0">
+            <a:pPr marL="0" indent="0">
               <a:buNone/>
             </a:pPr>
             <a:r>
@@ -29111,6 +30336,13 @@
             <a:prstDash val="solid"/>
           </a:ln>
         </p:spPr>
+        <p:txBody>
+          <a:bodyPr/>
+          <a:lstStyle/>
+          <a:p>
+            <a:endParaRPr lang="zh-TW" altLang="en-US"/>
+          </a:p>
+        </p:txBody>
       </p:sp>
       <p:sp>
         <p:nvSpPr>
@@ -29136,6 +30368,13 @@
             <a:prstDash val="solid"/>
           </a:ln>
         </p:spPr>
+        <p:txBody>
+          <a:bodyPr/>
+          <a:lstStyle/>
+          <a:p>
+            <a:endParaRPr lang="zh-TW" altLang="en-US"/>
+          </a:p>
+        </p:txBody>
       </p:sp>
       <p:sp>
         <p:nvSpPr>
@@ -29158,7 +30397,7 @@
           <a:bodyPr wrap="square" lIns="0" tIns="0" rIns="0" bIns="0" rtlCol="0" anchor="ctr"/>
           <a:lstStyle/>
           <a:p>
-            <a:pPr indent="0" marL="0">
+            <a:pPr marL="0" indent="0">
               <a:buNone/>
             </a:pPr>
             <a:r>
@@ -29312,6 +30551,13 @@
             <a:prstDash val="solid"/>
           </a:ln>
         </p:spPr>
+        <p:txBody>
+          <a:bodyPr/>
+          <a:lstStyle/>
+          <a:p>
+            <a:endParaRPr lang="zh-TW" altLang="en-US"/>
+          </a:p>
+        </p:txBody>
       </p:sp>
       <p:sp>
         <p:nvSpPr>
@@ -29337,6 +30583,13 @@
             <a:prstDash val="solid"/>
           </a:ln>
         </p:spPr>
+        <p:txBody>
+          <a:bodyPr/>
+          <a:lstStyle/>
+          <a:p>
+            <a:endParaRPr lang="zh-TW" altLang="en-US"/>
+          </a:p>
+        </p:txBody>
       </p:sp>
       <p:sp>
         <p:nvSpPr>
@@ -29359,7 +30612,7 @@
           <a:bodyPr wrap="square" lIns="0" tIns="0" rIns="0" bIns="0" rtlCol="0" anchor="ctr"/>
           <a:lstStyle/>
           <a:p>
-            <a:pPr indent="0" marL="0">
+            <a:pPr marL="0" indent="0">
               <a:buNone/>
             </a:pPr>
             <a:r>
@@ -29398,7 +30651,7 @@
           <a:bodyPr wrap="square" lIns="0" tIns="0" rIns="0" bIns="0" rtlCol="0" anchor="ctr"/>
           <a:lstStyle/>
           <a:p>
-            <a:pPr indent="0" marL="0">
+            <a:pPr marL="0" indent="0">
               <a:buNone/>
             </a:pPr>
             <a:r>
@@ -29544,6 +30797,7 @@
         <a:solidFill>
           <a:srgbClr val="FFFFFF"/>
         </a:solidFill>
+        <a:effectLst/>
       </p:bgPr>
     </p:bg>
     <p:spTree>
@@ -29584,6 +30838,13 @@
             <a:prstDash val="solid"/>
           </a:ln>
         </p:spPr>
+        <p:txBody>
+          <a:bodyPr/>
+          <a:lstStyle/>
+          <a:p>
+            <a:endParaRPr lang="zh-TW" altLang="en-US"/>
+          </a:p>
+        </p:txBody>
       </p:sp>
       <p:sp>
         <p:nvSpPr>
@@ -29606,7 +30867,7 @@
           <a:bodyPr wrap="square" lIns="0" tIns="0" rIns="0" bIns="0" rtlCol="0" anchor="t"/>
           <a:lstStyle/>
           <a:p>
-            <a:pPr indent="0" marL="0">
+            <a:pPr marL="0" indent="0">
               <a:buNone/>
             </a:pPr>
             <a:r>
@@ -29645,7 +30906,7 @@
           <a:bodyPr wrap="square" lIns="0" tIns="0" rIns="0" bIns="0" rtlCol="0" anchor="t"/>
           <a:lstStyle/>
           <a:p>
-            <a:pPr indent="0" marL="0">
+            <a:pPr marL="0" indent="0">
               <a:buNone/>
             </a:pPr>
             <a:r>
@@ -29684,7 +30945,7 @@
           <a:bodyPr wrap="square" lIns="0" tIns="0" rIns="0" bIns="0" rtlCol="0" anchor="ctr"/>
           <a:lstStyle/>
           <a:p>
-            <a:pPr indent="0" marL="0">
+            <a:pPr marL="0" indent="0">
               <a:buNone/>
             </a:pPr>
             <a:r>
@@ -29723,7 +30984,7 @@
           <a:bodyPr wrap="square" lIns="0" tIns="0" rIns="0" bIns="0" rtlCol="0" anchor="ctr"/>
           <a:lstStyle/>
           <a:p>
-            <a:pPr algn="r" indent="0" marL="0">
+            <a:pPr marL="0" indent="0" algn="r">
               <a:buNone/>
             </a:pPr>
             <a:r>
@@ -29762,7 +31023,7 @@
           <a:bodyPr wrap="square" lIns="0" tIns="0" rIns="0" bIns="0" rtlCol="0" anchor="ctr"/>
           <a:lstStyle/>
           <a:p>
-            <a:pPr algn="r" indent="0" marL="0">
+            <a:pPr marL="0" indent="0" algn="r">
               <a:buNone/>
             </a:pPr>
             <a:r>
@@ -29804,6 +31065,13 @@
             <a:prstDash val="solid"/>
           </a:ln>
         </p:spPr>
+        <p:txBody>
+          <a:bodyPr/>
+          <a:lstStyle/>
+          <a:p>
+            <a:endParaRPr lang="zh-TW" altLang="en-US"/>
+          </a:p>
+        </p:txBody>
       </p:sp>
       <p:sp>
         <p:nvSpPr>
@@ -29829,6 +31097,13 @@
             <a:prstDash val="solid"/>
           </a:ln>
         </p:spPr>
+        <p:txBody>
+          <a:bodyPr/>
+          <a:lstStyle/>
+          <a:p>
+            <a:endParaRPr lang="zh-TW" altLang="en-US"/>
+          </a:p>
+        </p:txBody>
       </p:sp>
       <p:sp>
         <p:nvSpPr>
@@ -29851,7 +31126,7 @@
           <a:bodyPr wrap="square" lIns="0" tIns="0" rIns="0" bIns="0" rtlCol="0" anchor="ctr"/>
           <a:lstStyle/>
           <a:p>
-            <a:pPr algn="ctr" indent="0" marL="0">
+            <a:pPr marL="0" indent="0" algn="ctr">
               <a:buNone/>
             </a:pPr>
             <a:r>
@@ -29890,7 +31165,7 @@
           <a:bodyPr wrap="square" lIns="0" tIns="0" rIns="0" bIns="0" rtlCol="0" anchor="ctr"/>
           <a:lstStyle/>
           <a:p>
-            <a:pPr algn="ctr" indent="0" marL="0">
+            <a:pPr marL="0" indent="0" algn="ctr">
               <a:buNone/>
             </a:pPr>
             <a:r>
@@ -29929,7 +31204,7 @@
           <a:bodyPr wrap="square" lIns="0" tIns="0" rIns="0" bIns="0" rtlCol="0" anchor="t"/>
           <a:lstStyle/>
           <a:p>
-            <a:pPr indent="0" marL="0">
+            <a:pPr marL="0" indent="0">
               <a:buNone/>
             </a:pPr>
             <a:r>
@@ -29970,6 +31245,13 @@
             <a:tailEnd type="triangle"/>
           </a:ln>
         </p:spPr>
+        <p:txBody>
+          <a:bodyPr/>
+          <a:lstStyle/>
+          <a:p>
+            <a:endParaRPr lang="zh-TW" altLang="en-US"/>
+          </a:p>
+        </p:txBody>
       </p:sp>
       <p:sp>
         <p:nvSpPr>
@@ -29995,6 +31277,13 @@
             <a:prstDash val="solid"/>
           </a:ln>
         </p:spPr>
+        <p:txBody>
+          <a:bodyPr/>
+          <a:lstStyle/>
+          <a:p>
+            <a:endParaRPr lang="zh-TW" altLang="en-US"/>
+          </a:p>
+        </p:txBody>
       </p:sp>
       <p:sp>
         <p:nvSpPr>
@@ -30020,6 +31309,13 @@
             <a:prstDash val="solid"/>
           </a:ln>
         </p:spPr>
+        <p:txBody>
+          <a:bodyPr/>
+          <a:lstStyle/>
+          <a:p>
+            <a:endParaRPr lang="zh-TW" altLang="en-US"/>
+          </a:p>
+        </p:txBody>
       </p:sp>
       <p:sp>
         <p:nvSpPr>
@@ -30042,7 +31338,7 @@
           <a:bodyPr wrap="square" lIns="0" tIns="0" rIns="0" bIns="0" rtlCol="0" anchor="ctr"/>
           <a:lstStyle/>
           <a:p>
-            <a:pPr algn="ctr" indent="0" marL="0">
+            <a:pPr marL="0" indent="0" algn="ctr">
               <a:buNone/>
             </a:pPr>
             <a:r>
@@ -30081,7 +31377,7 @@
           <a:bodyPr wrap="square" lIns="0" tIns="0" rIns="0" bIns="0" rtlCol="0" anchor="ctr"/>
           <a:lstStyle/>
           <a:p>
-            <a:pPr algn="ctr" indent="0" marL="0">
+            <a:pPr marL="0" indent="0" algn="ctr">
               <a:buNone/>
             </a:pPr>
             <a:r>
@@ -30120,7 +31416,7 @@
           <a:bodyPr wrap="square" lIns="0" tIns="0" rIns="0" bIns="0" rtlCol="0" anchor="t"/>
           <a:lstStyle/>
           <a:p>
-            <a:pPr indent="0" marL="0">
+            <a:pPr marL="0" indent="0">
               <a:buNone/>
             </a:pPr>
             <a:r>
@@ -30159,7 +31455,7 @@
           <a:bodyPr wrap="square" lIns="0" tIns="0" rIns="0" bIns="0" rtlCol="0" anchor="ctr"/>
           <a:lstStyle/>
           <a:p>
-            <a:pPr algn="ctr" indent="0" marL="0">
+            <a:pPr marL="0" indent="0" algn="ctr">
               <a:buNone/>
             </a:pPr>
             <a:r>
@@ -30200,6 +31496,13 @@
             <a:tailEnd type="triangle"/>
           </a:ln>
         </p:spPr>
+        <p:txBody>
+          <a:bodyPr/>
+          <a:lstStyle/>
+          <a:p>
+            <a:endParaRPr lang="zh-TW" altLang="en-US"/>
+          </a:p>
+        </p:txBody>
       </p:sp>
       <p:sp>
         <p:nvSpPr>
@@ -30225,6 +31528,13 @@
             <a:prstDash val="solid"/>
           </a:ln>
         </p:spPr>
+        <p:txBody>
+          <a:bodyPr/>
+          <a:lstStyle/>
+          <a:p>
+            <a:endParaRPr lang="zh-TW" altLang="en-US"/>
+          </a:p>
+        </p:txBody>
       </p:sp>
       <p:sp>
         <p:nvSpPr>
@@ -30250,6 +31560,13 @@
             <a:prstDash val="solid"/>
           </a:ln>
         </p:spPr>
+        <p:txBody>
+          <a:bodyPr/>
+          <a:lstStyle/>
+          <a:p>
+            <a:endParaRPr lang="zh-TW" altLang="en-US"/>
+          </a:p>
+        </p:txBody>
       </p:sp>
       <p:sp>
         <p:nvSpPr>
@@ -30272,7 +31589,7 @@
           <a:bodyPr wrap="square" lIns="0" tIns="0" rIns="0" bIns="0" rtlCol="0" anchor="ctr"/>
           <a:lstStyle/>
           <a:p>
-            <a:pPr algn="ctr" indent="0" marL="0">
+            <a:pPr marL="0" indent="0" algn="ctr">
               <a:buNone/>
             </a:pPr>
             <a:r>
@@ -30311,7 +31628,7 @@
           <a:bodyPr wrap="square" lIns="0" tIns="0" rIns="0" bIns="0" rtlCol="0" anchor="ctr"/>
           <a:lstStyle/>
           <a:p>
-            <a:pPr algn="ctr" indent="0" marL="0">
+            <a:pPr marL="0" indent="0" algn="ctr">
               <a:buNone/>
             </a:pPr>
             <a:r>
@@ -30350,7 +31667,7 @@
           <a:bodyPr wrap="square" lIns="0" tIns="0" rIns="0" bIns="0" rtlCol="0" anchor="t"/>
           <a:lstStyle/>
           <a:p>
-            <a:pPr indent="0" marL="0">
+            <a:pPr marL="0" indent="0">
               <a:buNone/>
             </a:pPr>
             <a:r>
@@ -30391,6 +31708,13 @@
             <a:tailEnd type="triangle"/>
           </a:ln>
         </p:spPr>
+        <p:txBody>
+          <a:bodyPr/>
+          <a:lstStyle/>
+          <a:p>
+            <a:endParaRPr lang="zh-TW" altLang="en-US"/>
+          </a:p>
+        </p:txBody>
       </p:sp>
       <p:sp>
         <p:nvSpPr>
@@ -30416,6 +31740,13 @@
             <a:prstDash val="solid"/>
           </a:ln>
         </p:spPr>
+        <p:txBody>
+          <a:bodyPr/>
+          <a:lstStyle/>
+          <a:p>
+            <a:endParaRPr lang="zh-TW" altLang="en-US"/>
+          </a:p>
+        </p:txBody>
       </p:sp>
       <p:sp>
         <p:nvSpPr>
@@ -30441,6 +31772,13 @@
             <a:prstDash val="solid"/>
           </a:ln>
         </p:spPr>
+        <p:txBody>
+          <a:bodyPr/>
+          <a:lstStyle/>
+          <a:p>
+            <a:endParaRPr lang="zh-TW" altLang="en-US"/>
+          </a:p>
+        </p:txBody>
       </p:sp>
       <p:sp>
         <p:nvSpPr>
@@ -30463,7 +31801,7 @@
           <a:bodyPr wrap="square" lIns="0" tIns="0" rIns="0" bIns="0" rtlCol="0" anchor="ctr"/>
           <a:lstStyle/>
           <a:p>
-            <a:pPr algn="ctr" indent="0" marL="0">
+            <a:pPr marL="0" indent="0" algn="ctr">
               <a:buNone/>
             </a:pPr>
             <a:r>
@@ -30502,7 +31840,7 @@
           <a:bodyPr wrap="square" lIns="0" tIns="0" rIns="0" bIns="0" rtlCol="0" anchor="ctr"/>
           <a:lstStyle/>
           <a:p>
-            <a:pPr algn="ctr" indent="0" marL="0">
+            <a:pPr marL="0" indent="0" algn="ctr">
               <a:buNone/>
             </a:pPr>
             <a:r>
@@ -30541,7 +31879,7 @@
           <a:bodyPr wrap="square" lIns="0" tIns="0" rIns="0" bIns="0" rtlCol="0" anchor="t"/>
           <a:lstStyle/>
           <a:p>
-            <a:pPr indent="0" marL="0">
+            <a:pPr marL="0" indent="0">
               <a:buNone/>
             </a:pPr>
             <a:r>
@@ -30580,7 +31918,7 @@
           <a:bodyPr wrap="square" lIns="0" tIns="0" rIns="0" bIns="0" rtlCol="0" anchor="ctr"/>
           <a:lstStyle/>
           <a:p>
-            <a:pPr algn="ctr" indent="0" marL="0">
+            <a:pPr marL="0" indent="0" algn="ctr">
               <a:buNone/>
             </a:pPr>
             <a:r>
@@ -30621,6 +31959,13 @@
             <a:tailEnd type="triangle"/>
           </a:ln>
         </p:spPr>
+        <p:txBody>
+          <a:bodyPr/>
+          <a:lstStyle/>
+          <a:p>
+            <a:endParaRPr lang="zh-TW" altLang="en-US"/>
+          </a:p>
+        </p:txBody>
       </p:sp>
       <p:sp>
         <p:nvSpPr>
@@ -30646,6 +31991,13 @@
             <a:prstDash val="solid"/>
           </a:ln>
         </p:spPr>
+        <p:txBody>
+          <a:bodyPr/>
+          <a:lstStyle/>
+          <a:p>
+            <a:endParaRPr lang="zh-TW" altLang="en-US"/>
+          </a:p>
+        </p:txBody>
       </p:sp>
       <p:sp>
         <p:nvSpPr>
@@ -30671,6 +32023,13 @@
             <a:prstDash val="solid"/>
           </a:ln>
         </p:spPr>
+        <p:txBody>
+          <a:bodyPr/>
+          <a:lstStyle/>
+          <a:p>
+            <a:endParaRPr lang="zh-TW" altLang="en-US"/>
+          </a:p>
+        </p:txBody>
       </p:sp>
       <p:sp>
         <p:nvSpPr>
@@ -30693,7 +32052,7 @@
           <a:bodyPr wrap="square" lIns="0" tIns="0" rIns="0" bIns="0" rtlCol="0" anchor="ctr"/>
           <a:lstStyle/>
           <a:p>
-            <a:pPr algn="ctr" indent="0" marL="0">
+            <a:pPr marL="0" indent="0" algn="ctr">
               <a:buNone/>
             </a:pPr>
             <a:r>
@@ -30732,7 +32091,7 @@
           <a:bodyPr wrap="square" lIns="0" tIns="0" rIns="0" bIns="0" rtlCol="0" anchor="ctr"/>
           <a:lstStyle/>
           <a:p>
-            <a:pPr algn="ctr" indent="0" marL="0">
+            <a:pPr marL="0" indent="0" algn="ctr">
               <a:buNone/>
             </a:pPr>
             <a:r>
@@ -30771,7 +32130,7 @@
           <a:bodyPr wrap="square" lIns="0" tIns="0" rIns="0" bIns="0" rtlCol="0" anchor="t"/>
           <a:lstStyle/>
           <a:p>
-            <a:pPr indent="0" marL="0">
+            <a:pPr marL="0" indent="0">
               <a:buNone/>
             </a:pPr>
             <a:r>
@@ -30810,7 +32169,7 @@
           <a:bodyPr wrap="square" lIns="0" tIns="0" rIns="0" bIns="0" rtlCol="0" anchor="ctr"/>
           <a:lstStyle/>
           <a:p>
-            <a:pPr algn="ctr" indent="0" marL="0">
+            <a:pPr marL="0" indent="0" algn="ctr">
               <a:buNone/>
             </a:pPr>
             <a:r>
@@ -30851,6 +32210,13 @@
             <a:tailEnd type="triangle"/>
           </a:ln>
         </p:spPr>
+        <p:txBody>
+          <a:bodyPr/>
+          <a:lstStyle/>
+          <a:p>
+            <a:endParaRPr lang="zh-TW" altLang="en-US"/>
+          </a:p>
+        </p:txBody>
       </p:sp>
       <p:sp>
         <p:nvSpPr>
@@ -30876,6 +32242,13 @@
             <a:prstDash val="solid"/>
           </a:ln>
         </p:spPr>
+        <p:txBody>
+          <a:bodyPr/>
+          <a:lstStyle/>
+          <a:p>
+            <a:endParaRPr lang="zh-TW" altLang="en-US"/>
+          </a:p>
+        </p:txBody>
       </p:sp>
       <p:sp>
         <p:nvSpPr>
@@ -30901,6 +32274,13 @@
             <a:prstDash val="solid"/>
           </a:ln>
         </p:spPr>
+        <p:txBody>
+          <a:bodyPr/>
+          <a:lstStyle/>
+          <a:p>
+            <a:endParaRPr lang="zh-TW" altLang="en-US"/>
+          </a:p>
+        </p:txBody>
       </p:sp>
       <p:sp>
         <p:nvSpPr>
@@ -30923,7 +32303,7 @@
           <a:bodyPr wrap="square" lIns="0" tIns="0" rIns="0" bIns="0" rtlCol="0" anchor="ctr"/>
           <a:lstStyle/>
           <a:p>
-            <a:pPr algn="ctr" indent="0" marL="0">
+            <a:pPr marL="0" indent="0" algn="ctr">
               <a:buNone/>
             </a:pPr>
             <a:r>
@@ -30962,7 +32342,7 @@
           <a:bodyPr wrap="square" lIns="0" tIns="0" rIns="0" bIns="0" rtlCol="0" anchor="ctr"/>
           <a:lstStyle/>
           <a:p>
-            <a:pPr algn="ctr" indent="0" marL="0">
+            <a:pPr marL="0" indent="0" algn="ctr">
               <a:buNone/>
             </a:pPr>
             <a:r>
@@ -31001,7 +32381,7 @@
           <a:bodyPr wrap="square" lIns="0" tIns="0" rIns="0" bIns="0" rtlCol="0" anchor="t"/>
           <a:lstStyle/>
           <a:p>
-            <a:pPr indent="0" marL="0">
+            <a:pPr marL="0" indent="0">
               <a:buNone/>
             </a:pPr>
             <a:r>
@@ -31040,7 +32420,7 @@
           <a:bodyPr wrap="square" lIns="0" tIns="0" rIns="0" bIns="0" rtlCol="0" anchor="ctr"/>
           <a:lstStyle/>
           <a:p>
-            <a:pPr algn="ctr" indent="0" marL="0">
+            <a:pPr marL="0" indent="0" algn="ctr">
               <a:buNone/>
             </a:pPr>
             <a:r>
@@ -31081,6 +32461,13 @@
             <a:tailEnd type="triangle"/>
           </a:ln>
         </p:spPr>
+        <p:txBody>
+          <a:bodyPr/>
+          <a:lstStyle/>
+          <a:p>
+            <a:endParaRPr lang="zh-TW" altLang="en-US"/>
+          </a:p>
+        </p:txBody>
       </p:sp>
       <p:sp>
         <p:nvSpPr>
@@ -31106,6 +32493,13 @@
             <a:prstDash val="solid"/>
           </a:ln>
         </p:spPr>
+        <p:txBody>
+          <a:bodyPr/>
+          <a:lstStyle/>
+          <a:p>
+            <a:endParaRPr lang="zh-TW" altLang="en-US"/>
+          </a:p>
+        </p:txBody>
       </p:sp>
       <p:sp>
         <p:nvSpPr>
@@ -31131,6 +32525,13 @@
             <a:prstDash val="solid"/>
           </a:ln>
         </p:spPr>
+        <p:txBody>
+          <a:bodyPr/>
+          <a:lstStyle/>
+          <a:p>
+            <a:endParaRPr lang="zh-TW" altLang="en-US"/>
+          </a:p>
+        </p:txBody>
       </p:sp>
       <p:sp>
         <p:nvSpPr>
@@ -31153,7 +32554,7 @@
           <a:bodyPr wrap="square" lIns="0" tIns="0" rIns="0" bIns="0" rtlCol="0" anchor="ctr"/>
           <a:lstStyle/>
           <a:p>
-            <a:pPr algn="ctr" indent="0" marL="0">
+            <a:pPr marL="0" indent="0" algn="ctr">
               <a:buNone/>
             </a:pPr>
             <a:r>
@@ -31192,7 +32593,7 @@
           <a:bodyPr wrap="square" lIns="0" tIns="0" rIns="0" bIns="0" rtlCol="0" anchor="ctr"/>
           <a:lstStyle/>
           <a:p>
-            <a:pPr algn="ctr" indent="0" marL="0">
+            <a:pPr marL="0" indent="0" algn="ctr">
               <a:buNone/>
             </a:pPr>
             <a:r>
@@ -31231,7 +32632,7 @@
           <a:bodyPr wrap="square" lIns="0" tIns="0" rIns="0" bIns="0" rtlCol="0" anchor="t"/>
           <a:lstStyle/>
           <a:p>
-            <a:pPr indent="0" marL="0">
+            <a:pPr marL="0" indent="0">
               <a:buNone/>
             </a:pPr>
             <a:r>
@@ -31270,7 +32671,7 @@
           <a:bodyPr wrap="square" lIns="0" tIns="0" rIns="0" bIns="0" rtlCol="0" anchor="ctr"/>
           <a:lstStyle/>
           <a:p>
-            <a:pPr indent="0" marL="0">
+            <a:pPr marL="0" indent="0">
               <a:buNone/>
             </a:pPr>
             <a:r>
@@ -31309,7 +32710,7 @@
           <a:bodyPr wrap="square" lIns="0" tIns="0" rIns="0" bIns="0" rtlCol="0" anchor="ctr"/>
           <a:lstStyle/>
           <a:p>
-            <a:pPr indent="0" marL="0">
+            <a:pPr marL="0" indent="0">
               <a:buNone/>
             </a:pPr>
             <a:r>
@@ -31628,4 +33029,319 @@
     </a:ext>
   </a:extLst>
 </a:theme>
+</file>
+
+<file path=ppt/theme/theme2.xml><?xml version="1.0" encoding="utf-8"?>
+<a:theme xmlns:a="http://schemas.openxmlformats.org/drawingml/2006/main" name="Office 佈景主題">
+  <a:themeElements>
+    <a:clrScheme name="Office">
+      <a:dk1>
+        <a:sysClr val="windowText" lastClr="000000"/>
+      </a:dk1>
+      <a:lt1>
+        <a:sysClr val="window" lastClr="FFFFFF"/>
+      </a:lt1>
+      <a:dk2>
+        <a:srgbClr val="0E2841"/>
+      </a:dk2>
+      <a:lt2>
+        <a:srgbClr val="E8E8E8"/>
+      </a:lt2>
+      <a:accent1>
+        <a:srgbClr val="156082"/>
+      </a:accent1>
+      <a:accent2>
+        <a:srgbClr val="E97132"/>
+      </a:accent2>
+      <a:accent3>
+        <a:srgbClr val="196B24"/>
+      </a:accent3>
+      <a:accent4>
+        <a:srgbClr val="0F9ED5"/>
+      </a:accent4>
+      <a:accent5>
+        <a:srgbClr val="A02B93"/>
+      </a:accent5>
+      <a:accent6>
+        <a:srgbClr val="4EA72E"/>
+      </a:accent6>
+      <a:hlink>
+        <a:srgbClr val="467886"/>
+      </a:hlink>
+      <a:folHlink>
+        <a:srgbClr val="96607D"/>
+      </a:folHlink>
+    </a:clrScheme>
+    <a:fontScheme name="Office">
+      <a:majorFont>
+        <a:latin typeface="Aptos Display" panose="02110004020202020204"/>
+        <a:ea typeface=""/>
+        <a:cs typeface=""/>
+        <a:font script="Jpan" typeface="游ゴシック Light"/>
+        <a:font script="Hang" typeface="맑은 고딕"/>
+        <a:font script="Hans" typeface="等线 Light"/>
+        <a:font script="Hant" typeface="新細明體"/>
+        <a:font script="Arab" typeface="Times New Roman"/>
+        <a:font script="Hebr" typeface="Times New Roman"/>
+        <a:font script="Thai" typeface="Angsana New"/>
+        <a:font script="Ethi" typeface="Nyala"/>
+        <a:font script="Beng" typeface="Vrinda"/>
+        <a:font script="Gujr" typeface="Shruti"/>
+        <a:font script="Khmr" typeface="MoolBoran"/>
+        <a:font script="Knda" typeface="Tunga"/>
+        <a:font script="Guru" typeface="Raavi"/>
+        <a:font script="Cans" typeface="Euphemia"/>
+        <a:font script="Cher" typeface="Plantagenet Cherokee"/>
+        <a:font script="Yiii" typeface="Microsoft Yi Baiti"/>
+        <a:font script="Tibt" typeface="Microsoft Himalaya"/>
+        <a:font script="Thaa" typeface="MV Boli"/>
+        <a:font script="Deva" typeface="Mangal"/>
+        <a:font script="Telu" typeface="Gautami"/>
+        <a:font script="Taml" typeface="Latha"/>
+        <a:font script="Syrc" typeface="Estrangelo Edessa"/>
+        <a:font script="Orya" typeface="Kalinga"/>
+        <a:font script="Mlym" typeface="Kartika"/>
+        <a:font script="Laoo" typeface="DokChampa"/>
+        <a:font script="Sinh" typeface="Iskoola Pota"/>
+        <a:font script="Mong" typeface="Mongolian Baiti"/>
+        <a:font script="Viet" typeface="Times New Roman"/>
+        <a:font script="Uigh" typeface="Microsoft Uighur"/>
+        <a:font script="Geor" typeface="Sylfaen"/>
+        <a:font script="Armn" typeface="Arial"/>
+        <a:font script="Bugi" typeface="Leelawadee UI"/>
+        <a:font script="Bopo" typeface="Microsoft JhengHei"/>
+        <a:font script="Java" typeface="Javanese Text"/>
+        <a:font script="Lisu" typeface="Segoe UI"/>
+        <a:font script="Mymr" typeface="Myanmar Text"/>
+        <a:font script="Nkoo" typeface="Ebrima"/>
+        <a:font script="Olck" typeface="Nirmala UI"/>
+        <a:font script="Osma" typeface="Ebrima"/>
+        <a:font script="Phag" typeface="Phagspa"/>
+        <a:font script="Syrn" typeface="Estrangelo Edessa"/>
+        <a:font script="Syrj" typeface="Estrangelo Edessa"/>
+        <a:font script="Syre" typeface="Estrangelo Edessa"/>
+        <a:font script="Sora" typeface="Nirmala UI"/>
+        <a:font script="Tale" typeface="Microsoft Tai Le"/>
+        <a:font script="Talu" typeface="Microsoft New Tai Lue"/>
+        <a:font script="Tfng" typeface="Ebrima"/>
+      </a:majorFont>
+      <a:minorFont>
+        <a:latin typeface="Aptos" panose="02110004020202020204"/>
+        <a:ea typeface=""/>
+        <a:cs typeface=""/>
+        <a:font script="Jpan" typeface="游ゴシック"/>
+        <a:font script="Hang" typeface="맑은 고딕"/>
+        <a:font script="Hans" typeface="等线"/>
+        <a:font script="Hant" typeface="新細明體"/>
+        <a:font script="Arab" typeface="Arial"/>
+        <a:font script="Hebr" typeface="Arial"/>
+        <a:font script="Thai" typeface="Cordia New"/>
+        <a:font script="Ethi" typeface="Nyala"/>
+        <a:font script="Beng" typeface="Vrinda"/>
+        <a:font script="Gujr" typeface="Shruti"/>
+        <a:font script="Khmr" typeface="DaunPenh"/>
+        <a:font script="Knda" typeface="Tunga"/>
+        <a:font script="Guru" typeface="Raavi"/>
+        <a:font script="Cans" typeface="Euphemia"/>
+        <a:font script="Cher" typeface="Plantagenet Cherokee"/>
+        <a:font script="Yiii" typeface="Microsoft Yi Baiti"/>
+        <a:font script="Tibt" typeface="Microsoft Himalaya"/>
+        <a:font script="Thaa" typeface="MV Boli"/>
+        <a:font script="Deva" typeface="Mangal"/>
+        <a:font script="Telu" typeface="Gautami"/>
+        <a:font script="Taml" typeface="Latha"/>
+        <a:font script="Syrc" typeface="Estrangelo Edessa"/>
+        <a:font script="Orya" typeface="Kalinga"/>
+        <a:font script="Mlym" typeface="Kartika"/>
+        <a:font script="Laoo" typeface="DokChampa"/>
+        <a:font script="Sinh" typeface="Iskoola Pota"/>
+        <a:font script="Mong" typeface="Mongolian Baiti"/>
+        <a:font script="Viet" typeface="Arial"/>
+        <a:font script="Uigh" typeface="Microsoft Uighur"/>
+        <a:font script="Geor" typeface="Sylfaen"/>
+        <a:font script="Armn" typeface="Arial"/>
+        <a:font script="Bugi" typeface="Leelawadee UI"/>
+        <a:font script="Bopo" typeface="Microsoft JhengHei"/>
+        <a:font script="Java" typeface="Javanese Text"/>
+        <a:font script="Lisu" typeface="Segoe UI"/>
+        <a:font script="Mymr" typeface="Myanmar Text"/>
+        <a:font script="Nkoo" typeface="Ebrima"/>
+        <a:font script="Olck" typeface="Nirmala UI"/>
+        <a:font script="Osma" typeface="Ebrima"/>
+        <a:font script="Phag" typeface="Phagspa"/>
+        <a:font script="Syrn" typeface="Estrangelo Edessa"/>
+        <a:font script="Syrj" typeface="Estrangelo Edessa"/>
+        <a:font script="Syre" typeface="Estrangelo Edessa"/>
+        <a:font script="Sora" typeface="Nirmala UI"/>
+        <a:font script="Tale" typeface="Microsoft Tai Le"/>
+        <a:font script="Talu" typeface="Microsoft New Tai Lue"/>
+        <a:font script="Tfng" typeface="Ebrima"/>
+      </a:minorFont>
+    </a:fontScheme>
+    <a:fmtScheme name="Office">
+      <a:fillStyleLst>
+        <a:solidFill>
+          <a:schemeClr val="phClr"/>
+        </a:solidFill>
+        <a:gradFill rotWithShape="1">
+          <a:gsLst>
+            <a:gs pos="0">
+              <a:schemeClr val="phClr">
+                <a:lumMod val="110000"/>
+                <a:satMod val="105000"/>
+                <a:tint val="67000"/>
+              </a:schemeClr>
+            </a:gs>
+            <a:gs pos="50000">
+              <a:schemeClr val="phClr">
+                <a:lumMod val="105000"/>
+                <a:satMod val="103000"/>
+                <a:tint val="73000"/>
+              </a:schemeClr>
+            </a:gs>
+            <a:gs pos="100000">
+              <a:schemeClr val="phClr">
+                <a:lumMod val="105000"/>
+                <a:satMod val="109000"/>
+                <a:tint val="81000"/>
+              </a:schemeClr>
+            </a:gs>
+          </a:gsLst>
+          <a:lin ang="5400000" scaled="0"/>
+        </a:gradFill>
+        <a:gradFill rotWithShape="1">
+          <a:gsLst>
+            <a:gs pos="0">
+              <a:schemeClr val="phClr">
+                <a:satMod val="103000"/>
+                <a:lumMod val="102000"/>
+                <a:tint val="94000"/>
+              </a:schemeClr>
+            </a:gs>
+            <a:gs pos="50000">
+              <a:schemeClr val="phClr">
+                <a:satMod val="110000"/>
+                <a:lumMod val="100000"/>
+                <a:shade val="100000"/>
+              </a:schemeClr>
+            </a:gs>
+            <a:gs pos="100000">
+              <a:schemeClr val="phClr">
+                <a:lumMod val="99000"/>
+                <a:satMod val="120000"/>
+                <a:shade val="78000"/>
+              </a:schemeClr>
+            </a:gs>
+          </a:gsLst>
+          <a:lin ang="5400000" scaled="0"/>
+        </a:gradFill>
+      </a:fillStyleLst>
+      <a:lnStyleLst>
+        <a:ln w="12700" cap="flat" cmpd="sng" algn="ctr">
+          <a:solidFill>
+            <a:schemeClr val="phClr"/>
+          </a:solidFill>
+          <a:prstDash val="solid"/>
+          <a:miter lim="800000"/>
+        </a:ln>
+        <a:ln w="19050" cap="flat" cmpd="sng" algn="ctr">
+          <a:solidFill>
+            <a:schemeClr val="phClr"/>
+          </a:solidFill>
+          <a:prstDash val="solid"/>
+          <a:miter lim="800000"/>
+        </a:ln>
+        <a:ln w="25400" cap="flat" cmpd="sng" algn="ctr">
+          <a:solidFill>
+            <a:schemeClr val="phClr"/>
+          </a:solidFill>
+          <a:prstDash val="solid"/>
+          <a:miter lim="800000"/>
+        </a:ln>
+      </a:lnStyleLst>
+      <a:effectStyleLst>
+        <a:effectStyle>
+          <a:effectLst/>
+        </a:effectStyle>
+        <a:effectStyle>
+          <a:effectLst/>
+        </a:effectStyle>
+        <a:effectStyle>
+          <a:effectLst>
+            <a:outerShdw blurRad="57150" dist="19050" dir="5400000" algn="ctr" rotWithShape="0">
+              <a:srgbClr val="000000">
+                <a:alpha val="63000"/>
+              </a:srgbClr>
+            </a:outerShdw>
+          </a:effectLst>
+        </a:effectStyle>
+      </a:effectStyleLst>
+      <a:bgFillStyleLst>
+        <a:solidFill>
+          <a:schemeClr val="phClr"/>
+        </a:solidFill>
+        <a:solidFill>
+          <a:schemeClr val="phClr">
+            <a:tint val="95000"/>
+            <a:satMod val="170000"/>
+          </a:schemeClr>
+        </a:solidFill>
+        <a:gradFill rotWithShape="1">
+          <a:gsLst>
+            <a:gs pos="0">
+              <a:schemeClr val="phClr">
+                <a:tint val="93000"/>
+                <a:satMod val="150000"/>
+                <a:shade val="98000"/>
+                <a:lumMod val="102000"/>
+              </a:schemeClr>
+            </a:gs>
+            <a:gs pos="50000">
+              <a:schemeClr val="phClr">
+                <a:tint val="98000"/>
+                <a:satMod val="130000"/>
+                <a:shade val="90000"/>
+                <a:lumMod val="103000"/>
+              </a:schemeClr>
+            </a:gs>
+            <a:gs pos="100000">
+              <a:schemeClr val="phClr">
+                <a:shade val="63000"/>
+                <a:satMod val="120000"/>
+              </a:schemeClr>
+            </a:gs>
+          </a:gsLst>
+          <a:lin ang="5400000" scaled="0"/>
+        </a:gradFill>
+      </a:bgFillStyleLst>
+    </a:fmtScheme>
+  </a:themeElements>
+  <a:objectDefaults>
+    <a:lnDef>
+      <a:spPr/>
+      <a:bodyPr/>
+      <a:lstStyle/>
+      <a:style>
+        <a:lnRef idx="2">
+          <a:schemeClr val="accent1"/>
+        </a:lnRef>
+        <a:fillRef idx="0">
+          <a:schemeClr val="accent1"/>
+        </a:fillRef>
+        <a:effectRef idx="1">
+          <a:schemeClr val="accent1"/>
+        </a:effectRef>
+        <a:fontRef idx="minor">
+          <a:schemeClr val="tx1"/>
+        </a:fontRef>
+      </a:style>
+    </a:lnDef>
+  </a:objectDefaults>
+  <a:extraClrSchemeLst/>
+  <a:extLst>
+    <a:ext uri="{05A4C25C-085E-4340-85A3-A5531E510DB2}">
+      <thm15:themeFamily xmlns:thm15="http://schemas.microsoft.com/office/thememl/2012/main" name="Office Theme" id="{2E142A2C-CD16-42D6-873A-C26D2A0506FA}" vid="{1BDDFF52-6CD6-40A5-AB3C-68EB2F1E4D0A}"/>
+    </a:ext>
+  </a:extLst>
+</a:theme>
 </file>